--- a/college/Capstone1/AutoInspect-X_Capstone.pptx
+++ b/college/Capstone1/AutoInspect-X_Capstone.pptx
@@ -85,70 +85,7 @@
                 </a:solidFill>
                 <a:latin typeface="Arial"/>
               </a:rPr>
-              <a:t>Cli</a:t>
-            </a:r>
-            <a:r>
-              <a:rPr b="0" lang="en-US" sz="4400" spc="-1" strike="noStrike">
-                <a:solidFill>
-                  <a:srgbClr val="000000"/>
-                </a:solidFill>
-                <a:latin typeface="Arial"/>
-              </a:rPr>
-              <a:t>ck </a:t>
-            </a:r>
-            <a:r>
-              <a:rPr b="0" lang="en-US" sz="4400" spc="-1" strike="noStrike">
-                <a:solidFill>
-                  <a:srgbClr val="000000"/>
-                </a:solidFill>
-                <a:latin typeface="Arial"/>
-              </a:rPr>
-              <a:t>to </a:t>
-            </a:r>
-            <a:r>
-              <a:rPr b="0" lang="en-US" sz="4400" spc="-1" strike="noStrike">
-                <a:solidFill>
-                  <a:srgbClr val="000000"/>
-                </a:solidFill>
-                <a:latin typeface="Arial"/>
-              </a:rPr>
-              <a:t>mo</a:t>
-            </a:r>
-            <a:r>
-              <a:rPr b="0" lang="en-US" sz="4400" spc="-1" strike="noStrike">
-                <a:solidFill>
-                  <a:srgbClr val="000000"/>
-                </a:solidFill>
-                <a:latin typeface="Arial"/>
-              </a:rPr>
-              <a:t>ve </a:t>
-            </a:r>
-            <a:r>
-              <a:rPr b="0" lang="en-US" sz="4400" spc="-1" strike="noStrike">
-                <a:solidFill>
-                  <a:srgbClr val="000000"/>
-                </a:solidFill>
-                <a:latin typeface="Arial"/>
-              </a:rPr>
-              <a:t>the </a:t>
-            </a:r>
-            <a:r>
-              <a:rPr b="0" lang="en-US" sz="4400" spc="-1" strike="noStrike">
-                <a:solidFill>
-                  <a:srgbClr val="000000"/>
-                </a:solidFill>
-                <a:latin typeface="Arial"/>
-              </a:rPr>
-              <a:t>slid</a:t>
-            </a:r>
-            <a:r>
-              <a:rPr b="0" lang="en-US" sz="4400" spc="-1" strike="noStrike">
-                <a:solidFill>
-                  <a:srgbClr val="000000"/>
-                </a:solidFill>
-                <a:latin typeface="Arial"/>
-              </a:rPr>
-              <a:t>e</a:t>
+              <a:t>Click to move the slide</a:t>
             </a:r>
             <a:endParaRPr b="0" lang="en-US" sz="4400" spc="-1" strike="noStrike">
               <a:solidFill>
@@ -197,241 +134,7 @@
                 </a:solidFill>
                 <a:latin typeface="Arial"/>
               </a:rPr>
-              <a:t>Cli</a:t>
-            </a:r>
-            <a:r>
-              <a:rPr b="0" lang="en-US" sz="2000" spc="-1" strike="noStrike">
-                <a:solidFill>
-                  <a:srgbClr val="000000"/>
-                </a:solidFill>
-                <a:latin typeface="Arial"/>
-              </a:rPr>
-              <a:t>c</a:t>
-            </a:r>
-            <a:r>
-              <a:rPr b="0" lang="en-US" sz="2000" spc="-1" strike="noStrike">
-                <a:solidFill>
-                  <a:srgbClr val="000000"/>
-                </a:solidFill>
-                <a:latin typeface="Arial"/>
-              </a:rPr>
-              <a:t>k</a:t>
-            </a:r>
-            <a:r>
-              <a:rPr b="0" lang="en-US" sz="2000" spc="-1" strike="noStrike">
-                <a:solidFill>
-                  <a:srgbClr val="000000"/>
-                </a:solidFill>
-                <a:latin typeface="Arial"/>
-              </a:rPr>
-              <a:t> </a:t>
-            </a:r>
-            <a:r>
-              <a:rPr b="0" lang="en-US" sz="2000" spc="-1" strike="noStrike">
-                <a:solidFill>
-                  <a:srgbClr val="000000"/>
-                </a:solidFill>
-                <a:latin typeface="Arial"/>
-              </a:rPr>
-              <a:t>t</a:t>
-            </a:r>
-            <a:r>
-              <a:rPr b="0" lang="en-US" sz="2000" spc="-1" strike="noStrike">
-                <a:solidFill>
-                  <a:srgbClr val="000000"/>
-                </a:solidFill>
-                <a:latin typeface="Arial"/>
-              </a:rPr>
-              <a:t>o</a:t>
-            </a:r>
-            <a:r>
-              <a:rPr b="0" lang="en-US" sz="2000" spc="-1" strike="noStrike">
-                <a:solidFill>
-                  <a:srgbClr val="000000"/>
-                </a:solidFill>
-                <a:latin typeface="Arial"/>
-              </a:rPr>
-              <a:t> </a:t>
-            </a:r>
-            <a:r>
-              <a:rPr b="0" lang="en-US" sz="2000" spc="-1" strike="noStrike">
-                <a:solidFill>
-                  <a:srgbClr val="000000"/>
-                </a:solidFill>
-                <a:latin typeface="Arial"/>
-              </a:rPr>
-              <a:t>e</a:t>
-            </a:r>
-            <a:r>
-              <a:rPr b="0" lang="en-US" sz="2000" spc="-1" strike="noStrike">
-                <a:solidFill>
-                  <a:srgbClr val="000000"/>
-                </a:solidFill>
-                <a:latin typeface="Arial"/>
-              </a:rPr>
-              <a:t>d</a:t>
-            </a:r>
-            <a:r>
-              <a:rPr b="0" lang="en-US" sz="2000" spc="-1" strike="noStrike">
-                <a:solidFill>
-                  <a:srgbClr val="000000"/>
-                </a:solidFill>
-                <a:latin typeface="Arial"/>
-              </a:rPr>
-              <a:t>i</a:t>
-            </a:r>
-            <a:r>
-              <a:rPr b="0" lang="en-US" sz="2000" spc="-1" strike="noStrike">
-                <a:solidFill>
-                  <a:srgbClr val="000000"/>
-                </a:solidFill>
-                <a:latin typeface="Arial"/>
-              </a:rPr>
-              <a:t>t </a:t>
-            </a:r>
-            <a:r>
-              <a:rPr b="0" lang="en-US" sz="2000" spc="-1" strike="noStrike">
-                <a:solidFill>
-                  <a:srgbClr val="000000"/>
-                </a:solidFill>
-                <a:latin typeface="Arial"/>
-              </a:rPr>
-              <a:t>t</a:t>
-            </a:r>
-            <a:r>
-              <a:rPr b="0" lang="en-US" sz="2000" spc="-1" strike="noStrike">
-                <a:solidFill>
-                  <a:srgbClr val="000000"/>
-                </a:solidFill>
-                <a:latin typeface="Arial"/>
-              </a:rPr>
-              <a:t>h</a:t>
-            </a:r>
-            <a:r>
-              <a:rPr b="0" lang="en-US" sz="2000" spc="-1" strike="noStrike">
-                <a:solidFill>
-                  <a:srgbClr val="000000"/>
-                </a:solidFill>
-                <a:latin typeface="Arial"/>
-              </a:rPr>
-              <a:t>e</a:t>
-            </a:r>
-            <a:r>
-              <a:rPr b="0" lang="en-US" sz="2000" spc="-1" strike="noStrike">
-                <a:solidFill>
-                  <a:srgbClr val="000000"/>
-                </a:solidFill>
-                <a:latin typeface="Arial"/>
-              </a:rPr>
-              <a:t> </a:t>
-            </a:r>
-            <a:r>
-              <a:rPr b="0" lang="en-US" sz="2000" spc="-1" strike="noStrike">
-                <a:solidFill>
-                  <a:srgbClr val="000000"/>
-                </a:solidFill>
-                <a:latin typeface="Arial"/>
-              </a:rPr>
-              <a:t>n</a:t>
-            </a:r>
-            <a:r>
-              <a:rPr b="0" lang="en-US" sz="2000" spc="-1" strike="noStrike">
-                <a:solidFill>
-                  <a:srgbClr val="000000"/>
-                </a:solidFill>
-                <a:latin typeface="Arial"/>
-              </a:rPr>
-              <a:t>o</a:t>
-            </a:r>
-            <a:r>
-              <a:rPr b="0" lang="en-US" sz="2000" spc="-1" strike="noStrike">
-                <a:solidFill>
-                  <a:srgbClr val="000000"/>
-                </a:solidFill>
-                <a:latin typeface="Arial"/>
-              </a:rPr>
-              <a:t>t</a:t>
-            </a:r>
-            <a:r>
-              <a:rPr b="0" lang="en-US" sz="2000" spc="-1" strike="noStrike">
-                <a:solidFill>
-                  <a:srgbClr val="000000"/>
-                </a:solidFill>
-                <a:latin typeface="Arial"/>
-              </a:rPr>
-              <a:t>e</a:t>
-            </a:r>
-            <a:r>
-              <a:rPr b="0" lang="en-US" sz="2000" spc="-1" strike="noStrike">
-                <a:solidFill>
-                  <a:srgbClr val="000000"/>
-                </a:solidFill>
-                <a:latin typeface="Arial"/>
-              </a:rPr>
-              <a:t>s</a:t>
-            </a:r>
-            <a:r>
-              <a:rPr b="0" lang="en-US" sz="2000" spc="-1" strike="noStrike">
-                <a:solidFill>
-                  <a:srgbClr val="000000"/>
-                </a:solidFill>
-                <a:latin typeface="Arial"/>
-              </a:rPr>
-              <a:t> </a:t>
-            </a:r>
-            <a:r>
-              <a:rPr b="0" lang="en-US" sz="2000" spc="-1" strike="noStrike">
-                <a:solidFill>
-                  <a:srgbClr val="000000"/>
-                </a:solidFill>
-                <a:latin typeface="Arial"/>
-              </a:rPr>
-              <a:t>f</a:t>
-            </a:r>
-            <a:r>
-              <a:rPr b="0" lang="en-US" sz="2000" spc="-1" strike="noStrike">
-                <a:solidFill>
-                  <a:srgbClr val="000000"/>
-                </a:solidFill>
-                <a:latin typeface="Arial"/>
-              </a:rPr>
-              <a:t>o</a:t>
-            </a:r>
-            <a:r>
-              <a:rPr b="0" lang="en-US" sz="2000" spc="-1" strike="noStrike">
-                <a:solidFill>
-                  <a:srgbClr val="000000"/>
-                </a:solidFill>
-                <a:latin typeface="Arial"/>
-              </a:rPr>
-              <a:t>r</a:t>
-            </a:r>
-            <a:r>
-              <a:rPr b="0" lang="en-US" sz="2000" spc="-1" strike="noStrike">
-                <a:solidFill>
-                  <a:srgbClr val="000000"/>
-                </a:solidFill>
-                <a:latin typeface="Arial"/>
-              </a:rPr>
-              <a:t>m</a:t>
-            </a:r>
-            <a:r>
-              <a:rPr b="0" lang="en-US" sz="2000" spc="-1" strike="noStrike">
-                <a:solidFill>
-                  <a:srgbClr val="000000"/>
-                </a:solidFill>
-                <a:latin typeface="Arial"/>
-              </a:rPr>
-              <a:t>a</a:t>
-            </a:r>
-            <a:r>
-              <a:rPr b="0" lang="en-US" sz="2000" spc="-1" strike="noStrike">
-                <a:solidFill>
-                  <a:srgbClr val="000000"/>
-                </a:solidFill>
-                <a:latin typeface="Arial"/>
-              </a:rPr>
-              <a:t>t</a:t>
+              <a:t>Click to edit the notes format</a:t>
             </a:r>
             <a:endParaRPr b="0" lang="en-US" sz="2000" spc="-1" strike="noStrike">
               <a:solidFill>
@@ -653,7 +356,7 @@
             <a:pPr indent="0" algn="r">
               <a:buNone/>
             </a:pPr>
-            <a:fld id="{FEF18DAC-FF8E-4424-A6B0-4576C708EBA4}" type="slidenum">
+            <a:fld id="{9F9D3E90-E47A-4637-97F7-F00560508F01}" type="slidenum">
               <a:rPr b="0" lang="en-US" sz="1400" spc="-1" strike="noStrike">
                 <a:solidFill>
                   <a:srgbClr val="000000"/>
@@ -707,7 +410,7 @@
         <p:spPr>
           <a:xfrm>
             <a:off x="685800" y="1143000"/>
-            <a:ext cx="5485680" cy="3085560"/>
+            <a:ext cx="5485320" cy="3085200"/>
           </a:xfrm>
           <a:prstGeom prst="rect">
             <a:avLst/>
@@ -730,7 +433,7 @@
         <p:spPr>
           <a:xfrm>
             <a:off x="685800" y="4400640"/>
-            <a:ext cx="5485680" cy="3599640"/>
+            <a:ext cx="5485320" cy="3599280"/>
           </a:xfrm>
           <a:prstGeom prst="rect">
             <a:avLst/>
@@ -770,7 +473,7 @@
         <p:spPr>
           <a:xfrm>
             <a:off x="3884760" y="8685360"/>
-            <a:ext cx="2971080" cy="457920"/>
+            <a:ext cx="2970720" cy="457560"/>
           </a:xfrm>
           <a:prstGeom prst="rect">
             <a:avLst/>
@@ -812,7 +515,7 @@
                 <a:tab algn="l" pos="0"/>
               </a:tabLst>
             </a:pPr>
-            <a:fld id="{56F8283F-E7AC-4796-B2DF-CC7CE8F6B911}" type="slidenum">
+            <a:fld id="{C2B28AEB-6333-43A6-A41F-4A6A884CBC0A}" type="slidenum">
               <a:rPr b="0" lang="en-US" sz="1200" spc="-1" strike="noStrike">
                 <a:solidFill>
                   <a:schemeClr val="dk1"/>
@@ -866,7 +569,7 @@
         <p:spPr>
           <a:xfrm>
             <a:off x="685800" y="1143000"/>
-            <a:ext cx="5485680" cy="3085560"/>
+            <a:ext cx="5485320" cy="3085200"/>
           </a:xfrm>
           <a:prstGeom prst="rect">
             <a:avLst/>
@@ -889,7 +592,7 @@
         <p:spPr>
           <a:xfrm>
             <a:off x="685800" y="4400640"/>
-            <a:ext cx="5485680" cy="3599640"/>
+            <a:ext cx="5485320" cy="3599280"/>
           </a:xfrm>
           <a:prstGeom prst="rect">
             <a:avLst/>
@@ -929,7 +632,7 @@
         <p:spPr>
           <a:xfrm>
             <a:off x="3884760" y="8685360"/>
-            <a:ext cx="2971080" cy="457920"/>
+            <a:ext cx="2970720" cy="457560"/>
           </a:xfrm>
           <a:prstGeom prst="rect">
             <a:avLst/>
@@ -971,7 +674,7 @@
                 <a:tab algn="l" pos="0"/>
               </a:tabLst>
             </a:pPr>
-            <a:fld id="{EE5180F6-64F6-4745-96E7-C57CD1AEB5F0}" type="slidenum">
+            <a:fld id="{C8F3C1FF-913A-40CD-A289-E21796543859}" type="slidenum">
               <a:rPr b="0" lang="en-US" sz="1200" spc="-1" strike="noStrike">
                 <a:solidFill>
                   <a:schemeClr val="dk1"/>
@@ -1025,7 +728,7 @@
         <p:spPr>
           <a:xfrm>
             <a:off x="685800" y="1143000"/>
-            <a:ext cx="5485680" cy="3085560"/>
+            <a:ext cx="5485320" cy="3085200"/>
           </a:xfrm>
           <a:prstGeom prst="rect">
             <a:avLst/>
@@ -1048,7 +751,7 @@
         <p:spPr>
           <a:xfrm>
             <a:off x="685800" y="4400640"/>
-            <a:ext cx="5485680" cy="3599640"/>
+            <a:ext cx="5485320" cy="3599280"/>
           </a:xfrm>
           <a:prstGeom prst="rect">
             <a:avLst/>
@@ -1088,7 +791,7 @@
         <p:spPr>
           <a:xfrm>
             <a:off x="3884760" y="8685360"/>
-            <a:ext cx="2971080" cy="457920"/>
+            <a:ext cx="2970720" cy="457560"/>
           </a:xfrm>
           <a:prstGeom prst="rect">
             <a:avLst/>
@@ -1130,7 +833,7 @@
                 <a:tab algn="l" pos="0"/>
               </a:tabLst>
             </a:pPr>
-            <a:fld id="{5445B146-0D92-476E-ADA8-EAADB96D45A2}" type="slidenum">
+            <a:fld id="{BA213DDB-F2FB-4DC4-B311-88FB45237D4F}" type="slidenum">
               <a:rPr b="0" lang="en-US" sz="1200" spc="-1" strike="noStrike">
                 <a:solidFill>
                   <a:schemeClr val="dk1"/>
@@ -1184,7 +887,7 @@
         <p:spPr>
           <a:xfrm>
             <a:off x="685800" y="1143000"/>
-            <a:ext cx="5485680" cy="3085560"/>
+            <a:ext cx="5485320" cy="3085200"/>
           </a:xfrm>
           <a:prstGeom prst="rect">
             <a:avLst/>
@@ -1207,7 +910,7 @@
         <p:spPr>
           <a:xfrm>
             <a:off x="685800" y="4400640"/>
-            <a:ext cx="5485680" cy="3599640"/>
+            <a:ext cx="5485320" cy="3599280"/>
           </a:xfrm>
           <a:prstGeom prst="rect">
             <a:avLst/>
@@ -1247,7 +950,7 @@
         <p:spPr>
           <a:xfrm>
             <a:off x="3884760" y="8685360"/>
-            <a:ext cx="2971080" cy="457920"/>
+            <a:ext cx="2970720" cy="457560"/>
           </a:xfrm>
           <a:prstGeom prst="rect">
             <a:avLst/>
@@ -1289,7 +992,7 @@
                 <a:tab algn="l" pos="0"/>
               </a:tabLst>
             </a:pPr>
-            <a:fld id="{4666D2ED-E64B-44F5-9320-81FA421573B9}" type="slidenum">
+            <a:fld id="{8D49BEAE-AB38-420F-8EB4-D240BB776C0C}" type="slidenum">
               <a:rPr b="0" lang="en-US" sz="1200" spc="-1" strike="noStrike">
                 <a:solidFill>
                   <a:schemeClr val="dk1"/>
@@ -1343,7 +1046,7 @@
         <p:spPr>
           <a:xfrm>
             <a:off x="685800" y="1143000"/>
-            <a:ext cx="5485680" cy="3085560"/>
+            <a:ext cx="5485320" cy="3085200"/>
           </a:xfrm>
           <a:prstGeom prst="rect">
             <a:avLst/>
@@ -1366,7 +1069,7 @@
         <p:spPr>
           <a:xfrm>
             <a:off x="685800" y="4400640"/>
-            <a:ext cx="5485680" cy="3599640"/>
+            <a:ext cx="5485320" cy="3599280"/>
           </a:xfrm>
           <a:prstGeom prst="rect">
             <a:avLst/>
@@ -1406,7 +1109,7 @@
         <p:spPr>
           <a:xfrm>
             <a:off x="3884760" y="8685360"/>
-            <a:ext cx="2971080" cy="457920"/>
+            <a:ext cx="2970720" cy="457560"/>
           </a:xfrm>
           <a:prstGeom prst="rect">
             <a:avLst/>
@@ -1448,7 +1151,7 @@
                 <a:tab algn="l" pos="0"/>
               </a:tabLst>
             </a:pPr>
-            <a:fld id="{6F9981FF-8EC5-43B1-9F54-E39D2D2A3F13}" type="slidenum">
+            <a:fld id="{38BDFEE8-1A87-4819-A6D5-1FDFB622AD9A}" type="slidenum">
               <a:rPr b="0" lang="en-US" sz="1200" spc="-1" strike="noStrike">
                 <a:solidFill>
                   <a:schemeClr val="dk1"/>
@@ -1502,7 +1205,7 @@
         <p:spPr>
           <a:xfrm>
             <a:off x="685800" y="1143000"/>
-            <a:ext cx="5485680" cy="3085560"/>
+            <a:ext cx="5485320" cy="3085200"/>
           </a:xfrm>
           <a:prstGeom prst="rect">
             <a:avLst/>
@@ -1525,7 +1228,7 @@
         <p:spPr>
           <a:xfrm>
             <a:off x="685800" y="4400640"/>
-            <a:ext cx="5485680" cy="3599640"/>
+            <a:ext cx="5485320" cy="3599280"/>
           </a:xfrm>
           <a:prstGeom prst="rect">
             <a:avLst/>
@@ -1565,7 +1268,7 @@
         <p:spPr>
           <a:xfrm>
             <a:off x="3884760" y="8685360"/>
-            <a:ext cx="2971080" cy="457920"/>
+            <a:ext cx="2970720" cy="457560"/>
           </a:xfrm>
           <a:prstGeom prst="rect">
             <a:avLst/>
@@ -1607,7 +1310,7 @@
                 <a:tab algn="l" pos="0"/>
               </a:tabLst>
             </a:pPr>
-            <a:fld id="{B78FFE19-2E81-4B45-89CC-7FAD3C69D47F}" type="slidenum">
+            <a:fld id="{597522A7-2BE1-4BE3-A9FE-9D5BA94834B0}" type="slidenum">
               <a:rPr b="0" lang="en-US" sz="1200" spc="-1" strike="noStrike">
                 <a:solidFill>
                   <a:schemeClr val="dk1"/>
@@ -1661,7 +1364,7 @@
         <p:spPr>
           <a:xfrm>
             <a:off x="685800" y="1143000"/>
-            <a:ext cx="5485680" cy="3085560"/>
+            <a:ext cx="5485320" cy="3085200"/>
           </a:xfrm>
           <a:prstGeom prst="rect">
             <a:avLst/>
@@ -1684,7 +1387,7 @@
         <p:spPr>
           <a:xfrm>
             <a:off x="685800" y="4400640"/>
-            <a:ext cx="5485680" cy="3599640"/>
+            <a:ext cx="5485320" cy="3599280"/>
           </a:xfrm>
           <a:prstGeom prst="rect">
             <a:avLst/>
@@ -1724,7 +1427,7 @@
         <p:spPr>
           <a:xfrm>
             <a:off x="3884760" y="8685360"/>
-            <a:ext cx="2971080" cy="457920"/>
+            <a:ext cx="2970720" cy="457560"/>
           </a:xfrm>
           <a:prstGeom prst="rect">
             <a:avLst/>
@@ -1766,7 +1469,7 @@
                 <a:tab algn="l" pos="0"/>
               </a:tabLst>
             </a:pPr>
-            <a:fld id="{56FA6437-EFB3-4886-B0D6-752CCB334474}" type="slidenum">
+            <a:fld id="{F865E47F-70FC-4803-8BAE-A3BCAEE3CDA6}" type="slidenum">
               <a:rPr b="0" lang="en-US" sz="1200" spc="-1" strike="noStrike">
                 <a:solidFill>
                   <a:schemeClr val="dk1"/>
@@ -1820,7 +1523,7 @@
         <p:spPr>
           <a:xfrm>
             <a:off x="685800" y="1143000"/>
-            <a:ext cx="5485680" cy="3085560"/>
+            <a:ext cx="5485320" cy="3085200"/>
           </a:xfrm>
           <a:prstGeom prst="rect">
             <a:avLst/>
@@ -1843,7 +1546,7 @@
         <p:spPr>
           <a:xfrm>
             <a:off x="685800" y="4400640"/>
-            <a:ext cx="5485680" cy="3599640"/>
+            <a:ext cx="5485320" cy="3599280"/>
           </a:xfrm>
           <a:prstGeom prst="rect">
             <a:avLst/>
@@ -1883,7 +1586,7 @@
         <p:spPr>
           <a:xfrm>
             <a:off x="3884760" y="8685360"/>
-            <a:ext cx="2971080" cy="457920"/>
+            <a:ext cx="2970720" cy="457560"/>
           </a:xfrm>
           <a:prstGeom prst="rect">
             <a:avLst/>
@@ -1925,7 +1628,7 @@
                 <a:tab algn="l" pos="0"/>
               </a:tabLst>
             </a:pPr>
-            <a:fld id="{2FF1BC85-6EB8-4C15-B332-9A57E530BC32}" type="slidenum">
+            <a:fld id="{3C0CECBE-E9F0-447B-9C4A-6C7DAD8CE9D6}" type="slidenum">
               <a:rPr b="0" lang="en-US" sz="1200" spc="-1" strike="noStrike">
                 <a:solidFill>
                   <a:schemeClr val="dk1"/>
@@ -1979,7 +1682,7 @@
         <p:spPr>
           <a:xfrm>
             <a:off x="685800" y="1143000"/>
-            <a:ext cx="5485680" cy="3085560"/>
+            <a:ext cx="5485320" cy="3085200"/>
           </a:xfrm>
           <a:prstGeom prst="rect">
             <a:avLst/>
@@ -2002,7 +1705,7 @@
         <p:spPr>
           <a:xfrm>
             <a:off x="685800" y="4400640"/>
-            <a:ext cx="5485680" cy="3599640"/>
+            <a:ext cx="5485320" cy="3599280"/>
           </a:xfrm>
           <a:prstGeom prst="rect">
             <a:avLst/>
@@ -2042,7 +1745,7 @@
         <p:spPr>
           <a:xfrm>
             <a:off x="3884760" y="8685360"/>
-            <a:ext cx="2971080" cy="457920"/>
+            <a:ext cx="2970720" cy="457560"/>
           </a:xfrm>
           <a:prstGeom prst="rect">
             <a:avLst/>
@@ -2084,7 +1787,7 @@
                 <a:tab algn="l" pos="0"/>
               </a:tabLst>
             </a:pPr>
-            <a:fld id="{9537B0AD-2CF7-4EAE-8C3C-CC19B0E3FF7A}" type="slidenum">
+            <a:fld id="{72559B65-CE8B-49F5-83C9-C9315B1FFAC3}" type="slidenum">
               <a:rPr b="0" lang="en-US" sz="1200" spc="-1" strike="noStrike">
                 <a:solidFill>
                   <a:schemeClr val="dk1"/>
@@ -2138,7 +1841,7 @@
         <p:spPr>
           <a:xfrm>
             <a:off x="685800" y="1143000"/>
-            <a:ext cx="5485680" cy="3085560"/>
+            <a:ext cx="5485320" cy="3085200"/>
           </a:xfrm>
           <a:prstGeom prst="rect">
             <a:avLst/>
@@ -2161,7 +1864,7 @@
         <p:spPr>
           <a:xfrm>
             <a:off x="685800" y="4400640"/>
-            <a:ext cx="5485680" cy="3599640"/>
+            <a:ext cx="5485320" cy="3599280"/>
           </a:xfrm>
           <a:prstGeom prst="rect">
             <a:avLst/>
@@ -2201,7 +1904,7 @@
         <p:spPr>
           <a:xfrm>
             <a:off x="3884760" y="8685360"/>
-            <a:ext cx="2971080" cy="457920"/>
+            <a:ext cx="2970720" cy="457560"/>
           </a:xfrm>
           <a:prstGeom prst="rect">
             <a:avLst/>
@@ -2243,7 +1946,7 @@
                 <a:tab algn="l" pos="0"/>
               </a:tabLst>
             </a:pPr>
-            <a:fld id="{46FB06EB-08E5-4DF1-AF19-F3A28F0E207C}" type="slidenum">
+            <a:fld id="{B8B1AF5D-4730-449A-9F24-49C75F7CDDCA}" type="slidenum">
               <a:rPr b="0" lang="en-US" sz="1200" spc="-1" strike="noStrike">
                 <a:solidFill>
                   <a:schemeClr val="dk1"/>
@@ -2297,7 +2000,7 @@
         <p:spPr>
           <a:xfrm>
             <a:off x="685800" y="1143000"/>
-            <a:ext cx="5485680" cy="3085560"/>
+            <a:ext cx="5485320" cy="3085200"/>
           </a:xfrm>
           <a:prstGeom prst="rect">
             <a:avLst/>
@@ -2320,7 +2023,7 @@
         <p:spPr>
           <a:xfrm>
             <a:off x="685800" y="4400640"/>
-            <a:ext cx="5485680" cy="3599640"/>
+            <a:ext cx="5485320" cy="3599280"/>
           </a:xfrm>
           <a:prstGeom prst="rect">
             <a:avLst/>
@@ -2360,7 +2063,7 @@
         <p:spPr>
           <a:xfrm>
             <a:off x="3884760" y="8685360"/>
-            <a:ext cx="2971080" cy="457920"/>
+            <a:ext cx="2970720" cy="457560"/>
           </a:xfrm>
           <a:prstGeom prst="rect">
             <a:avLst/>
@@ -2402,7 +2105,7 @@
                 <a:tab algn="l" pos="0"/>
               </a:tabLst>
             </a:pPr>
-            <a:fld id="{C3A24BAE-FB4C-4C70-8A55-548EB9EA23E7}" type="slidenum">
+            <a:fld id="{95C8B8FB-54C0-429E-82FC-12A1669D9AF1}" type="slidenum">
               <a:rPr b="0" lang="en-US" sz="1200" spc="-1" strike="noStrike">
                 <a:solidFill>
                   <a:schemeClr val="dk1"/>
@@ -2456,7 +2159,7 @@
         <p:spPr>
           <a:xfrm>
             <a:off x="685800" y="1143000"/>
-            <a:ext cx="5485680" cy="3085560"/>
+            <a:ext cx="5485320" cy="3085200"/>
           </a:xfrm>
           <a:prstGeom prst="rect">
             <a:avLst/>
@@ -2479,7 +2182,7 @@
         <p:spPr>
           <a:xfrm>
             <a:off x="685800" y="4400640"/>
-            <a:ext cx="5485680" cy="3599640"/>
+            <a:ext cx="5485320" cy="3599280"/>
           </a:xfrm>
           <a:prstGeom prst="rect">
             <a:avLst/>
@@ -2519,7 +2222,7 @@
         <p:spPr>
           <a:xfrm>
             <a:off x="3884760" y="8685360"/>
-            <a:ext cx="2971080" cy="457920"/>
+            <a:ext cx="2970720" cy="457560"/>
           </a:xfrm>
           <a:prstGeom prst="rect">
             <a:avLst/>
@@ -2561,7 +2264,7 @@
                 <a:tab algn="l" pos="0"/>
               </a:tabLst>
             </a:pPr>
-            <a:fld id="{E16C70AC-0E33-4940-B56C-A56C04309898}" type="slidenum">
+            <a:fld id="{828C1338-77DC-4208-A1E4-96240B3E3738}" type="slidenum">
               <a:rPr b="0" lang="en-US" sz="1200" spc="-1" strike="noStrike">
                 <a:solidFill>
                   <a:schemeClr val="dk1"/>
@@ -2615,7 +2318,7 @@
         <p:spPr>
           <a:xfrm>
             <a:off x="685800" y="1143000"/>
-            <a:ext cx="5485680" cy="3085560"/>
+            <a:ext cx="5485320" cy="3085200"/>
           </a:xfrm>
           <a:prstGeom prst="rect">
             <a:avLst/>
@@ -2638,7 +2341,7 @@
         <p:spPr>
           <a:xfrm>
             <a:off x="685800" y="4400640"/>
-            <a:ext cx="5485680" cy="3599640"/>
+            <a:ext cx="5485320" cy="3599280"/>
           </a:xfrm>
           <a:prstGeom prst="rect">
             <a:avLst/>
@@ -2678,7 +2381,7 @@
         <p:spPr>
           <a:xfrm>
             <a:off x="3884760" y="8685360"/>
-            <a:ext cx="2971080" cy="457920"/>
+            <a:ext cx="2970720" cy="457560"/>
           </a:xfrm>
           <a:prstGeom prst="rect">
             <a:avLst/>
@@ -2720,7 +2423,7 @@
                 <a:tab algn="l" pos="0"/>
               </a:tabLst>
             </a:pPr>
-            <a:fld id="{1773ED64-0187-45B8-B75B-A5DEB4177380}" type="slidenum">
+            <a:fld id="{EB90FD49-E620-4F2E-A5A1-A4FB1C51C8EE}" type="slidenum">
               <a:rPr b="0" lang="en-US" sz="1200" spc="-1" strike="noStrike">
                 <a:solidFill>
                   <a:schemeClr val="dk1"/>
@@ -2774,7 +2477,7 @@
         <p:spPr>
           <a:xfrm>
             <a:off x="685800" y="1143000"/>
-            <a:ext cx="5485680" cy="3085560"/>
+            <a:ext cx="5485320" cy="3085200"/>
           </a:xfrm>
           <a:prstGeom prst="rect">
             <a:avLst/>
@@ -2797,7 +2500,7 @@
         <p:spPr>
           <a:xfrm>
             <a:off x="685800" y="4400640"/>
-            <a:ext cx="5485680" cy="3599640"/>
+            <a:ext cx="5485320" cy="3599280"/>
           </a:xfrm>
           <a:prstGeom prst="rect">
             <a:avLst/>
@@ -2837,7 +2540,7 @@
         <p:spPr>
           <a:xfrm>
             <a:off x="3884760" y="8685360"/>
-            <a:ext cx="2971080" cy="457920"/>
+            <a:ext cx="2970720" cy="457560"/>
           </a:xfrm>
           <a:prstGeom prst="rect">
             <a:avLst/>
@@ -2879,7 +2582,7 @@
                 <a:tab algn="l" pos="0"/>
               </a:tabLst>
             </a:pPr>
-            <a:fld id="{F2F07BED-CC77-4D22-8C13-9E3BCDD3C31A}" type="slidenum">
+            <a:fld id="{C2C53F9C-E57C-4F0A-B1CD-FDF1EF9AA596}" type="slidenum">
               <a:rPr b="0" lang="en-US" sz="1200" spc="-1" strike="noStrike">
                 <a:solidFill>
                   <a:schemeClr val="dk1"/>
@@ -2933,7 +2636,7 @@
         <p:spPr>
           <a:xfrm>
             <a:off x="685800" y="1143000"/>
-            <a:ext cx="5485680" cy="3085560"/>
+            <a:ext cx="5485320" cy="3085200"/>
           </a:xfrm>
           <a:prstGeom prst="rect">
             <a:avLst/>
@@ -2956,7 +2659,7 @@
         <p:spPr>
           <a:xfrm>
             <a:off x="685800" y="4400640"/>
-            <a:ext cx="5485680" cy="3599640"/>
+            <a:ext cx="5485320" cy="3599280"/>
           </a:xfrm>
           <a:prstGeom prst="rect">
             <a:avLst/>
@@ -2996,7 +2699,7 @@
         <p:spPr>
           <a:xfrm>
             <a:off x="3884760" y="8685360"/>
-            <a:ext cx="2971080" cy="457920"/>
+            <a:ext cx="2970720" cy="457560"/>
           </a:xfrm>
           <a:prstGeom prst="rect">
             <a:avLst/>
@@ -3038,7 +2741,7 @@
                 <a:tab algn="l" pos="0"/>
               </a:tabLst>
             </a:pPr>
-            <a:fld id="{B5CAF5F7-41BA-4C39-9AC4-EA47C18A9A3D}" type="slidenum">
+            <a:fld id="{B77AD393-34AD-4C2F-A819-40D8340B81D6}" type="slidenum">
               <a:rPr b="0" lang="en-US" sz="1200" spc="-1" strike="noStrike">
                 <a:solidFill>
                   <a:schemeClr val="dk1"/>
@@ -3092,7 +2795,7 @@
         <p:spPr>
           <a:xfrm>
             <a:off x="685800" y="1143000"/>
-            <a:ext cx="5485680" cy="3085560"/>
+            <a:ext cx="5485320" cy="3085200"/>
           </a:xfrm>
           <a:prstGeom prst="rect">
             <a:avLst/>
@@ -3115,7 +2818,7 @@
         <p:spPr>
           <a:xfrm>
             <a:off x="685800" y="4400640"/>
-            <a:ext cx="5485680" cy="3599640"/>
+            <a:ext cx="5485320" cy="3599280"/>
           </a:xfrm>
           <a:prstGeom prst="rect">
             <a:avLst/>
@@ -3155,7 +2858,7 @@
         <p:spPr>
           <a:xfrm>
             <a:off x="3884760" y="8685360"/>
-            <a:ext cx="2971080" cy="457920"/>
+            <a:ext cx="2970720" cy="457560"/>
           </a:xfrm>
           <a:prstGeom prst="rect">
             <a:avLst/>
@@ -3197,7 +2900,7 @@
                 <a:tab algn="l" pos="0"/>
               </a:tabLst>
             </a:pPr>
-            <a:fld id="{8046B699-2F03-48E5-A266-2494E74B6864}" type="slidenum">
+            <a:fld id="{E266CC84-2186-4EB4-8043-1FDA454BE09A}" type="slidenum">
               <a:rPr b="0" lang="en-US" sz="1200" spc="-1" strike="noStrike">
                 <a:solidFill>
                   <a:schemeClr val="dk1"/>
@@ -3251,7 +2954,7 @@
         <p:spPr>
           <a:xfrm>
             <a:off x="685800" y="1143000"/>
-            <a:ext cx="5485680" cy="3085560"/>
+            <a:ext cx="5485320" cy="3085200"/>
           </a:xfrm>
           <a:prstGeom prst="rect">
             <a:avLst/>
@@ -3274,7 +2977,7 @@
         <p:spPr>
           <a:xfrm>
             <a:off x="685800" y="4400640"/>
-            <a:ext cx="5485680" cy="3599640"/>
+            <a:ext cx="5485320" cy="3599280"/>
           </a:xfrm>
           <a:prstGeom prst="rect">
             <a:avLst/>
@@ -3314,7 +3017,7 @@
         <p:spPr>
           <a:xfrm>
             <a:off x="3884760" y="8685360"/>
-            <a:ext cx="2971080" cy="457920"/>
+            <a:ext cx="2970720" cy="457560"/>
           </a:xfrm>
           <a:prstGeom prst="rect">
             <a:avLst/>
@@ -3356,7 +3059,7 @@
                 <a:tab algn="l" pos="0"/>
               </a:tabLst>
             </a:pPr>
-            <a:fld id="{01686D53-DC35-4191-92A5-7E16B49AC697}" type="slidenum">
+            <a:fld id="{04212325-588D-4D20-A62E-24F204BCB666}" type="slidenum">
               <a:rPr b="0" lang="en-US" sz="1200" spc="-1" strike="noStrike">
                 <a:solidFill>
                   <a:schemeClr val="dk1"/>
@@ -3433,7 +3136,7 @@
         <p:txBody>
           <a:bodyPr/>
           <a:p>
-            <a:fld id="{9835BC4C-7EDA-42B3-B5C9-C3CA6AF2A9B5}" type="slidenum">
+            <a:fld id="{24D52B40-2DF8-4F57-AB3C-AD7FF100C0CB}" type="slidenum">
               <a:t>&lt;#&gt;</a:t>
             </a:fld>
           </a:p>
@@ -3506,70 +3209,7 @@
                 </a:solidFill>
                 <a:latin typeface="Arial"/>
               </a:rPr>
-              <a:t>Click </a:t>
-            </a:r>
-            <a:r>
-              <a:rPr b="0" lang="en-US" sz="4400" spc="-1" strike="noStrike">
-                <a:solidFill>
-                  <a:srgbClr val="000000"/>
-                </a:solidFill>
-                <a:latin typeface="Arial"/>
-              </a:rPr>
-              <a:t>to </a:t>
-            </a:r>
-            <a:r>
-              <a:rPr b="0" lang="en-US" sz="4400" spc="-1" strike="noStrike">
-                <a:solidFill>
-                  <a:srgbClr val="000000"/>
-                </a:solidFill>
-                <a:latin typeface="Arial"/>
-              </a:rPr>
-              <a:t>edit </a:t>
-            </a:r>
-            <a:r>
-              <a:rPr b="0" lang="en-US" sz="4400" spc="-1" strike="noStrike">
-                <a:solidFill>
-                  <a:srgbClr val="000000"/>
-                </a:solidFill>
-                <a:latin typeface="Arial"/>
-              </a:rPr>
-              <a:t>the </a:t>
-            </a:r>
-            <a:r>
-              <a:rPr b="0" lang="en-US" sz="4400" spc="-1" strike="noStrike">
-                <a:solidFill>
-                  <a:srgbClr val="000000"/>
-                </a:solidFill>
-                <a:latin typeface="Arial"/>
-              </a:rPr>
-              <a:t>title </a:t>
-            </a:r>
-            <a:r>
-              <a:rPr b="0" lang="en-US" sz="4400" spc="-1" strike="noStrike">
-                <a:solidFill>
-                  <a:srgbClr val="000000"/>
-                </a:solidFill>
-                <a:latin typeface="Arial"/>
-              </a:rPr>
-              <a:t>text </a:t>
-            </a:r>
-            <a:r>
-              <a:rPr b="0" lang="en-US" sz="4400" spc="-1" strike="noStrike">
-                <a:solidFill>
-                  <a:srgbClr val="000000"/>
-                </a:solidFill>
-                <a:latin typeface="Arial"/>
-              </a:rPr>
-              <a:t>form</a:t>
-            </a:r>
-            <a:r>
-              <a:rPr b="0" lang="en-US" sz="4400" spc="-1" strike="noStrike">
-                <a:solidFill>
-                  <a:srgbClr val="000000"/>
-                </a:solidFill>
-                <a:latin typeface="Arial"/>
-              </a:rPr>
-              <a:t>at</a:t>
+              <a:t>Click to edit the title text format</a:t>
             </a:r>
             <a:endParaRPr b="0" lang="en-US" sz="4400" spc="-1" strike="noStrike">
               <a:solidFill>
@@ -3847,7 +3487,7 @@
         <p:spPr>
           <a:xfrm>
             <a:off x="0" y="0"/>
-            <a:ext cx="12191040" cy="72360"/>
+            <a:ext cx="12190680" cy="72000"/>
           </a:xfrm>
           <a:prstGeom prst="rect">
             <a:avLst/>
@@ -3937,7 +3577,7 @@
         <p:spPr>
           <a:xfrm>
             <a:off x="567000" y="6602040"/>
-            <a:ext cx="2010960" cy="163800"/>
+            <a:ext cx="2010600" cy="163440"/>
           </a:xfrm>
           <a:prstGeom prst="rect">
             <a:avLst/>
@@ -3994,7 +3634,7 @@
         <p:spPr>
           <a:xfrm>
             <a:off x="4663440" y="6602040"/>
-            <a:ext cx="2925360" cy="163800"/>
+            <a:ext cx="2925000" cy="163440"/>
           </a:xfrm>
           <a:prstGeom prst="rect">
             <a:avLst/>
@@ -4055,7 +3695,7 @@
         <p:spPr>
           <a:xfrm>
             <a:off x="11292840" y="6574680"/>
-            <a:ext cx="799200" cy="299160"/>
+            <a:ext cx="798840" cy="298800"/>
           </a:xfrm>
           <a:prstGeom prst="rect">
             <a:avLst/>
@@ -4097,7 +3737,7 @@
                 <a:tab algn="l" pos="0"/>
               </a:tabLst>
             </a:pPr>
-            <a:fld id="{D2C235E9-8D62-4BF3-8CAB-D675A2A2CE4D}" type="slidenum">
+            <a:fld id="{F35AE902-37F7-4270-B9F5-2D4E789B55D4}" type="slidenum">
               <a:rPr b="0" lang="en-US" sz="850" spc="-1" strike="noStrike">
                 <a:solidFill>
                   <a:srgbClr val="7b8494"/>
@@ -4154,70 +3794,7 @@
                 </a:solidFill>
                 <a:latin typeface="Arial"/>
               </a:rPr>
-              <a:t>Click </a:t>
-            </a:r>
-            <a:r>
-              <a:rPr b="0" lang="en-US" sz="4400" spc="-1" strike="noStrike">
-                <a:solidFill>
-                  <a:srgbClr val="000000"/>
-                </a:solidFill>
-                <a:latin typeface="Arial"/>
-              </a:rPr>
-              <a:t>to </a:t>
-            </a:r>
-            <a:r>
-              <a:rPr b="0" lang="en-US" sz="4400" spc="-1" strike="noStrike">
-                <a:solidFill>
-                  <a:srgbClr val="000000"/>
-                </a:solidFill>
-                <a:latin typeface="Arial"/>
-              </a:rPr>
-              <a:t>edit </a:t>
-            </a:r>
-            <a:r>
-              <a:rPr b="0" lang="en-US" sz="4400" spc="-1" strike="noStrike">
-                <a:solidFill>
-                  <a:srgbClr val="000000"/>
-                </a:solidFill>
-                <a:latin typeface="Arial"/>
-              </a:rPr>
-              <a:t>the </a:t>
-            </a:r>
-            <a:r>
-              <a:rPr b="0" lang="en-US" sz="4400" spc="-1" strike="noStrike">
-                <a:solidFill>
-                  <a:srgbClr val="000000"/>
-                </a:solidFill>
-                <a:latin typeface="Arial"/>
-              </a:rPr>
-              <a:t>title </a:t>
-            </a:r>
-            <a:r>
-              <a:rPr b="0" lang="en-US" sz="4400" spc="-1" strike="noStrike">
-                <a:solidFill>
-                  <a:srgbClr val="000000"/>
-                </a:solidFill>
-                <a:latin typeface="Arial"/>
-              </a:rPr>
-              <a:t>text </a:t>
-            </a:r>
-            <a:r>
-              <a:rPr b="0" lang="en-US" sz="4400" spc="-1" strike="noStrike">
-                <a:solidFill>
-                  <a:srgbClr val="000000"/>
-                </a:solidFill>
-                <a:latin typeface="Arial"/>
-              </a:rPr>
-              <a:t>form</a:t>
-            </a:r>
-            <a:r>
-              <a:rPr b="0" lang="en-US" sz="4400" spc="-1" strike="noStrike">
-                <a:solidFill>
-                  <a:srgbClr val="000000"/>
-                </a:solidFill>
-                <a:latin typeface="Arial"/>
-              </a:rPr>
-              <a:t>at</a:t>
+              <a:t>Click to edit the title text format</a:t>
             </a:r>
             <a:endParaRPr b="0" lang="en-US" sz="4400" spc="-1" strike="noStrike">
               <a:solidFill>
@@ -4495,7 +4072,7 @@
         <p:spPr>
           <a:xfrm>
             <a:off x="8869680" y="-731520"/>
-            <a:ext cx="3748320" cy="3748320"/>
+            <a:ext cx="3747960" cy="3747960"/>
           </a:xfrm>
           <a:prstGeom prst="arc">
             <a:avLst>
@@ -4547,7 +4124,7 @@
         <p:spPr>
           <a:xfrm>
             <a:off x="9555480" y="228600"/>
-            <a:ext cx="2833920" cy="2833920"/>
+            <a:ext cx="2833560" cy="2833560"/>
           </a:xfrm>
           <a:prstGeom prst="arc">
             <a:avLst>
@@ -4599,7 +4176,7 @@
         <p:spPr>
           <a:xfrm>
             <a:off x="676800" y="530280"/>
-            <a:ext cx="3656880" cy="410760"/>
+            <a:ext cx="3656520" cy="410400"/>
           </a:xfrm>
           <a:prstGeom prst="rect">
             <a:avLst/>
@@ -4655,7 +4232,7 @@
         <p:spPr>
           <a:xfrm>
             <a:off x="676800" y="941760"/>
-            <a:ext cx="2294640" cy="200880"/>
+            <a:ext cx="2294280" cy="200520"/>
           </a:xfrm>
           <a:prstGeom prst="rect">
             <a:avLst/>
@@ -4711,7 +4288,7 @@
         <p:spPr>
           <a:xfrm>
             <a:off x="676800" y="1417320"/>
-            <a:ext cx="6400080" cy="1736640"/>
+            <a:ext cx="6399720" cy="1736280"/>
           </a:xfrm>
           <a:prstGeom prst="rect">
             <a:avLst/>
@@ -4820,7 +4397,7 @@
         <p:spPr>
           <a:xfrm>
             <a:off x="713160" y="3355920"/>
-            <a:ext cx="6491520" cy="474840"/>
+            <a:ext cx="6491160" cy="474480"/>
           </a:xfrm>
           <a:prstGeom prst="rect">
             <a:avLst/>
@@ -4876,7 +4453,7 @@
         <p:spPr>
           <a:xfrm>
             <a:off x="713160" y="4160520"/>
-            <a:ext cx="730800" cy="182160"/>
+            <a:ext cx="730440" cy="181800"/>
           </a:xfrm>
           <a:prstGeom prst="rect">
             <a:avLst/>
@@ -4906,7 +4483,7 @@
               </a:tabLst>
             </a:pPr>
             <a:r>
-              <a:rPr b="1" lang="en-US" sz="850" spc="114" strike="noStrike">
+              <a:rPr b="1" lang="en-US" sz="850" spc="111" strike="noStrike">
                 <a:solidFill>
                   <a:srgbClr val="7fa1d6"/>
                 </a:solidFill>
@@ -4932,7 +4509,7 @@
         <p:spPr>
           <a:xfrm>
             <a:off x="713160" y="4443840"/>
-            <a:ext cx="2559600" cy="163800"/>
+            <a:ext cx="2559240" cy="163440"/>
           </a:xfrm>
           <a:prstGeom prst="rect">
             <a:avLst/>
@@ -4988,7 +4565,7 @@
         <p:spPr>
           <a:xfrm>
             <a:off x="2743200" y="4443840"/>
-            <a:ext cx="1188000" cy="163800"/>
+            <a:ext cx="1187640" cy="163440"/>
           </a:xfrm>
           <a:prstGeom prst="rect">
             <a:avLst/>
@@ -5044,7 +4621,7 @@
         <p:spPr>
           <a:xfrm>
             <a:off x="713160" y="4736520"/>
-            <a:ext cx="2559600" cy="163800"/>
+            <a:ext cx="2559240" cy="163440"/>
           </a:xfrm>
           <a:prstGeom prst="rect">
             <a:avLst/>
@@ -5100,7 +4677,7 @@
         <p:spPr>
           <a:xfrm>
             <a:off x="2743200" y="4736520"/>
-            <a:ext cx="1188000" cy="163800"/>
+            <a:ext cx="1187640" cy="163440"/>
           </a:xfrm>
           <a:prstGeom prst="rect">
             <a:avLst/>
@@ -5156,7 +4733,7 @@
         <p:spPr>
           <a:xfrm>
             <a:off x="713160" y="5029200"/>
-            <a:ext cx="2559600" cy="163800"/>
+            <a:ext cx="2559240" cy="163440"/>
           </a:xfrm>
           <a:prstGeom prst="rect">
             <a:avLst/>
@@ -5212,7 +4789,7 @@
         <p:spPr>
           <a:xfrm>
             <a:off x="2743200" y="5029200"/>
-            <a:ext cx="1188000" cy="163800"/>
+            <a:ext cx="1187640" cy="163440"/>
           </a:xfrm>
           <a:prstGeom prst="rect">
             <a:avLst/>
@@ -5268,7 +4845,7 @@
         <p:spPr>
           <a:xfrm>
             <a:off x="713160" y="5321880"/>
-            <a:ext cx="2559600" cy="163800"/>
+            <a:ext cx="2559240" cy="163440"/>
           </a:xfrm>
           <a:prstGeom prst="rect">
             <a:avLst/>
@@ -5324,7 +4901,7 @@
         <p:spPr>
           <a:xfrm>
             <a:off x="2743200" y="5321880"/>
-            <a:ext cx="1188000" cy="163800"/>
+            <a:ext cx="1187640" cy="163440"/>
           </a:xfrm>
           <a:prstGeom prst="rect">
             <a:avLst/>
@@ -5380,7 +4957,7 @@
         <p:spPr>
           <a:xfrm>
             <a:off x="713160" y="5614560"/>
-            <a:ext cx="2559600" cy="163800"/>
+            <a:ext cx="2559240" cy="163440"/>
           </a:xfrm>
           <a:prstGeom prst="rect">
             <a:avLst/>
@@ -5436,7 +5013,7 @@
         <p:spPr>
           <a:xfrm>
             <a:off x="2743200" y="5614560"/>
-            <a:ext cx="1188000" cy="163800"/>
+            <a:ext cx="1187640" cy="163440"/>
           </a:xfrm>
           <a:prstGeom prst="rect">
             <a:avLst/>
@@ -5492,7 +5069,7 @@
         <p:spPr>
           <a:xfrm>
             <a:off x="8458200" y="5349240"/>
-            <a:ext cx="2559600" cy="182160"/>
+            <a:ext cx="2559240" cy="181800"/>
           </a:xfrm>
           <a:prstGeom prst="rect">
             <a:avLst/>
@@ -5522,7 +5099,7 @@
               </a:tabLst>
             </a:pPr>
             <a:r>
-              <a:rPr b="1" lang="en-US" sz="800" spc="106" strike="noStrike">
+              <a:rPr b="1" lang="en-US" sz="800" spc="103" strike="noStrike">
                 <a:solidFill>
                   <a:srgbClr val="7fa1d6"/>
                 </a:solidFill>
@@ -5548,7 +5125,7 @@
         <p:spPr>
           <a:xfrm>
             <a:off x="8458200" y="5650920"/>
-            <a:ext cx="2468160" cy="227880"/>
+            <a:ext cx="2467800" cy="227520"/>
           </a:xfrm>
           <a:prstGeom prst="rect">
             <a:avLst/>
@@ -5604,7 +5181,7 @@
         <p:spPr>
           <a:xfrm>
             <a:off x="11155680" y="6181200"/>
-            <a:ext cx="319320" cy="163800"/>
+            <a:ext cx="318960" cy="163440"/>
           </a:xfrm>
           <a:prstGeom prst="rect">
             <a:avLst/>
@@ -5690,7 +5267,7 @@
         <p:spPr>
           <a:xfrm>
             <a:off x="567000" y="292680"/>
-            <a:ext cx="8960400" cy="401760"/>
+            <a:ext cx="8960040" cy="401400"/>
           </a:xfrm>
           <a:prstGeom prst="rect">
             <a:avLst/>
@@ -5747,7 +5324,7 @@
         <p:spPr>
           <a:xfrm>
             <a:off x="585360" y="749880"/>
-            <a:ext cx="10697760" cy="291960"/>
+            <a:ext cx="10697400" cy="291600"/>
           </a:xfrm>
           <a:prstGeom prst="rect">
             <a:avLst/>
@@ -5804,7 +5381,7 @@
         <p:spPr>
           <a:xfrm>
             <a:off x="10168200" y="356760"/>
-            <a:ext cx="1416600" cy="200520"/>
+            <a:ext cx="1416240" cy="200160"/>
           </a:xfrm>
           <a:prstGeom prst="rect">
             <a:avLst/>
@@ -5834,7 +5411,7 @@
               </a:tabLst>
             </a:pPr>
             <a:r>
-              <a:rPr b="1" lang="en-US" sz="850" spc="75" strike="noStrike">
+              <a:rPr b="1" lang="en-US" sz="850" spc="72" strike="noStrike">
                 <a:solidFill>
                   <a:srgbClr val="2f67e8"/>
                 </a:solidFill>
@@ -5861,7 +5438,7 @@
         <p:spPr>
           <a:xfrm>
             <a:off x="658440" y="1234440"/>
-            <a:ext cx="5257080" cy="1142280"/>
+            <a:ext cx="5256720" cy="1141920"/>
           </a:xfrm>
           <a:prstGeom prst="roundRect">
             <a:avLst>
@@ -5912,7 +5489,7 @@
         <p:spPr>
           <a:xfrm>
             <a:off x="658440" y="1234440"/>
-            <a:ext cx="54000" cy="1142280"/>
+            <a:ext cx="53640" cy="1141920"/>
           </a:xfrm>
           <a:prstGeom prst="rect">
             <a:avLst/>
@@ -5961,7 +5538,7 @@
         <p:spPr>
           <a:xfrm>
             <a:off x="859680" y="1371600"/>
-            <a:ext cx="4872960" cy="227880"/>
+            <a:ext cx="4872600" cy="227520"/>
           </a:xfrm>
           <a:prstGeom prst="rect">
             <a:avLst/>
@@ -6018,7 +5595,7 @@
         <p:spPr>
           <a:xfrm>
             <a:off x="859680" y="1710000"/>
-            <a:ext cx="4872960" cy="538920"/>
+            <a:ext cx="4872600" cy="538560"/>
           </a:xfrm>
           <a:prstGeom prst="rect">
             <a:avLst/>
@@ -6101,7 +5678,7 @@
         <p:spPr>
           <a:xfrm>
             <a:off x="6190560" y="1234440"/>
-            <a:ext cx="5257080" cy="1142280"/>
+            <a:ext cx="5256720" cy="1141920"/>
           </a:xfrm>
           <a:prstGeom prst="roundRect">
             <a:avLst>
@@ -6152,7 +5729,7 @@
         <p:spPr>
           <a:xfrm>
             <a:off x="6190560" y="1234440"/>
-            <a:ext cx="54000" cy="1142280"/>
+            <a:ext cx="53640" cy="1141920"/>
           </a:xfrm>
           <a:prstGeom prst="rect">
             <a:avLst/>
@@ -6201,7 +5778,7 @@
         <p:spPr>
           <a:xfrm>
             <a:off x="6391800" y="1371600"/>
-            <a:ext cx="4872960" cy="227880"/>
+            <a:ext cx="4872600" cy="227520"/>
           </a:xfrm>
           <a:prstGeom prst="rect">
             <a:avLst/>
@@ -6258,7 +5835,7 @@
         <p:spPr>
           <a:xfrm>
             <a:off x="6391800" y="1710000"/>
-            <a:ext cx="4872960" cy="538920"/>
+            <a:ext cx="4872600" cy="538560"/>
           </a:xfrm>
           <a:prstGeom prst="rect">
             <a:avLst/>
@@ -6315,7 +5892,7 @@
         <p:spPr>
           <a:xfrm>
             <a:off x="658440" y="2651760"/>
-            <a:ext cx="5257080" cy="1142280"/>
+            <a:ext cx="5256720" cy="1141920"/>
           </a:xfrm>
           <a:prstGeom prst="roundRect">
             <a:avLst>
@@ -6366,7 +5943,7 @@
         <p:spPr>
           <a:xfrm>
             <a:off x="658440" y="2651760"/>
-            <a:ext cx="54000" cy="1142280"/>
+            <a:ext cx="53640" cy="1141920"/>
           </a:xfrm>
           <a:prstGeom prst="rect">
             <a:avLst/>
@@ -6415,7 +5992,7 @@
         <p:spPr>
           <a:xfrm>
             <a:off x="859680" y="2788920"/>
-            <a:ext cx="4872960" cy="227880"/>
+            <a:ext cx="4872600" cy="227520"/>
           </a:xfrm>
           <a:prstGeom prst="rect">
             <a:avLst/>
@@ -6472,7 +6049,7 @@
         <p:spPr>
           <a:xfrm>
             <a:off x="859680" y="3127320"/>
-            <a:ext cx="4872960" cy="538920"/>
+            <a:ext cx="4872600" cy="538560"/>
           </a:xfrm>
           <a:prstGeom prst="rect">
             <a:avLst/>
@@ -6529,7 +6106,7 @@
         <p:spPr>
           <a:xfrm>
             <a:off x="6190560" y="2651760"/>
-            <a:ext cx="5257080" cy="1142280"/>
+            <a:ext cx="5256720" cy="1141920"/>
           </a:xfrm>
           <a:prstGeom prst="roundRect">
             <a:avLst>
@@ -6580,7 +6157,7 @@
         <p:spPr>
           <a:xfrm>
             <a:off x="6190560" y="2651760"/>
-            <a:ext cx="54000" cy="1142280"/>
+            <a:ext cx="53640" cy="1141920"/>
           </a:xfrm>
           <a:prstGeom prst="rect">
             <a:avLst/>
@@ -6629,7 +6206,7 @@
         <p:spPr>
           <a:xfrm>
             <a:off x="6391800" y="2788920"/>
-            <a:ext cx="4872960" cy="227880"/>
+            <a:ext cx="4872600" cy="227520"/>
           </a:xfrm>
           <a:prstGeom prst="rect">
             <a:avLst/>
@@ -6686,7 +6263,7 @@
         <p:spPr>
           <a:xfrm>
             <a:off x="6391800" y="3127320"/>
-            <a:ext cx="4872960" cy="538920"/>
+            <a:ext cx="4872600" cy="538560"/>
           </a:xfrm>
           <a:prstGeom prst="rect">
             <a:avLst/>
@@ -6743,7 +6320,7 @@
         <p:spPr>
           <a:xfrm>
             <a:off x="658440" y="4251960"/>
-            <a:ext cx="474840" cy="291960"/>
+            <a:ext cx="474480" cy="291600"/>
           </a:xfrm>
           <a:prstGeom prst="roundRect">
             <a:avLst>
@@ -6794,7 +6371,7 @@
         <p:spPr>
           <a:xfrm>
             <a:off x="658440" y="4316040"/>
-            <a:ext cx="474840" cy="109080"/>
+            <a:ext cx="474480" cy="108720"/>
           </a:xfrm>
           <a:prstGeom prst="rect">
             <a:avLst/>
@@ -6850,7 +6427,7 @@
         <p:spPr>
           <a:xfrm>
             <a:off x="1243440" y="4288680"/>
-            <a:ext cx="1142280" cy="200520"/>
+            <a:ext cx="1141920" cy="200160"/>
           </a:xfrm>
           <a:prstGeom prst="rect">
             <a:avLst/>
@@ -6906,7 +6483,7 @@
         <p:spPr>
           <a:xfrm>
             <a:off x="658440" y="4663440"/>
-            <a:ext cx="3245400" cy="913680"/>
+            <a:ext cx="3245040" cy="913320"/>
           </a:xfrm>
           <a:prstGeom prst="roundRect">
             <a:avLst>
@@ -6957,7 +6534,7 @@
         <p:spPr>
           <a:xfrm>
             <a:off x="658440" y="4663440"/>
-            <a:ext cx="54000" cy="913680"/>
+            <a:ext cx="53640" cy="913320"/>
           </a:xfrm>
           <a:prstGeom prst="rect">
             <a:avLst/>
@@ -7006,7 +6583,7 @@
         <p:spPr>
           <a:xfrm>
             <a:off x="859680" y="4800600"/>
-            <a:ext cx="2861280" cy="227880"/>
+            <a:ext cx="2860920" cy="227520"/>
           </a:xfrm>
           <a:prstGeom prst="rect">
             <a:avLst/>
@@ -7063,7 +6640,7 @@
         <p:spPr>
           <a:xfrm>
             <a:off x="859680" y="5139000"/>
-            <a:ext cx="2861280" cy="310320"/>
+            <a:ext cx="2860920" cy="309960"/>
           </a:xfrm>
           <a:prstGeom prst="rect">
             <a:avLst/>
@@ -7146,7 +6723,7 @@
         <p:spPr>
           <a:xfrm>
             <a:off x="4187880" y="4663440"/>
-            <a:ext cx="3245400" cy="913680"/>
+            <a:ext cx="3245040" cy="913320"/>
           </a:xfrm>
           <a:prstGeom prst="roundRect">
             <a:avLst>
@@ -7197,7 +6774,7 @@
         <p:spPr>
           <a:xfrm>
             <a:off x="4187880" y="4663440"/>
-            <a:ext cx="54000" cy="913680"/>
+            <a:ext cx="53640" cy="913320"/>
           </a:xfrm>
           <a:prstGeom prst="rect">
             <a:avLst/>
@@ -7246,7 +6823,7 @@
         <p:spPr>
           <a:xfrm>
             <a:off x="4389120" y="4800600"/>
-            <a:ext cx="2861280" cy="227880"/>
+            <a:ext cx="2860920" cy="227520"/>
           </a:xfrm>
           <a:prstGeom prst="rect">
             <a:avLst/>
@@ -7303,7 +6880,7 @@
         <p:spPr>
           <a:xfrm>
             <a:off x="4389120" y="5139000"/>
-            <a:ext cx="2861280" cy="310320"/>
+            <a:ext cx="2860920" cy="309960"/>
           </a:xfrm>
           <a:prstGeom prst="rect">
             <a:avLst/>
@@ -7360,7 +6937,7 @@
         <p:spPr>
           <a:xfrm>
             <a:off x="7717680" y="4663440"/>
-            <a:ext cx="3803040" cy="913680"/>
+            <a:ext cx="3802680" cy="913320"/>
           </a:xfrm>
           <a:prstGeom prst="roundRect">
             <a:avLst>
@@ -7411,7 +6988,7 @@
         <p:spPr>
           <a:xfrm>
             <a:off x="7717680" y="4663440"/>
-            <a:ext cx="54000" cy="913680"/>
+            <a:ext cx="53640" cy="913320"/>
           </a:xfrm>
           <a:prstGeom prst="rect">
             <a:avLst/>
@@ -7460,7 +7037,7 @@
         <p:spPr>
           <a:xfrm>
             <a:off x="7918560" y="4800600"/>
-            <a:ext cx="3419280" cy="227880"/>
+            <a:ext cx="3418920" cy="227520"/>
           </a:xfrm>
           <a:prstGeom prst="rect">
             <a:avLst/>
@@ -7517,7 +7094,7 @@
         <p:spPr>
           <a:xfrm>
             <a:off x="7918560" y="5139000"/>
-            <a:ext cx="3419280" cy="310320"/>
+            <a:ext cx="3418920" cy="309960"/>
           </a:xfrm>
           <a:prstGeom prst="rect">
             <a:avLst/>
@@ -7578,7 +7155,7 @@
         <p:spPr>
           <a:xfrm>
             <a:off x="11292840" y="6574680"/>
-            <a:ext cx="799200" cy="299160"/>
+            <a:ext cx="798840" cy="298800"/>
           </a:xfrm>
           <a:prstGeom prst="rect">
             <a:avLst/>
@@ -7620,7 +7197,7 @@
                 <a:tab algn="l" pos="0"/>
               </a:tabLst>
             </a:pPr>
-            <a:fld id="{BA061B63-2422-4058-8004-FD33A3B2C332}" type="slidenum">
+            <a:fld id="{A10DE38F-FACC-4120-8B4B-E114D7BF0DEE}" type="slidenum">
               <a:rPr b="0" lang="en-US" sz="850" spc="-1" strike="noStrike">
                 <a:solidFill>
                   <a:srgbClr val="7b8494"/>
@@ -7628,7 +7205,7 @@
                 <a:latin typeface="Aptos"/>
                 <a:ea typeface="Aptos"/>
               </a:rPr>
-              <a:t>10</a:t>
+              <a:t>&lt;number&gt;</a:t>
             </a:fld>
             <a:endParaRPr b="0" lang="en-US" sz="850" spc="-1" strike="noStrike">
               <a:solidFill>
@@ -7678,7 +7255,7 @@
         <p:spPr>
           <a:xfrm>
             <a:off x="567000" y="292680"/>
-            <a:ext cx="8960400" cy="401760"/>
+            <a:ext cx="8960040" cy="401400"/>
           </a:xfrm>
           <a:prstGeom prst="rect">
             <a:avLst/>
@@ -7735,7 +7312,7 @@
         <p:spPr>
           <a:xfrm>
             <a:off x="585360" y="749880"/>
-            <a:ext cx="10697760" cy="291960"/>
+            <a:ext cx="10697400" cy="291600"/>
           </a:xfrm>
           <a:prstGeom prst="rect">
             <a:avLst/>
@@ -7792,7 +7369,7 @@
         <p:spPr>
           <a:xfrm>
             <a:off x="10168200" y="356760"/>
-            <a:ext cx="1416600" cy="200520"/>
+            <a:ext cx="1416240" cy="200160"/>
           </a:xfrm>
           <a:prstGeom prst="rect">
             <a:avLst/>
@@ -7822,7 +7399,7 @@
               </a:tabLst>
             </a:pPr>
             <a:r>
-              <a:rPr b="1" lang="en-US" sz="850" spc="75" strike="noStrike">
+              <a:rPr b="1" lang="en-US" sz="850" spc="72" strike="noStrike">
                 <a:solidFill>
                   <a:srgbClr val="2f67e8"/>
                 </a:solidFill>
@@ -7849,7 +7426,7 @@
         <p:spPr>
           <a:xfrm>
             <a:off x="658440" y="1417320"/>
-            <a:ext cx="1919520" cy="1096560"/>
+            <a:ext cx="1919160" cy="1096200"/>
           </a:xfrm>
           <a:prstGeom prst="roundRect">
             <a:avLst>
@@ -7900,7 +7477,7 @@
         <p:spPr>
           <a:xfrm>
             <a:off x="658440" y="1417320"/>
-            <a:ext cx="54000" cy="1096560"/>
+            <a:ext cx="53640" cy="1096200"/>
           </a:xfrm>
           <a:prstGeom prst="rect">
             <a:avLst/>
@@ -7949,7 +7526,7 @@
         <p:spPr>
           <a:xfrm>
             <a:off x="859680" y="1554480"/>
-            <a:ext cx="1535400" cy="227880"/>
+            <a:ext cx="1535040" cy="227520"/>
           </a:xfrm>
           <a:prstGeom prst="rect">
             <a:avLst/>
@@ -8006,7 +7583,7 @@
         <p:spPr>
           <a:xfrm>
             <a:off x="859680" y="1892880"/>
-            <a:ext cx="1535400" cy="493200"/>
+            <a:ext cx="1535040" cy="492840"/>
           </a:xfrm>
           <a:prstGeom prst="rect">
             <a:avLst/>
@@ -8089,7 +7666,7 @@
         <p:spPr>
           <a:xfrm>
             <a:off x="2724840" y="1783080"/>
-            <a:ext cx="410760" cy="227880"/>
+            <a:ext cx="410400" cy="227520"/>
           </a:xfrm>
           <a:prstGeom prst="chevron">
             <a:avLst>
@@ -8140,7 +7717,7 @@
         <p:spPr>
           <a:xfrm>
             <a:off x="3200400" y="1417320"/>
-            <a:ext cx="1919520" cy="1096560"/>
+            <a:ext cx="1919160" cy="1096200"/>
           </a:xfrm>
           <a:prstGeom prst="roundRect">
             <a:avLst>
@@ -8191,7 +7768,7 @@
         <p:spPr>
           <a:xfrm>
             <a:off x="3200400" y="1417320"/>
-            <a:ext cx="54000" cy="1096560"/>
+            <a:ext cx="53640" cy="1096200"/>
           </a:xfrm>
           <a:prstGeom prst="rect">
             <a:avLst/>
@@ -8240,7 +7817,7 @@
         <p:spPr>
           <a:xfrm>
             <a:off x="3401640" y="1554480"/>
-            <a:ext cx="1535400" cy="227880"/>
+            <a:ext cx="1535040" cy="227520"/>
           </a:xfrm>
           <a:prstGeom prst="rect">
             <a:avLst/>
@@ -8297,7 +7874,7 @@
         <p:spPr>
           <a:xfrm>
             <a:off x="3401640" y="1892880"/>
-            <a:ext cx="1535400" cy="493200"/>
+            <a:ext cx="1535040" cy="492840"/>
           </a:xfrm>
           <a:prstGeom prst="rect">
             <a:avLst/>
@@ -8380,7 +7957,7 @@
         <p:spPr>
           <a:xfrm>
             <a:off x="5285160" y="1783080"/>
-            <a:ext cx="410760" cy="227880"/>
+            <a:ext cx="410400" cy="227520"/>
           </a:xfrm>
           <a:prstGeom prst="chevron">
             <a:avLst>
@@ -8431,7 +8008,7 @@
         <p:spPr>
           <a:xfrm>
             <a:off x="5760720" y="1417320"/>
-            <a:ext cx="2056680" cy="1096560"/>
+            <a:ext cx="2056320" cy="1096200"/>
           </a:xfrm>
           <a:prstGeom prst="roundRect">
             <a:avLst>
@@ -8482,7 +8059,7 @@
         <p:spPr>
           <a:xfrm>
             <a:off x="5760720" y="1417320"/>
-            <a:ext cx="54000" cy="1096560"/>
+            <a:ext cx="53640" cy="1096200"/>
           </a:xfrm>
           <a:prstGeom prst="rect">
             <a:avLst/>
@@ -8531,7 +8108,7 @@
         <p:spPr>
           <a:xfrm>
             <a:off x="5961960" y="1554480"/>
-            <a:ext cx="1672560" cy="227880"/>
+            <a:ext cx="1672200" cy="227520"/>
           </a:xfrm>
           <a:prstGeom prst="rect">
             <a:avLst/>
@@ -8588,7 +8165,7 @@
         <p:spPr>
           <a:xfrm>
             <a:off x="5961960" y="1892880"/>
-            <a:ext cx="1672560" cy="493200"/>
+            <a:ext cx="1672200" cy="492840"/>
           </a:xfrm>
           <a:prstGeom prst="rect">
             <a:avLst/>
@@ -8671,7 +8248,7 @@
         <p:spPr>
           <a:xfrm>
             <a:off x="7973640" y="1783080"/>
-            <a:ext cx="410760" cy="227880"/>
+            <a:ext cx="410400" cy="227520"/>
           </a:xfrm>
           <a:prstGeom prst="chevron">
             <a:avLst>
@@ -8722,7 +8299,7 @@
         <p:spPr>
           <a:xfrm>
             <a:off x="8458200" y="1417320"/>
-            <a:ext cx="1919520" cy="1096560"/>
+            <a:ext cx="1919160" cy="1096200"/>
           </a:xfrm>
           <a:prstGeom prst="roundRect">
             <a:avLst>
@@ -8773,7 +8350,7 @@
         <p:spPr>
           <a:xfrm>
             <a:off x="8458200" y="1417320"/>
-            <a:ext cx="54000" cy="1096560"/>
+            <a:ext cx="53640" cy="1096200"/>
           </a:xfrm>
           <a:prstGeom prst="rect">
             <a:avLst/>
@@ -8822,7 +8399,7 @@
         <p:spPr>
           <a:xfrm>
             <a:off x="8659440" y="1554480"/>
-            <a:ext cx="1535400" cy="227880"/>
+            <a:ext cx="1535040" cy="227520"/>
           </a:xfrm>
           <a:prstGeom prst="rect">
             <a:avLst/>
@@ -8879,7 +8456,7 @@
         <p:spPr>
           <a:xfrm>
             <a:off x="8659440" y="1892880"/>
-            <a:ext cx="1535400" cy="493200"/>
+            <a:ext cx="1535040" cy="492840"/>
           </a:xfrm>
           <a:prstGeom prst="rect">
             <a:avLst/>
@@ -8936,7 +8513,7 @@
         <p:spPr>
           <a:xfrm>
             <a:off x="10561320" y="1783080"/>
-            <a:ext cx="410760" cy="227880"/>
+            <a:ext cx="410400" cy="227520"/>
           </a:xfrm>
           <a:prstGeom prst="chevron">
             <a:avLst>
@@ -8987,7 +8564,7 @@
         <p:spPr>
           <a:xfrm>
             <a:off x="11018520" y="1417320"/>
-            <a:ext cx="502200" cy="1096560"/>
+            <a:ext cx="501840" cy="1096200"/>
           </a:xfrm>
           <a:prstGeom prst="roundRect">
             <a:avLst>
@@ -9038,7 +8615,7 @@
         <p:spPr>
           <a:xfrm>
             <a:off x="11018520" y="1417320"/>
-            <a:ext cx="54000" cy="1096560"/>
+            <a:ext cx="53640" cy="1096200"/>
           </a:xfrm>
           <a:prstGeom prst="rect">
             <a:avLst/>
@@ -9087,7 +8664,7 @@
         <p:spPr>
           <a:xfrm>
             <a:off x="11219760" y="1554480"/>
-            <a:ext cx="118080" cy="227880"/>
+            <a:ext cx="117720" cy="227520"/>
           </a:xfrm>
           <a:prstGeom prst="rect">
             <a:avLst/>
@@ -9144,7 +8721,7 @@
         <p:spPr>
           <a:xfrm>
             <a:off x="11219760" y="1892880"/>
-            <a:ext cx="118080" cy="493200"/>
+            <a:ext cx="117720" cy="492840"/>
           </a:xfrm>
           <a:prstGeom prst="rect">
             <a:avLst/>
@@ -9201,7 +8778,7 @@
         <p:spPr>
           <a:xfrm>
             <a:off x="658440" y="2971800"/>
-            <a:ext cx="474840" cy="291960"/>
+            <a:ext cx="474480" cy="291600"/>
           </a:xfrm>
           <a:prstGeom prst="roundRect">
             <a:avLst>
@@ -9252,7 +8829,7 @@
         <p:spPr>
           <a:xfrm>
             <a:off x="658440" y="3035880"/>
-            <a:ext cx="474840" cy="109080"/>
+            <a:ext cx="474480" cy="108720"/>
           </a:xfrm>
           <a:prstGeom prst="rect">
             <a:avLst/>
@@ -9308,7 +8885,7 @@
         <p:spPr>
           <a:xfrm>
             <a:off x="1243440" y="3008520"/>
-            <a:ext cx="1782360" cy="200520"/>
+            <a:ext cx="1782000" cy="200160"/>
           </a:xfrm>
           <a:prstGeom prst="rect">
             <a:avLst/>
@@ -9364,7 +8941,7 @@
         <p:spPr>
           <a:xfrm>
             <a:off x="658440" y="3401640"/>
-            <a:ext cx="3245400" cy="1416600"/>
+            <a:ext cx="3245040" cy="1416240"/>
           </a:xfrm>
           <a:prstGeom prst="roundRect">
             <a:avLst>
@@ -9415,7 +8992,7 @@
         <p:spPr>
           <a:xfrm>
             <a:off x="658440" y="3401640"/>
-            <a:ext cx="54000" cy="1416600"/>
+            <a:ext cx="53640" cy="1416240"/>
           </a:xfrm>
           <a:prstGeom prst="rect">
             <a:avLst/>
@@ -9464,7 +9041,7 @@
         <p:spPr>
           <a:xfrm>
             <a:off x="859680" y="3538800"/>
-            <a:ext cx="2861280" cy="227880"/>
+            <a:ext cx="2860920" cy="227520"/>
           </a:xfrm>
           <a:prstGeom prst="rect">
             <a:avLst/>
@@ -9521,7 +9098,7 @@
         <p:spPr>
           <a:xfrm>
             <a:off x="859680" y="3877200"/>
-            <a:ext cx="2861280" cy="813240"/>
+            <a:ext cx="2860920" cy="812880"/>
           </a:xfrm>
           <a:prstGeom prst="rect">
             <a:avLst/>
@@ -9656,7 +9233,7 @@
         <p:spPr>
           <a:xfrm>
             <a:off x="4206240" y="3401640"/>
-            <a:ext cx="3245400" cy="1416600"/>
+            <a:ext cx="3245040" cy="1416240"/>
           </a:xfrm>
           <a:prstGeom prst="roundRect">
             <a:avLst>
@@ -9707,7 +9284,7 @@
         <p:spPr>
           <a:xfrm>
             <a:off x="4206240" y="3401640"/>
-            <a:ext cx="54000" cy="1416600"/>
+            <a:ext cx="53640" cy="1416240"/>
           </a:xfrm>
           <a:prstGeom prst="rect">
             <a:avLst/>
@@ -9756,7 +9333,7 @@
         <p:spPr>
           <a:xfrm>
             <a:off x="4407480" y="3538800"/>
-            <a:ext cx="2861280" cy="227880"/>
+            <a:ext cx="2860920" cy="227520"/>
           </a:xfrm>
           <a:prstGeom prst="rect">
             <a:avLst/>
@@ -9813,7 +9390,7 @@
         <p:spPr>
           <a:xfrm>
             <a:off x="4407480" y="3877200"/>
-            <a:ext cx="2861280" cy="813240"/>
+            <a:ext cx="2860920" cy="812880"/>
           </a:xfrm>
           <a:prstGeom prst="rect">
             <a:avLst/>
@@ -9870,7 +9447,7 @@
         <p:spPr>
           <a:xfrm>
             <a:off x="7754040" y="3401640"/>
-            <a:ext cx="3766680" cy="1416600"/>
+            <a:ext cx="3766320" cy="1416240"/>
           </a:xfrm>
           <a:prstGeom prst="roundRect">
             <a:avLst>
@@ -9921,7 +9498,7 @@
         <p:spPr>
           <a:xfrm>
             <a:off x="7754040" y="3401640"/>
-            <a:ext cx="54000" cy="1416600"/>
+            <a:ext cx="53640" cy="1416240"/>
           </a:xfrm>
           <a:prstGeom prst="rect">
             <a:avLst/>
@@ -9970,7 +9547,7 @@
         <p:spPr>
           <a:xfrm>
             <a:off x="7955280" y="3538800"/>
-            <a:ext cx="3382560" cy="227880"/>
+            <a:ext cx="3382200" cy="227520"/>
           </a:xfrm>
           <a:prstGeom prst="rect">
             <a:avLst/>
@@ -10027,7 +9604,7 @@
         <p:spPr>
           <a:xfrm>
             <a:off x="7955280" y="3877200"/>
-            <a:ext cx="3382560" cy="813240"/>
+            <a:ext cx="3382200" cy="812880"/>
           </a:xfrm>
           <a:prstGeom prst="rect">
             <a:avLst/>
@@ -10084,7 +9661,7 @@
         <p:spPr>
           <a:xfrm>
             <a:off x="658440" y="5257800"/>
-            <a:ext cx="1370880" cy="182160"/>
+            <a:ext cx="1370520" cy="181800"/>
           </a:xfrm>
           <a:prstGeom prst="rect">
             <a:avLst/>
@@ -10140,7 +9717,7 @@
         <p:spPr>
           <a:xfrm>
             <a:off x="1920240" y="5203080"/>
-            <a:ext cx="1325160" cy="310320"/>
+            <a:ext cx="1324800" cy="309960"/>
           </a:xfrm>
           <a:prstGeom prst="roundRect">
             <a:avLst>
@@ -10191,7 +9768,7 @@
         <p:spPr>
           <a:xfrm>
             <a:off x="1993320" y="5266800"/>
-            <a:ext cx="1179000" cy="127440"/>
+            <a:ext cx="1178640" cy="127080"/>
           </a:xfrm>
           <a:prstGeom prst="rect">
             <a:avLst/>
@@ -10247,7 +9824,7 @@
         <p:spPr>
           <a:xfrm>
             <a:off x="3410640" y="5203080"/>
-            <a:ext cx="1599480" cy="310320"/>
+            <a:ext cx="1599120" cy="309960"/>
           </a:xfrm>
           <a:prstGeom prst="roundRect">
             <a:avLst>
@@ -10298,7 +9875,7 @@
         <p:spPr>
           <a:xfrm>
             <a:off x="3483720" y="5266800"/>
-            <a:ext cx="1453320" cy="127440"/>
+            <a:ext cx="1452960" cy="127080"/>
           </a:xfrm>
           <a:prstGeom prst="rect">
             <a:avLst/>
@@ -10354,7 +9931,7 @@
         <p:spPr>
           <a:xfrm>
             <a:off x="5184720" y="5203080"/>
-            <a:ext cx="1416600" cy="310320"/>
+            <a:ext cx="1416240" cy="309960"/>
           </a:xfrm>
           <a:prstGeom prst="roundRect">
             <a:avLst>
@@ -10405,7 +9982,7 @@
         <p:spPr>
           <a:xfrm>
             <a:off x="5257800" y="5266800"/>
-            <a:ext cx="1270440" cy="127440"/>
+            <a:ext cx="1270080" cy="127080"/>
           </a:xfrm>
           <a:prstGeom prst="rect">
             <a:avLst/>
@@ -10461,7 +10038,7 @@
         <p:spPr>
           <a:xfrm>
             <a:off x="6766560" y="5203080"/>
-            <a:ext cx="1279440" cy="310320"/>
+            <a:ext cx="1279080" cy="309960"/>
           </a:xfrm>
           <a:prstGeom prst="roundRect">
             <a:avLst>
@@ -10512,7 +10089,7 @@
         <p:spPr>
           <a:xfrm>
             <a:off x="6839640" y="5266800"/>
-            <a:ext cx="1133280" cy="127440"/>
+            <a:ext cx="1132920" cy="127080"/>
           </a:xfrm>
           <a:prstGeom prst="rect">
             <a:avLst/>
@@ -10572,7 +10149,7 @@
         <p:spPr>
           <a:xfrm>
             <a:off x="11292840" y="6574680"/>
-            <a:ext cx="799200" cy="299160"/>
+            <a:ext cx="798840" cy="298800"/>
           </a:xfrm>
           <a:prstGeom prst="rect">
             <a:avLst/>
@@ -10614,7 +10191,7 @@
                 <a:tab algn="l" pos="0"/>
               </a:tabLst>
             </a:pPr>
-            <a:fld id="{E4052691-D0CE-49EC-AED8-8C86902ABB58}" type="slidenum">
+            <a:fld id="{C83F8DE8-BB72-4DEB-8F61-2B0EE66C015C}" type="slidenum">
               <a:rPr b="0" lang="en-US" sz="850" spc="-1" strike="noStrike">
                 <a:solidFill>
                   <a:srgbClr val="7b8494"/>
@@ -10622,7 +10199,7 @@
                 <a:latin typeface="Aptos"/>
                 <a:ea typeface="Aptos"/>
               </a:rPr>
-              <a:t>11</a:t>
+              <a:t>&lt;number&gt;</a:t>
             </a:fld>
             <a:endParaRPr b="0" lang="en-US" sz="850" spc="-1" strike="noStrike">
               <a:solidFill>
@@ -10672,7 +10249,7 @@
         <p:spPr>
           <a:xfrm>
             <a:off x="567000" y="292680"/>
-            <a:ext cx="8960400" cy="401760"/>
+            <a:ext cx="8960040" cy="401400"/>
           </a:xfrm>
           <a:prstGeom prst="rect">
             <a:avLst/>
@@ -10729,7 +10306,7 @@
         <p:spPr>
           <a:xfrm>
             <a:off x="585360" y="749880"/>
-            <a:ext cx="10697760" cy="291960"/>
+            <a:ext cx="10697400" cy="291600"/>
           </a:xfrm>
           <a:prstGeom prst="rect">
             <a:avLst/>
@@ -10786,7 +10363,7 @@
         <p:spPr>
           <a:xfrm>
             <a:off x="10168200" y="356760"/>
-            <a:ext cx="1416600" cy="200520"/>
+            <a:ext cx="1416240" cy="200160"/>
           </a:xfrm>
           <a:prstGeom prst="rect">
             <a:avLst/>
@@ -10816,7 +10393,7 @@
               </a:tabLst>
             </a:pPr>
             <a:r>
-              <a:rPr b="1" lang="en-US" sz="850" spc="75" strike="noStrike">
+              <a:rPr b="1" lang="en-US" sz="850" spc="72" strike="noStrike">
                 <a:solidFill>
                   <a:srgbClr val="2f67e8"/>
                 </a:solidFill>
@@ -10843,7 +10420,7 @@
         <p:spPr>
           <a:xfrm>
             <a:off x="658440" y="1234440"/>
-            <a:ext cx="3455640" cy="1873800"/>
+            <a:ext cx="3455280" cy="1873440"/>
           </a:xfrm>
           <a:prstGeom prst="roundRect">
             <a:avLst>
@@ -10894,7 +10471,7 @@
         <p:spPr>
           <a:xfrm>
             <a:off x="658440" y="1234440"/>
-            <a:ext cx="54000" cy="1873800"/>
+            <a:ext cx="53640" cy="1873440"/>
           </a:xfrm>
           <a:prstGeom prst="rect">
             <a:avLst/>
@@ -10943,7 +10520,7 @@
         <p:spPr>
           <a:xfrm>
             <a:off x="859680" y="1371600"/>
-            <a:ext cx="3071520" cy="227880"/>
+            <a:ext cx="3071160" cy="227520"/>
           </a:xfrm>
           <a:prstGeom prst="rect">
             <a:avLst/>
@@ -11000,7 +10577,7 @@
         <p:spPr>
           <a:xfrm>
             <a:off x="859680" y="1710000"/>
-            <a:ext cx="3071520" cy="1270440"/>
+            <a:ext cx="3071160" cy="1270080"/>
           </a:xfrm>
           <a:prstGeom prst="rect">
             <a:avLst/>
@@ -11175,7 +10752,7 @@
         <p:spPr>
           <a:xfrm>
             <a:off x="4370760" y="1234440"/>
-            <a:ext cx="3455640" cy="1873800"/>
+            <a:ext cx="3455280" cy="1873440"/>
           </a:xfrm>
           <a:prstGeom prst="roundRect">
             <a:avLst>
@@ -11226,7 +10803,7 @@
         <p:spPr>
           <a:xfrm>
             <a:off x="4370760" y="1234440"/>
-            <a:ext cx="54000" cy="1873800"/>
+            <a:ext cx="53640" cy="1873440"/>
           </a:xfrm>
           <a:prstGeom prst="rect">
             <a:avLst/>
@@ -11275,7 +10852,7 @@
         <p:spPr>
           <a:xfrm>
             <a:off x="4572000" y="1371600"/>
-            <a:ext cx="3071520" cy="227880"/>
+            <a:ext cx="3071160" cy="227520"/>
           </a:xfrm>
           <a:prstGeom prst="rect">
             <a:avLst/>
@@ -11332,7 +10909,7 @@
         <p:spPr>
           <a:xfrm>
             <a:off x="4572000" y="1710000"/>
-            <a:ext cx="3071520" cy="1270440"/>
+            <a:ext cx="3071160" cy="1270080"/>
           </a:xfrm>
           <a:prstGeom prst="rect">
             <a:avLst/>
@@ -11507,7 +11084,7 @@
         <p:spPr>
           <a:xfrm>
             <a:off x="8083440" y="1234440"/>
-            <a:ext cx="3455640" cy="1873800"/>
+            <a:ext cx="3455280" cy="1873440"/>
           </a:xfrm>
           <a:prstGeom prst="roundRect">
             <a:avLst>
@@ -11558,7 +11135,7 @@
         <p:spPr>
           <a:xfrm>
             <a:off x="8083440" y="1234440"/>
-            <a:ext cx="54000" cy="1873800"/>
+            <a:ext cx="53640" cy="1873440"/>
           </a:xfrm>
           <a:prstGeom prst="rect">
             <a:avLst/>
@@ -11607,7 +11184,7 @@
         <p:spPr>
           <a:xfrm>
             <a:off x="8284320" y="1371600"/>
-            <a:ext cx="3071520" cy="227880"/>
+            <a:ext cx="3071160" cy="227520"/>
           </a:xfrm>
           <a:prstGeom prst="rect">
             <a:avLst/>
@@ -11664,7 +11241,7 @@
         <p:spPr>
           <a:xfrm>
             <a:off x="8284320" y="1710000"/>
-            <a:ext cx="3071520" cy="1270440"/>
+            <a:ext cx="3071160" cy="1270080"/>
           </a:xfrm>
           <a:prstGeom prst="rect">
             <a:avLst/>
@@ -11839,7 +11416,7 @@
         <p:spPr>
           <a:xfrm>
             <a:off x="658440" y="3520440"/>
-            <a:ext cx="1828080" cy="182160"/>
+            <a:ext cx="1827720" cy="181800"/>
           </a:xfrm>
           <a:prstGeom prst="rect">
             <a:avLst/>
@@ -11895,7 +11472,7 @@
         <p:spPr>
           <a:xfrm>
             <a:off x="658440" y="3858840"/>
-            <a:ext cx="3748320" cy="657720"/>
+            <a:ext cx="3747960" cy="657360"/>
           </a:xfrm>
           <a:prstGeom prst="roundRect">
             <a:avLst>
@@ -11946,7 +11523,7 @@
         <p:spPr>
           <a:xfrm>
             <a:off x="868680" y="4087440"/>
-            <a:ext cx="3291120" cy="163800"/>
+            <a:ext cx="3290760" cy="163440"/>
           </a:xfrm>
           <a:prstGeom prst="rect">
             <a:avLst/>
@@ -12002,7 +11579,7 @@
         <p:spPr>
           <a:xfrm>
             <a:off x="4590360" y="4041720"/>
-            <a:ext cx="593640" cy="255240"/>
+            <a:ext cx="593280" cy="254880"/>
           </a:xfrm>
           <a:prstGeom prst="chevron">
             <a:avLst>
@@ -12053,7 +11630,7 @@
         <p:spPr>
           <a:xfrm>
             <a:off x="5349240" y="3675960"/>
-            <a:ext cx="6171480" cy="1023480"/>
+            <a:ext cx="6171120" cy="1023120"/>
           </a:xfrm>
           <a:prstGeom prst="roundRect">
             <a:avLst>
@@ -12104,7 +11681,7 @@
         <p:spPr>
           <a:xfrm>
             <a:off x="5577840" y="3858840"/>
-            <a:ext cx="776520" cy="145440"/>
+            <a:ext cx="776160" cy="145080"/>
           </a:xfrm>
           <a:prstGeom prst="rect">
             <a:avLst/>
@@ -12160,7 +11737,7 @@
         <p:spPr>
           <a:xfrm>
             <a:off x="5577840" y="4096440"/>
-            <a:ext cx="5622840" cy="346680"/>
+            <a:ext cx="5622480" cy="346320"/>
           </a:xfrm>
           <a:prstGeom prst="rect">
             <a:avLst/>
@@ -12216,7 +11793,7 @@
         <p:spPr>
           <a:xfrm>
             <a:off x="658440" y="4983480"/>
-            <a:ext cx="10862280" cy="593640"/>
+            <a:ext cx="10861920" cy="593280"/>
           </a:xfrm>
           <a:prstGeom prst="roundRect">
             <a:avLst>
@@ -12267,7 +11844,7 @@
         <p:spPr>
           <a:xfrm>
             <a:off x="868680" y="5175360"/>
-            <a:ext cx="639360" cy="145440"/>
+            <a:ext cx="639000" cy="145080"/>
           </a:xfrm>
           <a:prstGeom prst="rect">
             <a:avLst/>
@@ -12323,7 +11900,7 @@
         <p:spPr>
           <a:xfrm>
             <a:off x="1828800" y="5083920"/>
-            <a:ext cx="1096560" cy="310320"/>
+            <a:ext cx="1096200" cy="309960"/>
           </a:xfrm>
           <a:prstGeom prst="roundRect">
             <a:avLst>
@@ -12374,7 +11951,7 @@
         <p:spPr>
           <a:xfrm>
             <a:off x="1901880" y="5148000"/>
-            <a:ext cx="950400" cy="127440"/>
+            <a:ext cx="950040" cy="127080"/>
           </a:xfrm>
           <a:prstGeom prst="rect">
             <a:avLst/>
@@ -12430,7 +12007,7 @@
         <p:spPr>
           <a:xfrm>
             <a:off x="3127320" y="5083920"/>
-            <a:ext cx="1005120" cy="310320"/>
+            <a:ext cx="1004760" cy="309960"/>
           </a:xfrm>
           <a:prstGeom prst="roundRect">
             <a:avLst>
@@ -12481,7 +12058,7 @@
         <p:spPr>
           <a:xfrm>
             <a:off x="3200400" y="5148000"/>
-            <a:ext cx="858960" cy="127440"/>
+            <a:ext cx="858600" cy="127080"/>
           </a:xfrm>
           <a:prstGeom prst="rect">
             <a:avLst/>
@@ -12537,7 +12114,7 @@
         <p:spPr>
           <a:xfrm>
             <a:off x="9985320" y="5083920"/>
-            <a:ext cx="959400" cy="310320"/>
+            <a:ext cx="959040" cy="309960"/>
           </a:xfrm>
           <a:prstGeom prst="roundRect">
             <a:avLst>
@@ -12588,7 +12165,7 @@
         <p:spPr>
           <a:xfrm>
             <a:off x="10058400" y="5148000"/>
-            <a:ext cx="813240" cy="127440"/>
+            <a:ext cx="812880" cy="127080"/>
           </a:xfrm>
           <a:prstGeom prst="rect">
             <a:avLst/>
@@ -12644,7 +12221,7 @@
         <p:spPr>
           <a:xfrm>
             <a:off x="4480560" y="5175360"/>
-            <a:ext cx="2925360" cy="145440"/>
+            <a:ext cx="2925000" cy="145080"/>
           </a:xfrm>
           <a:prstGeom prst="rect">
             <a:avLst/>
@@ -12704,7 +12281,7 @@
         <p:spPr>
           <a:xfrm>
             <a:off x="11292840" y="6574680"/>
-            <a:ext cx="799200" cy="299160"/>
+            <a:ext cx="798840" cy="298800"/>
           </a:xfrm>
           <a:prstGeom prst="rect">
             <a:avLst/>
@@ -12746,7 +12323,7 @@
                 <a:tab algn="l" pos="0"/>
               </a:tabLst>
             </a:pPr>
-            <a:fld id="{B124B4B0-34CA-44A6-B39C-AD5C83AA1D4B}" type="slidenum">
+            <a:fld id="{71999D2C-8904-48B9-AFB7-B10717977BE0}" type="slidenum">
               <a:rPr b="0" lang="en-US" sz="850" spc="-1" strike="noStrike">
                 <a:solidFill>
                   <a:srgbClr val="7b8494"/>
@@ -12754,7 +12331,7 @@
                 <a:latin typeface="Aptos"/>
                 <a:ea typeface="Aptos"/>
               </a:rPr>
-              <a:t>12</a:t>
+              <a:t>&lt;number&gt;</a:t>
             </a:fld>
             <a:endParaRPr b="0" lang="en-US" sz="850" spc="-1" strike="noStrike">
               <a:solidFill>
@@ -12804,7 +12381,7 @@
         <p:spPr>
           <a:xfrm>
             <a:off x="567000" y="292680"/>
-            <a:ext cx="8960400" cy="401760"/>
+            <a:ext cx="8960040" cy="401400"/>
           </a:xfrm>
           <a:prstGeom prst="rect">
             <a:avLst/>
@@ -12861,7 +12438,7 @@
         <p:spPr>
           <a:xfrm>
             <a:off x="585360" y="749880"/>
-            <a:ext cx="10697760" cy="291960"/>
+            <a:ext cx="10697400" cy="291600"/>
           </a:xfrm>
           <a:prstGeom prst="rect">
             <a:avLst/>
@@ -12918,7 +12495,7 @@
         <p:spPr>
           <a:xfrm>
             <a:off x="10168200" y="356760"/>
-            <a:ext cx="1416600" cy="200520"/>
+            <a:ext cx="1416240" cy="200160"/>
           </a:xfrm>
           <a:prstGeom prst="rect">
             <a:avLst/>
@@ -12948,7 +12525,7 @@
               </a:tabLst>
             </a:pPr>
             <a:r>
-              <a:rPr b="1" lang="en-US" sz="850" spc="75" strike="noStrike">
+              <a:rPr b="1" lang="en-US" sz="850" spc="72" strike="noStrike">
                 <a:solidFill>
                   <a:srgbClr val="2f67e8"/>
                 </a:solidFill>
@@ -12975,7 +12552,7 @@
         <p:spPr>
           <a:xfrm>
             <a:off x="914400" y="1463040"/>
-            <a:ext cx="4982760" cy="3748320"/>
+            <a:ext cx="4982400" cy="3747960"/>
           </a:xfrm>
           <a:prstGeom prst="rect">
             <a:avLst/>
@@ -13643,7 +13220,7 @@
         <p:spPr>
           <a:xfrm>
             <a:off x="6428160" y="1207080"/>
-            <a:ext cx="2513880" cy="1279440"/>
+            <a:ext cx="2513520" cy="1279080"/>
           </a:xfrm>
           <a:prstGeom prst="roundRect">
             <a:avLst>
@@ -13694,7 +13271,7 @@
         <p:spPr>
           <a:xfrm>
             <a:off x="6428160" y="1207080"/>
-            <a:ext cx="54000" cy="1279440"/>
+            <a:ext cx="53640" cy="1279080"/>
           </a:xfrm>
           <a:prstGeom prst="rect">
             <a:avLst/>
@@ -13743,7 +13320,7 @@
         <p:spPr>
           <a:xfrm>
             <a:off x="6629400" y="1344240"/>
-            <a:ext cx="2129760" cy="227880"/>
+            <a:ext cx="2129400" cy="227520"/>
           </a:xfrm>
           <a:prstGeom prst="rect">
             <a:avLst/>
@@ -13800,7 +13377,7 @@
         <p:spPr>
           <a:xfrm>
             <a:off x="6629400" y="1682640"/>
-            <a:ext cx="2129760" cy="676080"/>
+            <a:ext cx="2129400" cy="675720"/>
           </a:xfrm>
           <a:prstGeom prst="rect">
             <a:avLst/>
@@ -13821,6 +13398,11 @@
             <a:normAutofit fontScale="96666"/>
           </a:bodyPr>
           <a:p>
+            <a:pPr>
+              <a:lnSpc>
+                <a:spcPct val="100000"/>
+              </a:lnSpc>
+            </a:pPr>
             <a:r>
               <a:rPr b="0" lang="en-US" sz="950" spc="-1" strike="noStrike">
                 <a:solidFill>
@@ -13875,7 +13457,7 @@
         <p:spPr>
           <a:xfrm>
             <a:off x="9144000" y="1207080"/>
-            <a:ext cx="2376720" cy="1279440"/>
+            <a:ext cx="2376360" cy="1279080"/>
           </a:xfrm>
           <a:prstGeom prst="roundRect">
             <a:avLst>
@@ -13926,7 +13508,7 @@
         <p:spPr>
           <a:xfrm>
             <a:off x="9144000" y="1207080"/>
-            <a:ext cx="54000" cy="1279440"/>
+            <a:ext cx="53640" cy="1279080"/>
           </a:xfrm>
           <a:prstGeom prst="rect">
             <a:avLst/>
@@ -13975,7 +13557,7 @@
         <p:spPr>
           <a:xfrm>
             <a:off x="9345240" y="1344240"/>
-            <a:ext cx="1992600" cy="227880"/>
+            <a:ext cx="1992240" cy="227520"/>
           </a:xfrm>
           <a:prstGeom prst="rect">
             <a:avLst/>
@@ -14032,7 +13614,7 @@
         <p:spPr>
           <a:xfrm>
             <a:off x="9345240" y="1682640"/>
-            <a:ext cx="1992600" cy="676080"/>
+            <a:ext cx="1992240" cy="675720"/>
           </a:xfrm>
           <a:prstGeom prst="rect">
             <a:avLst/>
@@ -14053,6 +13635,11 @@
             <a:normAutofit/>
           </a:bodyPr>
           <a:p>
+            <a:pPr>
+              <a:lnSpc>
+                <a:spcPct val="100000"/>
+              </a:lnSpc>
+            </a:pPr>
             <a:r>
               <a:rPr b="0" lang="en-US" sz="950" spc="-1" strike="noStrike">
                 <a:solidFill>
@@ -14107,7 +13694,7 @@
         <p:spPr>
           <a:xfrm>
             <a:off x="6428160" y="2743200"/>
-            <a:ext cx="5092560" cy="1142280"/>
+            <a:ext cx="5092200" cy="1141920"/>
           </a:xfrm>
           <a:prstGeom prst="roundRect">
             <a:avLst>
@@ -14158,7 +13745,7 @@
         <p:spPr>
           <a:xfrm>
             <a:off x="6428160" y="2743200"/>
-            <a:ext cx="54000" cy="1142280"/>
+            <a:ext cx="53640" cy="1141920"/>
           </a:xfrm>
           <a:prstGeom prst="rect">
             <a:avLst/>
@@ -14207,7 +13794,7 @@
         <p:spPr>
           <a:xfrm>
             <a:off x="6629400" y="2880360"/>
-            <a:ext cx="4708440" cy="227880"/>
+            <a:ext cx="4708080" cy="227520"/>
           </a:xfrm>
           <a:prstGeom prst="rect">
             <a:avLst/>
@@ -14264,7 +13851,7 @@
         <p:spPr>
           <a:xfrm>
             <a:off x="6629400" y="3218760"/>
-            <a:ext cx="4708440" cy="538920"/>
+            <a:ext cx="4708080" cy="538560"/>
           </a:xfrm>
           <a:prstGeom prst="rect">
             <a:avLst/>
@@ -14285,6 +13872,11 @@
             <a:normAutofit/>
           </a:bodyPr>
           <a:p>
+            <a:pPr>
+              <a:lnSpc>
+                <a:spcPct val="100000"/>
+              </a:lnSpc>
+            </a:pPr>
             <a:r>
               <a:rPr b="0" lang="en-US" sz="950" spc="-1" strike="noStrike">
                 <a:solidFill>
@@ -14339,7 +13931,7 @@
         <p:spPr>
           <a:xfrm>
             <a:off x="6428160" y="4160520"/>
-            <a:ext cx="5092560" cy="1297800"/>
+            <a:ext cx="5092200" cy="1297440"/>
           </a:xfrm>
           <a:prstGeom prst="roundRect">
             <a:avLst>
@@ -14390,7 +13982,7 @@
         <p:spPr>
           <a:xfrm>
             <a:off x="6428160" y="4160520"/>
-            <a:ext cx="54000" cy="1297800"/>
+            <a:ext cx="53640" cy="1297440"/>
           </a:xfrm>
           <a:prstGeom prst="rect">
             <a:avLst/>
@@ -14439,7 +14031,7 @@
         <p:spPr>
           <a:xfrm>
             <a:off x="6629400" y="4297680"/>
-            <a:ext cx="4708440" cy="227880"/>
+            <a:ext cx="4708080" cy="227520"/>
           </a:xfrm>
           <a:prstGeom prst="rect">
             <a:avLst/>
@@ -14496,7 +14088,7 @@
         <p:spPr>
           <a:xfrm>
             <a:off x="6629400" y="4636080"/>
-            <a:ext cx="4708440" cy="694080"/>
+            <a:ext cx="4708080" cy="693720"/>
           </a:xfrm>
           <a:prstGeom prst="rect">
             <a:avLst/>
@@ -14517,6 +14109,11 @@
             <a:normAutofit fontScale="87222" lnSpcReduction="10000"/>
           </a:bodyPr>
           <a:p>
+            <a:pPr>
+              <a:lnSpc>
+                <a:spcPct val="100000"/>
+              </a:lnSpc>
+            </a:pPr>
             <a:r>
               <a:rPr b="0" lang="en-US" sz="950" spc="-1" strike="noStrike">
                 <a:solidFill>
@@ -14653,7 +14250,7 @@
         <p:spPr>
           <a:xfrm>
             <a:off x="11292840" y="6574680"/>
-            <a:ext cx="799200" cy="299160"/>
+            <a:ext cx="798840" cy="298800"/>
           </a:xfrm>
           <a:prstGeom prst="rect">
             <a:avLst/>
@@ -14695,7 +14292,7 @@
                 <a:tab algn="l" pos="0"/>
               </a:tabLst>
             </a:pPr>
-            <a:fld id="{D8EB73A1-79CA-4E5E-A01F-758BBE762854}" type="slidenum">
+            <a:fld id="{6338479D-25DF-4EFF-8E8B-36543CF5CE74}" type="slidenum">
               <a:rPr b="0" lang="en-US" sz="850" spc="-1" strike="noStrike">
                 <a:solidFill>
                   <a:srgbClr val="7b8494"/>
@@ -14753,7 +14350,7 @@
         <p:spPr>
           <a:xfrm>
             <a:off x="567000" y="292680"/>
-            <a:ext cx="8960400" cy="401760"/>
+            <a:ext cx="8960040" cy="401400"/>
           </a:xfrm>
           <a:prstGeom prst="rect">
             <a:avLst/>
@@ -14810,7 +14407,7 @@
         <p:spPr>
           <a:xfrm>
             <a:off x="585360" y="749880"/>
-            <a:ext cx="10697760" cy="291960"/>
+            <a:ext cx="10697400" cy="291600"/>
           </a:xfrm>
           <a:prstGeom prst="rect">
             <a:avLst/>
@@ -14867,7 +14464,7 @@
         <p:spPr>
           <a:xfrm>
             <a:off x="10168200" y="356760"/>
-            <a:ext cx="1416600" cy="200520"/>
+            <a:ext cx="1416240" cy="200160"/>
           </a:xfrm>
           <a:prstGeom prst="rect">
             <a:avLst/>
@@ -14897,7 +14494,7 @@
               </a:tabLst>
             </a:pPr>
             <a:r>
-              <a:rPr b="1" lang="en-US" sz="850" spc="75" strike="noStrike">
+              <a:rPr b="1" lang="en-US" sz="850" spc="72" strike="noStrike">
                 <a:solidFill>
                   <a:srgbClr val="2f67e8"/>
                 </a:solidFill>
@@ -14924,7 +14521,7 @@
         <p:spPr>
           <a:xfrm>
             <a:off x="658440" y="1234440"/>
-            <a:ext cx="1992600" cy="1233720"/>
+            <a:ext cx="1992240" cy="1233360"/>
           </a:xfrm>
           <a:prstGeom prst="roundRect">
             <a:avLst>
@@ -14975,7 +14572,7 @@
         <p:spPr>
           <a:xfrm>
             <a:off x="658440" y="1234440"/>
-            <a:ext cx="54000" cy="1233720"/>
+            <a:ext cx="53640" cy="1233360"/>
           </a:xfrm>
           <a:prstGeom prst="rect">
             <a:avLst/>
@@ -15024,7 +14621,7 @@
         <p:spPr>
           <a:xfrm>
             <a:off x="859680" y="1371600"/>
-            <a:ext cx="1608480" cy="227880"/>
+            <a:ext cx="1608120" cy="227520"/>
           </a:xfrm>
           <a:prstGeom prst="rect">
             <a:avLst/>
@@ -15081,7 +14678,7 @@
         <p:spPr>
           <a:xfrm>
             <a:off x="859680" y="1710000"/>
-            <a:ext cx="1608480" cy="630360"/>
+            <a:ext cx="1608120" cy="630000"/>
           </a:xfrm>
           <a:prstGeom prst="rect">
             <a:avLst/>
@@ -15102,6 +14699,11 @@
             <a:normAutofit/>
           </a:bodyPr>
           <a:p>
+            <a:pPr>
+              <a:lnSpc>
+                <a:spcPct val="100000"/>
+              </a:lnSpc>
+            </a:pPr>
             <a:r>
               <a:rPr b="0" lang="en-US" sz="910" spc="-1" strike="noStrike">
                 <a:solidFill>
@@ -15120,6 +14722,11 @@
             </a:endParaRPr>
           </a:p>
           <a:p>
+            <a:pPr>
+              <a:lnSpc>
+                <a:spcPct val="100000"/>
+              </a:lnSpc>
+            </a:pPr>
             <a:r>
               <a:rPr b="0" lang="en-US" sz="910" spc="-1" strike="noStrike">
                 <a:solidFill>
@@ -15174,7 +14781,7 @@
         <p:spPr>
           <a:xfrm>
             <a:off x="2917080" y="1234440"/>
-            <a:ext cx="1992600" cy="1233720"/>
+            <a:ext cx="1992240" cy="1233360"/>
           </a:xfrm>
           <a:prstGeom prst="roundRect">
             <a:avLst>
@@ -15225,7 +14832,7 @@
         <p:spPr>
           <a:xfrm>
             <a:off x="2917080" y="1234440"/>
-            <a:ext cx="54000" cy="1233720"/>
+            <a:ext cx="53640" cy="1233360"/>
           </a:xfrm>
           <a:prstGeom prst="rect">
             <a:avLst/>
@@ -15274,7 +14881,7 @@
         <p:spPr>
           <a:xfrm>
             <a:off x="3117960" y="1371600"/>
-            <a:ext cx="1608480" cy="227880"/>
+            <a:ext cx="1608120" cy="227520"/>
           </a:xfrm>
           <a:prstGeom prst="rect">
             <a:avLst/>
@@ -15331,7 +14938,7 @@
         <p:spPr>
           <a:xfrm>
             <a:off x="3117960" y="1710000"/>
-            <a:ext cx="1608480" cy="630360"/>
+            <a:ext cx="1608120" cy="630000"/>
           </a:xfrm>
           <a:prstGeom prst="rect">
             <a:avLst/>
@@ -15352,6 +14959,11 @@
             <a:normAutofit/>
           </a:bodyPr>
           <a:p>
+            <a:pPr>
+              <a:lnSpc>
+                <a:spcPct val="100000"/>
+              </a:lnSpc>
+            </a:pPr>
             <a:r>
               <a:rPr b="0" lang="en-US" sz="910" spc="-1" strike="noStrike">
                 <a:solidFill>
@@ -15406,7 +15018,7 @@
         <p:spPr>
           <a:xfrm>
             <a:off x="5175360" y="1234440"/>
-            <a:ext cx="1992600" cy="1233720"/>
+            <a:ext cx="1992240" cy="1233360"/>
           </a:xfrm>
           <a:prstGeom prst="roundRect">
             <a:avLst>
@@ -15457,7 +15069,7 @@
         <p:spPr>
           <a:xfrm>
             <a:off x="5175360" y="1234440"/>
-            <a:ext cx="54000" cy="1233720"/>
+            <a:ext cx="53640" cy="1233360"/>
           </a:xfrm>
           <a:prstGeom prst="rect">
             <a:avLst/>
@@ -15506,7 +15118,7 @@
         <p:spPr>
           <a:xfrm>
             <a:off x="5376600" y="1371600"/>
-            <a:ext cx="1608480" cy="227880"/>
+            <a:ext cx="1608120" cy="227520"/>
           </a:xfrm>
           <a:prstGeom prst="rect">
             <a:avLst/>
@@ -15563,7 +15175,7 @@
         <p:spPr>
           <a:xfrm>
             <a:off x="5376600" y="1710000"/>
-            <a:ext cx="1608480" cy="630360"/>
+            <a:ext cx="1608120" cy="630000"/>
           </a:xfrm>
           <a:prstGeom prst="rect">
             <a:avLst/>
@@ -15584,6 +15196,11 @@
             <a:normAutofit/>
           </a:bodyPr>
           <a:p>
+            <a:pPr>
+              <a:lnSpc>
+                <a:spcPct val="100000"/>
+              </a:lnSpc>
+            </a:pPr>
             <a:r>
               <a:rPr b="0" lang="en-US" sz="910" spc="-1" strike="noStrike">
                 <a:solidFill>
@@ -15638,7 +15255,7 @@
         <p:spPr>
           <a:xfrm>
             <a:off x="7434000" y="1234440"/>
-            <a:ext cx="1992600" cy="1233720"/>
+            <a:ext cx="1992240" cy="1233360"/>
           </a:xfrm>
           <a:prstGeom prst="roundRect">
             <a:avLst>
@@ -15689,7 +15306,7 @@
         <p:spPr>
           <a:xfrm>
             <a:off x="7434000" y="1234440"/>
-            <a:ext cx="54000" cy="1233720"/>
+            <a:ext cx="53640" cy="1233360"/>
           </a:xfrm>
           <a:prstGeom prst="rect">
             <a:avLst/>
@@ -15738,7 +15355,7 @@
         <p:spPr>
           <a:xfrm>
             <a:off x="7635240" y="1371600"/>
-            <a:ext cx="1608480" cy="227880"/>
+            <a:ext cx="1608120" cy="227520"/>
           </a:xfrm>
           <a:prstGeom prst="rect">
             <a:avLst/>
@@ -15795,7 +15412,7 @@
         <p:spPr>
           <a:xfrm>
             <a:off x="7635240" y="1710000"/>
-            <a:ext cx="1608480" cy="630360"/>
+            <a:ext cx="1608120" cy="630000"/>
           </a:xfrm>
           <a:prstGeom prst="rect">
             <a:avLst/>
@@ -15816,6 +15433,11 @@
             <a:normAutofit/>
           </a:bodyPr>
           <a:p>
+            <a:pPr>
+              <a:lnSpc>
+                <a:spcPct val="100000"/>
+              </a:lnSpc>
+            </a:pPr>
             <a:r>
               <a:rPr b="0" lang="en-US" sz="910" spc="-1" strike="noStrike">
                 <a:solidFill>
@@ -15870,7 +15492,7 @@
         <p:spPr>
           <a:xfrm>
             <a:off x="9692640" y="1234440"/>
-            <a:ext cx="1992600" cy="1233720"/>
+            <a:ext cx="1992240" cy="1233360"/>
           </a:xfrm>
           <a:prstGeom prst="roundRect">
             <a:avLst>
@@ -15921,7 +15543,7 @@
         <p:spPr>
           <a:xfrm>
             <a:off x="9692640" y="1234440"/>
-            <a:ext cx="54000" cy="1233720"/>
+            <a:ext cx="53640" cy="1233360"/>
           </a:xfrm>
           <a:prstGeom prst="rect">
             <a:avLst/>
@@ -15970,7 +15592,7 @@
         <p:spPr>
           <a:xfrm>
             <a:off x="9893880" y="1371600"/>
-            <a:ext cx="1608480" cy="227880"/>
+            <a:ext cx="1608120" cy="227520"/>
           </a:xfrm>
           <a:prstGeom prst="rect">
             <a:avLst/>
@@ -16027,7 +15649,7 @@
         <p:spPr>
           <a:xfrm>
             <a:off x="9893880" y="1710000"/>
-            <a:ext cx="1608480" cy="630360"/>
+            <a:ext cx="1608120" cy="630000"/>
           </a:xfrm>
           <a:prstGeom prst="rect">
             <a:avLst/>
@@ -16084,7 +15706,7 @@
         <p:spPr>
           <a:xfrm>
             <a:off x="658440" y="2926080"/>
-            <a:ext cx="3474000" cy="1325160"/>
+            <a:ext cx="3473640" cy="1324800"/>
           </a:xfrm>
           <a:prstGeom prst="roundRect">
             <a:avLst>
@@ -16135,7 +15757,7 @@
         <p:spPr>
           <a:xfrm>
             <a:off x="658440" y="2926080"/>
-            <a:ext cx="54000" cy="1325160"/>
+            <a:ext cx="53640" cy="1324800"/>
           </a:xfrm>
           <a:prstGeom prst="rect">
             <a:avLst/>
@@ -16184,7 +15806,7 @@
         <p:spPr>
           <a:xfrm>
             <a:off x="859680" y="3063240"/>
-            <a:ext cx="3089880" cy="227880"/>
+            <a:ext cx="3089520" cy="227520"/>
           </a:xfrm>
           <a:prstGeom prst="rect">
             <a:avLst/>
@@ -16241,7 +15863,7 @@
         <p:spPr>
           <a:xfrm>
             <a:off x="859680" y="3401640"/>
-            <a:ext cx="3089880" cy="721800"/>
+            <a:ext cx="3089520" cy="721440"/>
           </a:xfrm>
           <a:prstGeom prst="rect">
             <a:avLst/>
@@ -16262,6 +15884,11 @@
             <a:normAutofit fontScale="81111"/>
           </a:bodyPr>
           <a:p>
+            <a:pPr>
+              <a:lnSpc>
+                <a:spcPct val="100000"/>
+              </a:lnSpc>
+            </a:pPr>
             <a:r>
               <a:rPr b="0" lang="en-US" sz="1000" spc="-1" strike="noStrike">
                 <a:solidFill>
@@ -16280,6 +15907,11 @@
             </a:endParaRPr>
           </a:p>
           <a:p>
+            <a:pPr>
+              <a:lnSpc>
+                <a:spcPct val="100000"/>
+              </a:lnSpc>
+            </a:pPr>
             <a:r>
               <a:rPr b="0" lang="en-US" sz="1000" spc="-1" strike="noStrike">
                 <a:solidFill>
@@ -16298,6 +15930,11 @@
             </a:endParaRPr>
           </a:p>
           <a:p>
+            <a:pPr>
+              <a:lnSpc>
+                <a:spcPct val="100000"/>
+              </a:lnSpc>
+            </a:pPr>
             <a:r>
               <a:rPr b="0" lang="en-US" sz="1000" spc="-1" strike="noStrike">
                 <a:solidFill>
@@ -16404,7 +16041,7 @@
         <p:spPr>
           <a:xfrm>
             <a:off x="4370760" y="2926080"/>
-            <a:ext cx="3474000" cy="1325160"/>
+            <a:ext cx="3473640" cy="1324800"/>
           </a:xfrm>
           <a:prstGeom prst="roundRect">
             <a:avLst>
@@ -16455,7 +16092,7 @@
         <p:spPr>
           <a:xfrm>
             <a:off x="4370760" y="2926080"/>
-            <a:ext cx="54000" cy="1325160"/>
+            <a:ext cx="53640" cy="1324800"/>
           </a:xfrm>
           <a:prstGeom prst="rect">
             <a:avLst/>
@@ -16504,7 +16141,7 @@
         <p:spPr>
           <a:xfrm>
             <a:off x="4572000" y="3063240"/>
-            <a:ext cx="3089880" cy="227880"/>
+            <a:ext cx="3089520" cy="227520"/>
           </a:xfrm>
           <a:prstGeom prst="rect">
             <a:avLst/>
@@ -16561,7 +16198,7 @@
         <p:spPr>
           <a:xfrm>
             <a:off x="4572000" y="3401640"/>
-            <a:ext cx="3089880" cy="721800"/>
+            <a:ext cx="3089520" cy="721440"/>
           </a:xfrm>
           <a:prstGeom prst="rect">
             <a:avLst/>
@@ -16582,6 +16219,11 @@
             <a:normAutofit/>
           </a:bodyPr>
           <a:p>
+            <a:pPr>
+              <a:lnSpc>
+                <a:spcPct val="100000"/>
+              </a:lnSpc>
+            </a:pPr>
             <a:r>
               <a:rPr b="0" lang="en-US" sz="1000" spc="-1" strike="noStrike">
                 <a:solidFill>
@@ -16636,7 +16278,7 @@
         <p:spPr>
           <a:xfrm>
             <a:off x="8083440" y="2926080"/>
-            <a:ext cx="3437280" cy="1325160"/>
+            <a:ext cx="3436920" cy="1324800"/>
           </a:xfrm>
           <a:prstGeom prst="roundRect">
             <a:avLst>
@@ -16687,7 +16329,7 @@
         <p:spPr>
           <a:xfrm>
             <a:off x="8083440" y="2926080"/>
-            <a:ext cx="54000" cy="1325160"/>
+            <a:ext cx="53640" cy="1324800"/>
           </a:xfrm>
           <a:prstGeom prst="rect">
             <a:avLst/>
@@ -16736,7 +16378,7 @@
         <p:spPr>
           <a:xfrm>
             <a:off x="8284320" y="3063240"/>
-            <a:ext cx="3053520" cy="227880"/>
+            <a:ext cx="3053160" cy="227520"/>
           </a:xfrm>
           <a:prstGeom prst="rect">
             <a:avLst/>
@@ -16793,7 +16435,7 @@
         <p:spPr>
           <a:xfrm>
             <a:off x="8284320" y="3401640"/>
-            <a:ext cx="3053520" cy="721800"/>
+            <a:ext cx="3053160" cy="721440"/>
           </a:xfrm>
           <a:prstGeom prst="rect">
             <a:avLst/>
@@ -16814,6 +16456,11 @@
             <a:normAutofit/>
           </a:bodyPr>
           <a:p>
+            <a:pPr>
+              <a:lnSpc>
+                <a:spcPct val="100000"/>
+              </a:lnSpc>
+            </a:pPr>
             <a:r>
               <a:rPr b="0" lang="en-US" sz="1000" spc="-1" strike="noStrike">
                 <a:solidFill>
@@ -16868,7 +16515,7 @@
         <p:spPr>
           <a:xfrm>
             <a:off x="658440" y="4645080"/>
-            <a:ext cx="10862280" cy="867960"/>
+            <a:ext cx="10861920" cy="867600"/>
           </a:xfrm>
           <a:prstGeom prst="roundRect">
             <a:avLst>
@@ -16919,7 +16566,7 @@
         <p:spPr>
           <a:xfrm>
             <a:off x="914400" y="4919400"/>
-            <a:ext cx="502200" cy="136440"/>
+            <a:ext cx="501840" cy="136080"/>
           </a:xfrm>
           <a:prstGeom prst="rect">
             <a:avLst/>
@@ -16975,7 +16622,7 @@
         <p:spPr>
           <a:xfrm>
             <a:off x="1600200" y="4873680"/>
-            <a:ext cx="9234720" cy="236880"/>
+            <a:ext cx="9234360" cy="236520"/>
           </a:xfrm>
           <a:prstGeom prst="rect">
             <a:avLst/>
@@ -17035,7 +16682,7 @@
         <p:spPr>
           <a:xfrm>
             <a:off x="11292840" y="6574680"/>
-            <a:ext cx="799200" cy="299160"/>
+            <a:ext cx="798840" cy="298800"/>
           </a:xfrm>
           <a:prstGeom prst="rect">
             <a:avLst/>
@@ -17077,7 +16724,7 @@
                 <a:tab algn="l" pos="0"/>
               </a:tabLst>
             </a:pPr>
-            <a:fld id="{0E5F6B71-CDB0-4C5F-BF21-D4E4400943E0}" type="slidenum">
+            <a:fld id="{CEFADE3D-7CF4-4167-964A-11BF61B80E95}" type="slidenum">
               <a:rPr b="0" lang="en-US" sz="850" spc="-1" strike="noStrike">
                 <a:solidFill>
                   <a:srgbClr val="7b8494"/>
@@ -17135,7 +16782,7 @@
         <p:spPr>
           <a:xfrm>
             <a:off x="567000" y="292680"/>
-            <a:ext cx="8960400" cy="401760"/>
+            <a:ext cx="8960040" cy="401400"/>
           </a:xfrm>
           <a:prstGeom prst="rect">
             <a:avLst/>
@@ -17192,7 +16839,7 @@
         <p:spPr>
           <a:xfrm>
             <a:off x="585360" y="749880"/>
-            <a:ext cx="10697760" cy="291960"/>
+            <a:ext cx="10697400" cy="291600"/>
           </a:xfrm>
           <a:prstGeom prst="rect">
             <a:avLst/>
@@ -17249,7 +16896,7 @@
         <p:spPr>
           <a:xfrm>
             <a:off x="10168200" y="356760"/>
-            <a:ext cx="1416600" cy="200520"/>
+            <a:ext cx="1416240" cy="200160"/>
           </a:xfrm>
           <a:prstGeom prst="rect">
             <a:avLst/>
@@ -17279,7 +16926,7 @@
               </a:tabLst>
             </a:pPr>
             <a:r>
-              <a:rPr b="1" lang="en-US" sz="850" spc="75" strike="noStrike">
+              <a:rPr b="1" lang="en-US" sz="850" spc="72" strike="noStrike">
                 <a:solidFill>
                   <a:srgbClr val="2f67e8"/>
                 </a:solidFill>
@@ -17306,7 +16953,7 @@
         <p:spPr>
           <a:xfrm>
             <a:off x="567000" y="1325880"/>
-            <a:ext cx="1626840" cy="1873800"/>
+            <a:ext cx="1626480" cy="1873440"/>
           </a:xfrm>
           <a:prstGeom prst="roundRect">
             <a:avLst>
@@ -17357,7 +17004,7 @@
         <p:spPr>
           <a:xfrm>
             <a:off x="567000" y="1325880"/>
-            <a:ext cx="54000" cy="1873800"/>
+            <a:ext cx="53640" cy="1873440"/>
           </a:xfrm>
           <a:prstGeom prst="rect">
             <a:avLst/>
@@ -17406,7 +17053,7 @@
         <p:spPr>
           <a:xfrm>
             <a:off x="768240" y="1463040"/>
-            <a:ext cx="932040" cy="365040"/>
+            <a:ext cx="931680" cy="364680"/>
           </a:xfrm>
           <a:prstGeom prst="rect">
             <a:avLst/>
@@ -17463,7 +17110,7 @@
         <p:spPr>
           <a:xfrm>
             <a:off x="768240" y="1892880"/>
-            <a:ext cx="1297800" cy="1160640"/>
+            <a:ext cx="1297440" cy="1160280"/>
           </a:xfrm>
           <a:prstGeom prst="rect">
             <a:avLst/>
@@ -17520,7 +17167,7 @@
         <p:spPr>
           <a:xfrm>
             <a:off x="1737360" y="1481400"/>
-            <a:ext cx="392400" cy="246240"/>
+            <a:ext cx="392040" cy="245880"/>
           </a:xfrm>
           <a:prstGeom prst="roundRect">
             <a:avLst>
@@ -17571,7 +17218,7 @@
         <p:spPr>
           <a:xfrm>
             <a:off x="1774080" y="1522440"/>
-            <a:ext cx="319320" cy="191160"/>
+            <a:ext cx="318960" cy="190800"/>
           </a:xfrm>
           <a:prstGeom prst="rect">
             <a:avLst/>
@@ -17627,7 +17274,7 @@
         <p:spPr>
           <a:xfrm>
             <a:off x="2441520" y="1325880"/>
-            <a:ext cx="1626840" cy="1873800"/>
+            <a:ext cx="1626480" cy="1873440"/>
           </a:xfrm>
           <a:prstGeom prst="roundRect">
             <a:avLst>
@@ -17678,7 +17325,7 @@
         <p:spPr>
           <a:xfrm>
             <a:off x="2441520" y="1325880"/>
-            <a:ext cx="54000" cy="1873800"/>
+            <a:ext cx="53640" cy="1873440"/>
           </a:xfrm>
           <a:prstGeom prst="rect">
             <a:avLst/>
@@ -17727,7 +17374,7 @@
         <p:spPr>
           <a:xfrm>
             <a:off x="2642760" y="1463040"/>
-            <a:ext cx="932040" cy="365040"/>
+            <a:ext cx="931680" cy="364680"/>
           </a:xfrm>
           <a:prstGeom prst="rect">
             <a:avLst/>
@@ -17784,7 +17431,7 @@
         <p:spPr>
           <a:xfrm>
             <a:off x="2642760" y="1892880"/>
-            <a:ext cx="1297800" cy="1160640"/>
+            <a:ext cx="1297440" cy="1160280"/>
           </a:xfrm>
           <a:prstGeom prst="rect">
             <a:avLst/>
@@ -17841,7 +17488,7 @@
         <p:spPr>
           <a:xfrm>
             <a:off x="3611880" y="1481400"/>
-            <a:ext cx="392400" cy="246240"/>
+            <a:ext cx="392040" cy="245880"/>
           </a:xfrm>
           <a:prstGeom prst="roundRect">
             <a:avLst>
@@ -17892,7 +17539,7 @@
         <p:spPr>
           <a:xfrm>
             <a:off x="3648600" y="1522440"/>
-            <a:ext cx="319320" cy="191160"/>
+            <a:ext cx="318960" cy="190800"/>
           </a:xfrm>
           <a:prstGeom prst="rect">
             <a:avLst/>
@@ -17948,7 +17595,7 @@
         <p:spPr>
           <a:xfrm>
             <a:off x="4316040" y="1325880"/>
-            <a:ext cx="1626840" cy="1873800"/>
+            <a:ext cx="1626480" cy="1873440"/>
           </a:xfrm>
           <a:prstGeom prst="roundRect">
             <a:avLst>
@@ -17999,7 +17646,7 @@
         <p:spPr>
           <a:xfrm>
             <a:off x="4316040" y="1325880"/>
-            <a:ext cx="54000" cy="1873800"/>
+            <a:ext cx="53640" cy="1873440"/>
           </a:xfrm>
           <a:prstGeom prst="rect">
             <a:avLst/>
@@ -18048,7 +17695,7 @@
         <p:spPr>
           <a:xfrm>
             <a:off x="4517280" y="1463040"/>
-            <a:ext cx="932040" cy="365040"/>
+            <a:ext cx="931680" cy="364680"/>
           </a:xfrm>
           <a:prstGeom prst="rect">
             <a:avLst/>
@@ -18105,7 +17752,7 @@
         <p:spPr>
           <a:xfrm>
             <a:off x="4517280" y="1892880"/>
-            <a:ext cx="1297800" cy="1160640"/>
+            <a:ext cx="1297440" cy="1160280"/>
           </a:xfrm>
           <a:prstGeom prst="rect">
             <a:avLst/>
@@ -18126,6 +17773,11 @@
             <a:normAutofit/>
           </a:bodyPr>
           <a:p>
+            <a:pPr>
+              <a:lnSpc>
+                <a:spcPct val="100000"/>
+              </a:lnSpc>
+            </a:pPr>
             <a:r>
               <a:rPr b="0" lang="en-US" sz="1050" spc="-1" strike="noStrike">
                 <a:solidFill>
@@ -18180,7 +17832,7 @@
         <p:spPr>
           <a:xfrm>
             <a:off x="5486400" y="1481400"/>
-            <a:ext cx="392400" cy="246240"/>
+            <a:ext cx="392040" cy="245880"/>
           </a:xfrm>
           <a:prstGeom prst="roundRect">
             <a:avLst>
@@ -18231,7 +17883,7 @@
         <p:spPr>
           <a:xfrm>
             <a:off x="5523120" y="1522440"/>
-            <a:ext cx="319320" cy="191160"/>
+            <a:ext cx="318960" cy="190800"/>
           </a:xfrm>
           <a:prstGeom prst="rect">
             <a:avLst/>
@@ -18287,7 +17939,7 @@
         <p:spPr>
           <a:xfrm>
             <a:off x="6190560" y="1325880"/>
-            <a:ext cx="1626840" cy="1873800"/>
+            <a:ext cx="1626480" cy="1873440"/>
           </a:xfrm>
           <a:prstGeom prst="roundRect">
             <a:avLst>
@@ -18338,7 +17990,7 @@
         <p:spPr>
           <a:xfrm>
             <a:off x="6190560" y="1325880"/>
-            <a:ext cx="54000" cy="1873800"/>
+            <a:ext cx="53640" cy="1873440"/>
           </a:xfrm>
           <a:prstGeom prst="rect">
             <a:avLst/>
@@ -18387,7 +18039,7 @@
         <p:spPr>
           <a:xfrm>
             <a:off x="6391800" y="1463040"/>
-            <a:ext cx="932040" cy="365040"/>
+            <a:ext cx="931680" cy="364680"/>
           </a:xfrm>
           <a:prstGeom prst="rect">
             <a:avLst/>
@@ -18444,7 +18096,7 @@
         <p:spPr>
           <a:xfrm>
             <a:off x="6391800" y="1892880"/>
-            <a:ext cx="1297800" cy="1160640"/>
+            <a:ext cx="1297440" cy="1160280"/>
           </a:xfrm>
           <a:prstGeom prst="rect">
             <a:avLst/>
@@ -18501,7 +18153,7 @@
         <p:spPr>
           <a:xfrm>
             <a:off x="7360920" y="1481400"/>
-            <a:ext cx="392400" cy="246240"/>
+            <a:ext cx="392040" cy="245880"/>
           </a:xfrm>
           <a:prstGeom prst="roundRect">
             <a:avLst>
@@ -18552,7 +18204,7 @@
         <p:spPr>
           <a:xfrm>
             <a:off x="7397640" y="1522440"/>
-            <a:ext cx="319320" cy="191160"/>
+            <a:ext cx="318960" cy="190800"/>
           </a:xfrm>
           <a:prstGeom prst="rect">
             <a:avLst/>
@@ -18608,7 +18260,7 @@
         <p:spPr>
           <a:xfrm>
             <a:off x="8065080" y="1325880"/>
-            <a:ext cx="1626840" cy="1873800"/>
+            <a:ext cx="1626480" cy="1873440"/>
           </a:xfrm>
           <a:prstGeom prst="roundRect">
             <a:avLst>
@@ -18659,7 +18311,7 @@
         <p:spPr>
           <a:xfrm>
             <a:off x="8065080" y="1325880"/>
-            <a:ext cx="54000" cy="1873800"/>
+            <a:ext cx="53640" cy="1873440"/>
           </a:xfrm>
           <a:prstGeom prst="rect">
             <a:avLst/>
@@ -18708,7 +18360,7 @@
         <p:spPr>
           <a:xfrm>
             <a:off x="8266320" y="1463040"/>
-            <a:ext cx="932040" cy="365040"/>
+            <a:ext cx="931680" cy="364680"/>
           </a:xfrm>
           <a:prstGeom prst="rect">
             <a:avLst/>
@@ -18765,7 +18417,7 @@
         <p:spPr>
           <a:xfrm>
             <a:off x="8266320" y="1892880"/>
-            <a:ext cx="1297800" cy="1160640"/>
+            <a:ext cx="1297440" cy="1160280"/>
           </a:xfrm>
           <a:prstGeom prst="rect">
             <a:avLst/>
@@ -18822,7 +18474,7 @@
         <p:spPr>
           <a:xfrm>
             <a:off x="9235440" y="1481400"/>
-            <a:ext cx="392400" cy="246240"/>
+            <a:ext cx="392040" cy="245880"/>
           </a:xfrm>
           <a:prstGeom prst="roundRect">
             <a:avLst>
@@ -18873,7 +18525,7 @@
         <p:spPr>
           <a:xfrm>
             <a:off x="9272160" y="1522440"/>
-            <a:ext cx="319320" cy="191160"/>
+            <a:ext cx="318960" cy="190800"/>
           </a:xfrm>
           <a:prstGeom prst="rect">
             <a:avLst/>
@@ -18929,7 +18581,7 @@
         <p:spPr>
           <a:xfrm>
             <a:off x="9939600" y="1325880"/>
-            <a:ext cx="1626840" cy="1873800"/>
+            <a:ext cx="1626480" cy="1873440"/>
           </a:xfrm>
           <a:prstGeom prst="roundRect">
             <a:avLst>
@@ -18980,7 +18632,7 @@
         <p:spPr>
           <a:xfrm>
             <a:off x="9939600" y="1325880"/>
-            <a:ext cx="54000" cy="1873800"/>
+            <a:ext cx="53640" cy="1873440"/>
           </a:xfrm>
           <a:prstGeom prst="rect">
             <a:avLst/>
@@ -19029,7 +18681,7 @@
         <p:spPr>
           <a:xfrm>
             <a:off x="10140840" y="1463040"/>
-            <a:ext cx="932040" cy="365040"/>
+            <a:ext cx="931680" cy="364680"/>
           </a:xfrm>
           <a:prstGeom prst="rect">
             <a:avLst/>
@@ -19086,7 +18738,7 @@
         <p:spPr>
           <a:xfrm>
             <a:off x="10140840" y="1892880"/>
-            <a:ext cx="1297800" cy="1160640"/>
+            <a:ext cx="1297440" cy="1160280"/>
           </a:xfrm>
           <a:prstGeom prst="rect">
             <a:avLst/>
@@ -19107,6 +18759,11 @@
             <a:normAutofit/>
           </a:bodyPr>
           <a:p>
+            <a:pPr>
+              <a:lnSpc>
+                <a:spcPct val="100000"/>
+              </a:lnSpc>
+            </a:pPr>
             <a:r>
               <a:rPr b="0" lang="en-US" sz="1050" spc="-1" strike="noStrike">
                 <a:solidFill>
@@ -19161,7 +18818,7 @@
         <p:spPr>
           <a:xfrm>
             <a:off x="11109960" y="1481400"/>
-            <a:ext cx="392400" cy="246240"/>
+            <a:ext cx="392040" cy="245880"/>
           </a:xfrm>
           <a:prstGeom prst="roundRect">
             <a:avLst>
@@ -19212,7 +18869,7 @@
         <p:spPr>
           <a:xfrm>
             <a:off x="11146680" y="1522440"/>
-            <a:ext cx="319320" cy="191160"/>
+            <a:ext cx="318960" cy="190800"/>
           </a:xfrm>
           <a:prstGeom prst="rect">
             <a:avLst/>
@@ -19268,7 +18925,7 @@
         <p:spPr>
           <a:xfrm>
             <a:off x="658440" y="3749040"/>
-            <a:ext cx="1828080" cy="182160"/>
+            <a:ext cx="1827720" cy="181800"/>
           </a:xfrm>
           <a:prstGeom prst="rect">
             <a:avLst/>
@@ -19324,7 +18981,7 @@
         <p:spPr>
           <a:xfrm>
             <a:off x="658440" y="4069080"/>
-            <a:ext cx="3245400" cy="310320"/>
+            <a:ext cx="3245040" cy="309960"/>
           </a:xfrm>
           <a:prstGeom prst="roundRect">
             <a:avLst>
@@ -19375,7 +19032,7 @@
         <p:spPr>
           <a:xfrm>
             <a:off x="731520" y="4133160"/>
-            <a:ext cx="3099240" cy="127440"/>
+            <a:ext cx="3098880" cy="127080"/>
           </a:xfrm>
           <a:prstGeom prst="rect">
             <a:avLst/>
@@ -19431,7 +19088,7 @@
         <p:spPr>
           <a:xfrm>
             <a:off x="4316040" y="4069080"/>
-            <a:ext cx="3245400" cy="310320"/>
+            <a:ext cx="3245040" cy="309960"/>
           </a:xfrm>
           <a:prstGeom prst="roundRect">
             <a:avLst>
@@ -19482,7 +19139,7 @@
         <p:spPr>
           <a:xfrm>
             <a:off x="4389120" y="4133160"/>
-            <a:ext cx="3099240" cy="127440"/>
+            <a:ext cx="3098880" cy="127080"/>
           </a:xfrm>
           <a:prstGeom prst="rect">
             <a:avLst/>
@@ -19538,7 +19195,7 @@
         <p:spPr>
           <a:xfrm>
             <a:off x="7973640" y="4069080"/>
-            <a:ext cx="3245400" cy="310320"/>
+            <a:ext cx="3245040" cy="309960"/>
           </a:xfrm>
           <a:prstGeom prst="roundRect">
             <a:avLst>
@@ -19589,7 +19246,7 @@
         <p:spPr>
           <a:xfrm>
             <a:off x="8046720" y="4133160"/>
-            <a:ext cx="3099240" cy="127440"/>
+            <a:ext cx="3098880" cy="127080"/>
           </a:xfrm>
           <a:prstGeom prst="rect">
             <a:avLst/>
@@ -19645,7 +19302,7 @@
         <p:spPr>
           <a:xfrm>
             <a:off x="658440" y="4507920"/>
-            <a:ext cx="3245400" cy="310320"/>
+            <a:ext cx="3245040" cy="309960"/>
           </a:xfrm>
           <a:prstGeom prst="roundRect">
             <a:avLst>
@@ -19696,7 +19353,7 @@
         <p:spPr>
           <a:xfrm>
             <a:off x="731520" y="4572000"/>
-            <a:ext cx="3099240" cy="127440"/>
+            <a:ext cx="3098880" cy="127080"/>
           </a:xfrm>
           <a:prstGeom prst="rect">
             <a:avLst/>
@@ -19752,7 +19409,7 @@
         <p:spPr>
           <a:xfrm>
             <a:off x="4316040" y="4507920"/>
-            <a:ext cx="3245400" cy="310320"/>
+            <a:ext cx="3245040" cy="309960"/>
           </a:xfrm>
           <a:prstGeom prst="roundRect">
             <a:avLst>
@@ -19803,7 +19460,7 @@
         <p:spPr>
           <a:xfrm>
             <a:off x="4389120" y="4572000"/>
-            <a:ext cx="3099240" cy="127440"/>
+            <a:ext cx="3098880" cy="127080"/>
           </a:xfrm>
           <a:prstGeom prst="rect">
             <a:avLst/>
@@ -19859,7 +19516,7 @@
         <p:spPr>
           <a:xfrm>
             <a:off x="7973640" y="4507920"/>
-            <a:ext cx="3245400" cy="310320"/>
+            <a:ext cx="3245040" cy="309960"/>
           </a:xfrm>
           <a:prstGeom prst="roundRect">
             <a:avLst>
@@ -19910,7 +19567,7 @@
         <p:spPr>
           <a:xfrm>
             <a:off x="8046720" y="4572000"/>
-            <a:ext cx="3099240" cy="127440"/>
+            <a:ext cx="3098880" cy="127080"/>
           </a:xfrm>
           <a:prstGeom prst="rect">
             <a:avLst/>
@@ -19966,7 +19623,7 @@
         <p:spPr>
           <a:xfrm>
             <a:off x="658440" y="4946760"/>
-            <a:ext cx="3245400" cy="310320"/>
+            <a:ext cx="3245040" cy="309960"/>
           </a:xfrm>
           <a:prstGeom prst="roundRect">
             <a:avLst>
@@ -20017,7 +19674,7 @@
         <p:spPr>
           <a:xfrm>
             <a:off x="731520" y="5010840"/>
-            <a:ext cx="3099240" cy="127440"/>
+            <a:ext cx="3098880" cy="127080"/>
           </a:xfrm>
           <a:prstGeom prst="rect">
             <a:avLst/>
@@ -20073,7 +19730,7 @@
         <p:spPr>
           <a:xfrm>
             <a:off x="4316040" y="4946760"/>
-            <a:ext cx="3245400" cy="310320"/>
+            <a:ext cx="3245040" cy="309960"/>
           </a:xfrm>
           <a:prstGeom prst="roundRect">
             <a:avLst>
@@ -20124,7 +19781,7 @@
         <p:spPr>
           <a:xfrm>
             <a:off x="4389120" y="5010840"/>
-            <a:ext cx="3099240" cy="127440"/>
+            <a:ext cx="3098880" cy="127080"/>
           </a:xfrm>
           <a:prstGeom prst="rect">
             <a:avLst/>
@@ -20180,7 +19837,7 @@
         <p:spPr>
           <a:xfrm>
             <a:off x="7973640" y="4946760"/>
-            <a:ext cx="3245400" cy="310320"/>
+            <a:ext cx="3245040" cy="309960"/>
           </a:xfrm>
           <a:prstGeom prst="roundRect">
             <a:avLst>
@@ -20231,7 +19888,7 @@
         <p:spPr>
           <a:xfrm>
             <a:off x="8046720" y="5010840"/>
-            <a:ext cx="3099240" cy="127440"/>
+            <a:ext cx="3098880" cy="127080"/>
           </a:xfrm>
           <a:prstGeom prst="rect">
             <a:avLst/>
@@ -20291,7 +19948,7 @@
         <p:spPr>
           <a:xfrm>
             <a:off x="11292840" y="6574680"/>
-            <a:ext cx="799200" cy="299160"/>
+            <a:ext cx="798840" cy="298800"/>
           </a:xfrm>
           <a:prstGeom prst="rect">
             <a:avLst/>
@@ -20333,7 +19990,7 @@
                 <a:tab algn="l" pos="0"/>
               </a:tabLst>
             </a:pPr>
-            <a:fld id="{CD1E7A24-2952-40BE-A1DE-8E2C4AA25DCA}" type="slidenum">
+            <a:fld id="{621E8297-311F-4AEA-B3FB-884ED4D77313}" type="slidenum">
               <a:rPr b="0" lang="en-US" sz="850" spc="-1" strike="noStrike">
                 <a:solidFill>
                   <a:srgbClr val="7b8494"/>
@@ -20391,7 +20048,7 @@
         <p:spPr>
           <a:xfrm>
             <a:off x="567000" y="292680"/>
-            <a:ext cx="8960400" cy="401760"/>
+            <a:ext cx="8960040" cy="401400"/>
           </a:xfrm>
           <a:prstGeom prst="rect">
             <a:avLst/>
@@ -20448,7 +20105,7 @@
         <p:spPr>
           <a:xfrm>
             <a:off x="585360" y="749880"/>
-            <a:ext cx="10697760" cy="291960"/>
+            <a:ext cx="10697400" cy="291600"/>
           </a:xfrm>
           <a:prstGeom prst="rect">
             <a:avLst/>
@@ -20505,7 +20162,7 @@
         <p:spPr>
           <a:xfrm>
             <a:off x="10168200" y="356760"/>
-            <a:ext cx="1416600" cy="200520"/>
+            <a:ext cx="1416240" cy="200160"/>
           </a:xfrm>
           <a:prstGeom prst="rect">
             <a:avLst/>
@@ -20535,7 +20192,7 @@
               </a:tabLst>
             </a:pPr>
             <a:r>
-              <a:rPr b="1" lang="en-US" sz="850" spc="75" strike="noStrike">
+              <a:rPr b="1" lang="en-US" sz="850" spc="72" strike="noStrike">
                 <a:solidFill>
                   <a:srgbClr val="2f67e8"/>
                 </a:solidFill>
@@ -20562,7 +20219,7 @@
         <p:spPr>
           <a:xfrm>
             <a:off x="658440" y="1207080"/>
-            <a:ext cx="2925360" cy="639360"/>
+            <a:ext cx="2925000" cy="639000"/>
           </a:xfrm>
           <a:prstGeom prst="roundRect">
             <a:avLst>
@@ -20613,7 +20270,7 @@
         <p:spPr>
           <a:xfrm>
             <a:off x="658440" y="1207080"/>
-            <a:ext cx="54000" cy="639360"/>
+            <a:ext cx="53640" cy="639000"/>
           </a:xfrm>
           <a:prstGeom prst="rect">
             <a:avLst/>
@@ -20662,7 +20319,7 @@
         <p:spPr>
           <a:xfrm>
             <a:off x="859680" y="1344240"/>
-            <a:ext cx="2541240" cy="227880"/>
+            <a:ext cx="2540880" cy="227520"/>
           </a:xfrm>
           <a:prstGeom prst="rect">
             <a:avLst/>
@@ -20719,7 +20376,7 @@
         <p:spPr>
           <a:xfrm>
             <a:off x="3794760" y="1371600"/>
-            <a:ext cx="1645200" cy="163800"/>
+            <a:ext cx="1644840" cy="163440"/>
           </a:xfrm>
           <a:prstGeom prst="rect">
             <a:avLst/>
@@ -20775,7 +20432,7 @@
         <p:spPr>
           <a:xfrm>
             <a:off x="5577840" y="1316880"/>
-            <a:ext cx="5668560" cy="310320"/>
+            <a:ext cx="5668200" cy="309960"/>
           </a:xfrm>
           <a:prstGeom prst="rect">
             <a:avLst/>
@@ -20831,7 +20488,7 @@
         <p:spPr>
           <a:xfrm>
             <a:off x="658440" y="2030040"/>
-            <a:ext cx="2925360" cy="639360"/>
+            <a:ext cx="2925000" cy="639000"/>
           </a:xfrm>
           <a:prstGeom prst="roundRect">
             <a:avLst>
@@ -20882,7 +20539,7 @@
         <p:spPr>
           <a:xfrm>
             <a:off x="658440" y="2030040"/>
-            <a:ext cx="54000" cy="639360"/>
+            <a:ext cx="53640" cy="639000"/>
           </a:xfrm>
           <a:prstGeom prst="rect">
             <a:avLst/>
@@ -20931,7 +20588,7 @@
         <p:spPr>
           <a:xfrm>
             <a:off x="859680" y="2167200"/>
-            <a:ext cx="2541240" cy="227880"/>
+            <a:ext cx="2540880" cy="227520"/>
           </a:xfrm>
           <a:prstGeom prst="rect">
             <a:avLst/>
@@ -20988,7 +20645,7 @@
         <p:spPr>
           <a:xfrm>
             <a:off x="859680" y="2395440"/>
-            <a:ext cx="2568960" cy="163800"/>
+            <a:ext cx="2568600" cy="163440"/>
           </a:xfrm>
           <a:prstGeom prst="rect">
             <a:avLst/>
@@ -21045,7 +20702,7 @@
         <p:spPr>
           <a:xfrm>
             <a:off x="3794760" y="2194560"/>
-            <a:ext cx="1645200" cy="163800"/>
+            <a:ext cx="1644840" cy="163440"/>
           </a:xfrm>
           <a:prstGeom prst="rect">
             <a:avLst/>
@@ -21101,7 +20758,7 @@
         <p:spPr>
           <a:xfrm>
             <a:off x="5577840" y="2139840"/>
-            <a:ext cx="5668560" cy="310320"/>
+            <a:ext cx="5668200" cy="309960"/>
           </a:xfrm>
           <a:prstGeom prst="rect">
             <a:avLst/>
@@ -21157,7 +20814,7 @@
         <p:spPr>
           <a:xfrm>
             <a:off x="658440" y="2853000"/>
-            <a:ext cx="2925360" cy="639360"/>
+            <a:ext cx="2925000" cy="639000"/>
           </a:xfrm>
           <a:prstGeom prst="roundRect">
             <a:avLst>
@@ -21208,7 +20865,7 @@
         <p:spPr>
           <a:xfrm>
             <a:off x="658440" y="2853000"/>
-            <a:ext cx="54000" cy="639360"/>
+            <a:ext cx="53640" cy="639000"/>
           </a:xfrm>
           <a:prstGeom prst="rect">
             <a:avLst/>
@@ -21257,7 +20914,7 @@
         <p:spPr>
           <a:xfrm>
             <a:off x="859680" y="2990160"/>
-            <a:ext cx="2541240" cy="227880"/>
+            <a:ext cx="2540880" cy="227520"/>
           </a:xfrm>
           <a:prstGeom prst="rect">
             <a:avLst/>
@@ -21314,7 +20971,7 @@
         <p:spPr>
           <a:xfrm>
             <a:off x="859680" y="3228120"/>
-            <a:ext cx="2568960" cy="100080"/>
+            <a:ext cx="2568600" cy="99720"/>
           </a:xfrm>
           <a:prstGeom prst="rect">
             <a:avLst/>
@@ -21371,7 +21028,7 @@
         <p:spPr>
           <a:xfrm>
             <a:off x="3794760" y="3017520"/>
-            <a:ext cx="1645200" cy="163800"/>
+            <a:ext cx="1644840" cy="163440"/>
           </a:xfrm>
           <a:prstGeom prst="rect">
             <a:avLst/>
@@ -21427,7 +21084,7 @@
         <p:spPr>
           <a:xfrm>
             <a:off x="5577840" y="2962800"/>
-            <a:ext cx="5668560" cy="310320"/>
+            <a:ext cx="5668200" cy="309960"/>
           </a:xfrm>
           <a:prstGeom prst="rect">
             <a:avLst/>
@@ -21483,7 +21140,7 @@
         <p:spPr>
           <a:xfrm>
             <a:off x="658440" y="3675960"/>
-            <a:ext cx="2925360" cy="639360"/>
+            <a:ext cx="2925000" cy="639000"/>
           </a:xfrm>
           <a:prstGeom prst="roundRect">
             <a:avLst>
@@ -21534,7 +21191,7 @@
         <p:spPr>
           <a:xfrm>
             <a:off x="658440" y="3675960"/>
-            <a:ext cx="54000" cy="639360"/>
+            <a:ext cx="53640" cy="639000"/>
           </a:xfrm>
           <a:prstGeom prst="rect">
             <a:avLst/>
@@ -21583,7 +21240,7 @@
         <p:spPr>
           <a:xfrm>
             <a:off x="859680" y="3813120"/>
-            <a:ext cx="2541240" cy="227880"/>
+            <a:ext cx="2540880" cy="227520"/>
           </a:xfrm>
           <a:prstGeom prst="rect">
             <a:avLst/>
@@ -21640,7 +21297,7 @@
         <p:spPr>
           <a:xfrm>
             <a:off x="859680" y="4041360"/>
-            <a:ext cx="2568960" cy="163800"/>
+            <a:ext cx="2568600" cy="163440"/>
           </a:xfrm>
           <a:prstGeom prst="rect">
             <a:avLst/>
@@ -21697,7 +21354,7 @@
         <p:spPr>
           <a:xfrm>
             <a:off x="3794760" y="3840480"/>
-            <a:ext cx="1645200" cy="163800"/>
+            <a:ext cx="1644840" cy="163440"/>
           </a:xfrm>
           <a:prstGeom prst="rect">
             <a:avLst/>
@@ -21753,7 +21410,7 @@
         <p:spPr>
           <a:xfrm>
             <a:off x="5577840" y="3785760"/>
-            <a:ext cx="5668560" cy="310320"/>
+            <a:ext cx="5668200" cy="309960"/>
           </a:xfrm>
           <a:prstGeom prst="rect">
             <a:avLst/>
@@ -21809,7 +21466,7 @@
         <p:spPr>
           <a:xfrm>
             <a:off x="658440" y="4498920"/>
-            <a:ext cx="2925360" cy="639360"/>
+            <a:ext cx="2925000" cy="639000"/>
           </a:xfrm>
           <a:prstGeom prst="roundRect">
             <a:avLst>
@@ -21860,7 +21517,7 @@
         <p:spPr>
           <a:xfrm>
             <a:off x="658440" y="4498920"/>
-            <a:ext cx="54000" cy="639360"/>
+            <a:ext cx="53640" cy="639000"/>
           </a:xfrm>
           <a:prstGeom prst="rect">
             <a:avLst/>
@@ -21909,7 +21566,7 @@
         <p:spPr>
           <a:xfrm>
             <a:off x="859680" y="4636080"/>
-            <a:ext cx="2541240" cy="227880"/>
+            <a:ext cx="2540880" cy="227520"/>
           </a:xfrm>
           <a:prstGeom prst="rect">
             <a:avLst/>
@@ -21966,7 +21623,7 @@
         <p:spPr>
           <a:xfrm>
             <a:off x="859680" y="4865040"/>
-            <a:ext cx="2568960" cy="163800"/>
+            <a:ext cx="2568600" cy="163440"/>
           </a:xfrm>
           <a:prstGeom prst="rect">
             <a:avLst/>
@@ -22023,7 +21680,7 @@
         <p:spPr>
           <a:xfrm>
             <a:off x="3794760" y="4663440"/>
-            <a:ext cx="1645200" cy="163800"/>
+            <a:ext cx="1644840" cy="163440"/>
           </a:xfrm>
           <a:prstGeom prst="rect">
             <a:avLst/>
@@ -22079,7 +21736,7 @@
         <p:spPr>
           <a:xfrm>
             <a:off x="5577840" y="4608720"/>
-            <a:ext cx="5668560" cy="310320"/>
+            <a:ext cx="5668200" cy="309960"/>
           </a:xfrm>
           <a:prstGeom prst="rect">
             <a:avLst/>
@@ -22139,7 +21796,7 @@
         <p:spPr>
           <a:xfrm>
             <a:off x="11292840" y="6574680"/>
-            <a:ext cx="799200" cy="299160"/>
+            <a:ext cx="798840" cy="298800"/>
           </a:xfrm>
           <a:prstGeom prst="rect">
             <a:avLst/>
@@ -22181,7 +21838,7 @@
                 <a:tab algn="l" pos="0"/>
               </a:tabLst>
             </a:pPr>
-            <a:fld id="{D1A1E976-538E-47C4-995D-E9F4793F5CC1}" type="slidenum">
+            <a:fld id="{10797E24-04E8-4159-B6A3-ECE4CD4B68EE}" type="slidenum">
               <a:rPr b="0" lang="en-US" sz="850" spc="-1" strike="noStrike">
                 <a:solidFill>
                   <a:srgbClr val="7b8494"/>
@@ -22209,7 +21866,7 @@
         <p:spPr>
           <a:xfrm>
             <a:off x="859680" y="1600200"/>
-            <a:ext cx="2797560" cy="145800"/>
+            <a:ext cx="2797200" cy="145440"/>
           </a:xfrm>
           <a:prstGeom prst="rect">
             <a:avLst/>
@@ -22303,7 +21960,7 @@
         <p:spPr>
           <a:xfrm>
             <a:off x="658440" y="502920"/>
-            <a:ext cx="4114080" cy="365040"/>
+            <a:ext cx="4113720" cy="364680"/>
           </a:xfrm>
           <a:prstGeom prst="rect">
             <a:avLst/>
@@ -22360,7 +22017,7 @@
         <p:spPr>
           <a:xfrm>
             <a:off x="676800" y="932760"/>
-            <a:ext cx="5028480" cy="227880"/>
+            <a:ext cx="5028120" cy="227520"/>
           </a:xfrm>
           <a:prstGeom prst="rect">
             <a:avLst/>
@@ -22416,7 +22073,7 @@
         <p:spPr>
           <a:xfrm>
             <a:off x="685800" y="1353240"/>
-            <a:ext cx="5193000" cy="712440"/>
+            <a:ext cx="5192640" cy="712080"/>
           </a:xfrm>
           <a:prstGeom prst="rect">
             <a:avLst/>
@@ -22474,7 +22131,7 @@
         <p:spPr>
           <a:xfrm>
             <a:off x="6309360" y="1353240"/>
-            <a:ext cx="5193000" cy="712440"/>
+            <a:ext cx="5192640" cy="712080"/>
           </a:xfrm>
           <a:prstGeom prst="rect">
             <a:avLst/>
@@ -22532,7 +22189,7 @@
         <p:spPr>
           <a:xfrm>
             <a:off x="685800" y="2267640"/>
-            <a:ext cx="5193000" cy="712440"/>
+            <a:ext cx="5192640" cy="712080"/>
           </a:xfrm>
           <a:prstGeom prst="rect">
             <a:avLst/>
@@ -22590,7 +22247,7 @@
         <p:spPr>
           <a:xfrm>
             <a:off x="6309360" y="2267640"/>
-            <a:ext cx="5193000" cy="712440"/>
+            <a:ext cx="5192640" cy="712080"/>
           </a:xfrm>
           <a:prstGeom prst="rect">
             <a:avLst/>
@@ -22648,7 +22305,7 @@
         <p:spPr>
           <a:xfrm>
             <a:off x="685800" y="3182040"/>
-            <a:ext cx="5193000" cy="712440"/>
+            <a:ext cx="5192640" cy="712080"/>
           </a:xfrm>
           <a:prstGeom prst="rect">
             <a:avLst/>
@@ -22706,7 +22363,7 @@
         <p:spPr>
           <a:xfrm>
             <a:off x="6309360" y="3182040"/>
-            <a:ext cx="5193000" cy="712440"/>
+            <a:ext cx="5192640" cy="712080"/>
           </a:xfrm>
           <a:prstGeom prst="rect">
             <a:avLst/>
@@ -22764,7 +22421,7 @@
         <p:spPr>
           <a:xfrm>
             <a:off x="685800" y="4096440"/>
-            <a:ext cx="5193000" cy="712440"/>
+            <a:ext cx="5192640" cy="712080"/>
           </a:xfrm>
           <a:prstGeom prst="rect">
             <a:avLst/>
@@ -22822,7 +22479,7 @@
         <p:spPr>
           <a:xfrm>
             <a:off x="6309360" y="4096440"/>
-            <a:ext cx="5193000" cy="712440"/>
+            <a:ext cx="5192640" cy="712080"/>
           </a:xfrm>
           <a:prstGeom prst="rect">
             <a:avLst/>
@@ -22880,7 +22537,7 @@
         <p:spPr>
           <a:xfrm>
             <a:off x="676800" y="5212080"/>
-            <a:ext cx="6582960" cy="749160"/>
+            <a:ext cx="6582600" cy="748800"/>
           </a:xfrm>
           <a:prstGeom prst="roundRect">
             <a:avLst>
@@ -22931,7 +22588,7 @@
         <p:spPr>
           <a:xfrm>
             <a:off x="932760" y="5403960"/>
-            <a:ext cx="1462320" cy="163800"/>
+            <a:ext cx="1461960" cy="163440"/>
           </a:xfrm>
           <a:prstGeom prst="rect">
             <a:avLst/>
@@ -22987,7 +22644,7 @@
         <p:spPr>
           <a:xfrm>
             <a:off x="2359080" y="5367600"/>
-            <a:ext cx="4552920" cy="264600"/>
+            <a:ext cx="4552560" cy="264240"/>
           </a:xfrm>
           <a:prstGeom prst="rect">
             <a:avLst/>
@@ -23043,7 +22700,7 @@
         <p:spPr>
           <a:xfrm>
             <a:off x="8458200" y="5349240"/>
-            <a:ext cx="1919520" cy="255240"/>
+            <a:ext cx="1919160" cy="254880"/>
           </a:xfrm>
           <a:prstGeom prst="rect">
             <a:avLst/>
@@ -23073,7 +22730,7 @@
               </a:tabLst>
             </a:pPr>
             <a:r>
-              <a:rPr b="1" lang="en-US" sz="1200" spc="126" strike="noStrike">
+              <a:rPr b="1" lang="en-US" sz="1200" spc="123" strike="noStrike">
                 <a:solidFill>
                   <a:srgbClr val="a9c6ff"/>
                 </a:solidFill>
@@ -23099,7 +22756,7 @@
         <p:spPr>
           <a:xfrm>
             <a:off x="11228760" y="6217920"/>
-            <a:ext cx="255240" cy="145440"/>
+            <a:ext cx="254880" cy="145080"/>
           </a:xfrm>
           <a:prstGeom prst="rect">
             <a:avLst/>
@@ -23155,7 +22812,7 @@
         <p:spPr>
           <a:xfrm>
             <a:off x="8612640" y="777240"/>
-            <a:ext cx="1976040" cy="227160"/>
+            <a:ext cx="1975680" cy="226800"/>
           </a:xfrm>
           <a:prstGeom prst="rect">
             <a:avLst/>
@@ -23229,7 +22886,7 @@
         <p:spPr>
           <a:xfrm>
             <a:off x="567000" y="292680"/>
-            <a:ext cx="8960400" cy="401760"/>
+            <a:ext cx="8960040" cy="401400"/>
           </a:xfrm>
           <a:prstGeom prst="rect">
             <a:avLst/>
@@ -23286,7 +22943,7 @@
         <p:spPr>
           <a:xfrm>
             <a:off x="585360" y="749880"/>
-            <a:ext cx="10697760" cy="291960"/>
+            <a:ext cx="10697400" cy="291600"/>
           </a:xfrm>
           <a:prstGeom prst="rect">
             <a:avLst/>
@@ -23343,7 +23000,7 @@
         <p:spPr>
           <a:xfrm>
             <a:off x="10168200" y="356760"/>
-            <a:ext cx="1416600" cy="200520"/>
+            <a:ext cx="1416240" cy="200160"/>
           </a:xfrm>
           <a:prstGeom prst="rect">
             <a:avLst/>
@@ -23373,7 +23030,7 @@
               </a:tabLst>
             </a:pPr>
             <a:r>
-              <a:rPr b="1" lang="en-US" sz="850" spc="75" strike="noStrike">
+              <a:rPr b="1" lang="en-US" sz="850" spc="72" strike="noStrike">
                 <a:solidFill>
                   <a:srgbClr val="2f67e8"/>
                 </a:solidFill>
@@ -23400,7 +23057,7 @@
         <p:spPr>
           <a:xfrm>
             <a:off x="594360" y="1143000"/>
-            <a:ext cx="3519720" cy="1828080"/>
+            <a:ext cx="3519360" cy="1827720"/>
           </a:xfrm>
           <a:prstGeom prst="roundRect">
             <a:avLst>
@@ -23451,7 +23108,7 @@
         <p:spPr>
           <a:xfrm>
             <a:off x="594360" y="1143000"/>
-            <a:ext cx="54000" cy="1828080"/>
+            <a:ext cx="53640" cy="1827720"/>
           </a:xfrm>
           <a:prstGeom prst="rect">
             <a:avLst/>
@@ -23500,7 +23157,7 @@
         <p:spPr>
           <a:xfrm>
             <a:off x="740520" y="1289160"/>
-            <a:ext cx="310320" cy="310320"/>
+            <a:ext cx="309960" cy="309960"/>
           </a:xfrm>
           <a:prstGeom prst="ellipse">
             <a:avLst/>
@@ -23549,7 +23206,7 @@
         <p:spPr>
           <a:xfrm>
             <a:off x="740520" y="1316880"/>
-            <a:ext cx="310320" cy="145440"/>
+            <a:ext cx="309960" cy="145080"/>
           </a:xfrm>
           <a:prstGeom prst="rect">
             <a:avLst/>
@@ -23605,7 +23262,7 @@
         <p:spPr>
           <a:xfrm>
             <a:off x="1161360" y="1280160"/>
-            <a:ext cx="2769840" cy="227880"/>
+            <a:ext cx="2769480" cy="227520"/>
           </a:xfrm>
           <a:prstGeom prst="rect">
             <a:avLst/>
@@ -23662,7 +23319,7 @@
         <p:spPr>
           <a:xfrm>
             <a:off x="795600" y="1618560"/>
-            <a:ext cx="3135600" cy="1224720"/>
+            <a:ext cx="3135240" cy="1224360"/>
           </a:xfrm>
           <a:prstGeom prst="rect">
             <a:avLst/>
@@ -23719,7 +23376,7 @@
         <p:spPr>
           <a:xfrm>
             <a:off x="4343400" y="1143000"/>
-            <a:ext cx="3519720" cy="1828080"/>
+            <a:ext cx="3519360" cy="1827720"/>
           </a:xfrm>
           <a:prstGeom prst="roundRect">
             <a:avLst>
@@ -23770,7 +23427,7 @@
         <p:spPr>
           <a:xfrm>
             <a:off x="4343400" y="1143000"/>
-            <a:ext cx="54000" cy="1828080"/>
+            <a:ext cx="53640" cy="1827720"/>
           </a:xfrm>
           <a:prstGeom prst="rect">
             <a:avLst/>
@@ -23819,7 +23476,7 @@
         <p:spPr>
           <a:xfrm>
             <a:off x="4489560" y="1289160"/>
-            <a:ext cx="310320" cy="310320"/>
+            <a:ext cx="309960" cy="309960"/>
           </a:xfrm>
           <a:prstGeom prst="ellipse">
             <a:avLst/>
@@ -23868,7 +23525,7 @@
         <p:spPr>
           <a:xfrm>
             <a:off x="4489560" y="1316880"/>
-            <a:ext cx="310320" cy="145440"/>
+            <a:ext cx="309960" cy="145080"/>
           </a:xfrm>
           <a:prstGeom prst="rect">
             <a:avLst/>
@@ -23924,7 +23581,7 @@
         <p:spPr>
           <a:xfrm>
             <a:off x="4910400" y="1280160"/>
-            <a:ext cx="2769840" cy="227880"/>
+            <a:ext cx="2769480" cy="227520"/>
           </a:xfrm>
           <a:prstGeom prst="rect">
             <a:avLst/>
@@ -23981,7 +23638,7 @@
         <p:spPr>
           <a:xfrm>
             <a:off x="4544640" y="1618560"/>
-            <a:ext cx="3135600" cy="1224720"/>
+            <a:ext cx="3135240" cy="1224360"/>
           </a:xfrm>
           <a:prstGeom prst="rect">
             <a:avLst/>
@@ -24038,7 +23695,7 @@
         <p:spPr>
           <a:xfrm>
             <a:off x="8092440" y="1143000"/>
-            <a:ext cx="3519720" cy="1828080"/>
+            <a:ext cx="3519360" cy="1827720"/>
           </a:xfrm>
           <a:prstGeom prst="roundRect">
             <a:avLst>
@@ -24089,7 +23746,7 @@
         <p:spPr>
           <a:xfrm>
             <a:off x="8092440" y="1143000"/>
-            <a:ext cx="54000" cy="1828080"/>
+            <a:ext cx="53640" cy="1827720"/>
           </a:xfrm>
           <a:prstGeom prst="rect">
             <a:avLst/>
@@ -24138,7 +23795,7 @@
         <p:spPr>
           <a:xfrm>
             <a:off x="8238600" y="1289160"/>
-            <a:ext cx="310320" cy="310320"/>
+            <a:ext cx="309960" cy="309960"/>
           </a:xfrm>
           <a:prstGeom prst="ellipse">
             <a:avLst/>
@@ -24187,7 +23844,7 @@
         <p:spPr>
           <a:xfrm>
             <a:off x="8238600" y="1316880"/>
-            <a:ext cx="310320" cy="145440"/>
+            <a:ext cx="309960" cy="145080"/>
           </a:xfrm>
           <a:prstGeom prst="rect">
             <a:avLst/>
@@ -24243,7 +23900,7 @@
         <p:spPr>
           <a:xfrm>
             <a:off x="8659440" y="1280160"/>
-            <a:ext cx="2769840" cy="227880"/>
+            <a:ext cx="2769480" cy="227520"/>
           </a:xfrm>
           <a:prstGeom prst="rect">
             <a:avLst/>
@@ -24300,7 +23957,7 @@
         <p:spPr>
           <a:xfrm>
             <a:off x="8293680" y="1618560"/>
-            <a:ext cx="3135600" cy="1224720"/>
+            <a:ext cx="3135240" cy="1224360"/>
           </a:xfrm>
           <a:prstGeom prst="rect">
             <a:avLst/>
@@ -24357,7 +24014,7 @@
         <p:spPr>
           <a:xfrm>
             <a:off x="621720" y="3337560"/>
-            <a:ext cx="730800" cy="163800"/>
+            <a:ext cx="730440" cy="163440"/>
           </a:xfrm>
           <a:prstGeom prst="rect">
             <a:avLst/>
@@ -24387,7 +24044,7 @@
               </a:tabLst>
             </a:pPr>
             <a:r>
-              <a:rPr b="1" lang="en-US" sz="800" spc="114" strike="noStrike">
+              <a:rPr b="1" lang="en-US" sz="800" spc="111" strike="noStrike">
                 <a:solidFill>
                   <a:srgbClr val="667085"/>
                 </a:solidFill>
@@ -24413,7 +24070,7 @@
         <p:spPr>
           <a:xfrm>
             <a:off x="621720" y="3602880"/>
-            <a:ext cx="1416600" cy="310320"/>
+            <a:ext cx="1416240" cy="309960"/>
           </a:xfrm>
           <a:prstGeom prst="roundRect">
             <a:avLst>
@@ -24464,7 +24121,7 @@
         <p:spPr>
           <a:xfrm>
             <a:off x="694800" y="3666600"/>
-            <a:ext cx="1270440" cy="127440"/>
+            <a:ext cx="1270080" cy="127080"/>
           </a:xfrm>
           <a:prstGeom prst="rect">
             <a:avLst/>
@@ -24520,7 +24177,7 @@
         <p:spPr>
           <a:xfrm>
             <a:off x="2194560" y="3602880"/>
-            <a:ext cx="1599480" cy="310320"/>
+            <a:ext cx="1599120" cy="309960"/>
           </a:xfrm>
           <a:prstGeom prst="roundRect">
             <a:avLst>
@@ -24571,7 +24228,7 @@
         <p:spPr>
           <a:xfrm>
             <a:off x="2267640" y="3666600"/>
-            <a:ext cx="1453320" cy="127440"/>
+            <a:ext cx="1452960" cy="127080"/>
           </a:xfrm>
           <a:prstGeom prst="rect">
             <a:avLst/>
@@ -24627,7 +24284,7 @@
         <p:spPr>
           <a:xfrm>
             <a:off x="3977640" y="3630240"/>
-            <a:ext cx="410760" cy="218880"/>
+            <a:ext cx="410400" cy="218520"/>
           </a:xfrm>
           <a:prstGeom prst="chevron">
             <a:avLst>
@@ -24678,7 +24335,7 @@
         <p:spPr>
           <a:xfrm>
             <a:off x="4526280" y="3602880"/>
-            <a:ext cx="1508040" cy="310320"/>
+            <a:ext cx="1507680" cy="309960"/>
           </a:xfrm>
           <a:prstGeom prst="roundRect">
             <a:avLst>
@@ -24729,7 +24386,7 @@
         <p:spPr>
           <a:xfrm>
             <a:off x="4599360" y="3666600"/>
-            <a:ext cx="1361880" cy="127440"/>
+            <a:ext cx="1361520" cy="127080"/>
           </a:xfrm>
           <a:prstGeom prst="rect">
             <a:avLst/>
@@ -24785,7 +24442,7 @@
         <p:spPr>
           <a:xfrm>
             <a:off x="6172200" y="3630240"/>
-            <a:ext cx="410760" cy="218880"/>
+            <a:ext cx="410400" cy="218520"/>
           </a:xfrm>
           <a:prstGeom prst="chevron">
             <a:avLst>
@@ -24836,7 +24493,7 @@
         <p:spPr>
           <a:xfrm>
             <a:off x="6720840" y="3602880"/>
-            <a:ext cx="1690920" cy="310320"/>
+            <a:ext cx="1690560" cy="309960"/>
           </a:xfrm>
           <a:prstGeom prst="roundRect">
             <a:avLst>
@@ -24887,7 +24544,7 @@
         <p:spPr>
           <a:xfrm>
             <a:off x="6793920" y="3666600"/>
-            <a:ext cx="1544760" cy="127440"/>
+            <a:ext cx="1544400" cy="127080"/>
           </a:xfrm>
           <a:prstGeom prst="rect">
             <a:avLst/>
@@ -24943,7 +24600,7 @@
         <p:spPr>
           <a:xfrm>
             <a:off x="8540640" y="3630240"/>
-            <a:ext cx="410760" cy="218880"/>
+            <a:ext cx="410400" cy="218520"/>
           </a:xfrm>
           <a:prstGeom prst="chevron">
             <a:avLst>
@@ -24994,7 +24651,7 @@
         <p:spPr>
           <a:xfrm>
             <a:off x="9098280" y="3602880"/>
-            <a:ext cx="1416600" cy="310320"/>
+            <a:ext cx="1416240" cy="309960"/>
           </a:xfrm>
           <a:prstGeom prst="roundRect">
             <a:avLst>
@@ -25045,7 +24702,7 @@
         <p:spPr>
           <a:xfrm>
             <a:off x="9171360" y="3666600"/>
-            <a:ext cx="1270440" cy="127440"/>
+            <a:ext cx="1270080" cy="127080"/>
           </a:xfrm>
           <a:prstGeom prst="rect">
             <a:avLst/>
@@ -25101,7 +24758,7 @@
         <p:spPr>
           <a:xfrm>
             <a:off x="10680120" y="3630240"/>
-            <a:ext cx="410760" cy="218880"/>
+            <a:ext cx="410400" cy="218520"/>
           </a:xfrm>
           <a:prstGeom prst="chevron">
             <a:avLst>
@@ -25152,7 +24809,7 @@
         <p:spPr>
           <a:xfrm>
             <a:off x="11137320" y="3602880"/>
-            <a:ext cx="593640" cy="310320"/>
+            <a:ext cx="593280" cy="309960"/>
           </a:xfrm>
           <a:prstGeom prst="roundRect">
             <a:avLst>
@@ -25203,7 +24860,7 @@
         <p:spPr>
           <a:xfrm>
             <a:off x="11210400" y="3666600"/>
-            <a:ext cx="447480" cy="127440"/>
+            <a:ext cx="447120" cy="127080"/>
           </a:xfrm>
           <a:prstGeom prst="rect">
             <a:avLst/>
@@ -25259,7 +24916,7 @@
         <p:spPr>
           <a:xfrm>
             <a:off x="594360" y="4251960"/>
-            <a:ext cx="5439960" cy="1233720"/>
+            <a:ext cx="5439600" cy="1233360"/>
           </a:xfrm>
           <a:prstGeom prst="roundRect">
             <a:avLst>
@@ -25310,7 +24967,7 @@
         <p:spPr>
           <a:xfrm>
             <a:off x="594360" y="4251960"/>
-            <a:ext cx="54000" cy="1233720"/>
+            <a:ext cx="53640" cy="1233360"/>
           </a:xfrm>
           <a:prstGeom prst="rect">
             <a:avLst/>
@@ -25359,7 +25016,7 @@
         <p:spPr>
           <a:xfrm>
             <a:off x="795600" y="4389120"/>
-            <a:ext cx="5055840" cy="227880"/>
+            <a:ext cx="5055480" cy="227520"/>
           </a:xfrm>
           <a:prstGeom prst="rect">
             <a:avLst/>
@@ -25416,7 +25073,7 @@
         <p:spPr>
           <a:xfrm>
             <a:off x="795600" y="4727520"/>
-            <a:ext cx="5055840" cy="630360"/>
+            <a:ext cx="5055480" cy="630000"/>
           </a:xfrm>
           <a:prstGeom prst="rect">
             <a:avLst/>
@@ -25473,7 +25130,7 @@
         <p:spPr>
           <a:xfrm>
             <a:off x="6263640" y="4251960"/>
-            <a:ext cx="5348520" cy="1233720"/>
+            <a:ext cx="5348160" cy="1233360"/>
           </a:xfrm>
           <a:prstGeom prst="roundRect">
             <a:avLst>
@@ -25524,7 +25181,7 @@
         <p:spPr>
           <a:xfrm>
             <a:off x="6263640" y="4251960"/>
-            <a:ext cx="54000" cy="1233720"/>
+            <a:ext cx="53640" cy="1233360"/>
           </a:xfrm>
           <a:prstGeom prst="rect">
             <a:avLst/>
@@ -25573,7 +25230,7 @@
         <p:spPr>
           <a:xfrm>
             <a:off x="6464880" y="4389120"/>
-            <a:ext cx="4964400" cy="227880"/>
+            <a:ext cx="4964040" cy="227520"/>
           </a:xfrm>
           <a:prstGeom prst="rect">
             <a:avLst/>
@@ -25630,7 +25287,7 @@
         <p:spPr>
           <a:xfrm>
             <a:off x="6464880" y="4727520"/>
-            <a:ext cx="4964400" cy="630360"/>
+            <a:ext cx="4964040" cy="630000"/>
           </a:xfrm>
           <a:prstGeom prst="rect">
             <a:avLst/>
@@ -25691,7 +25348,7 @@
         <p:spPr>
           <a:xfrm>
             <a:off x="11292840" y="6574680"/>
-            <a:ext cx="799200" cy="299160"/>
+            <a:ext cx="798840" cy="298800"/>
           </a:xfrm>
           <a:prstGeom prst="rect">
             <a:avLst/>
@@ -25733,7 +25390,7 @@
                 <a:tab algn="l" pos="0"/>
               </a:tabLst>
             </a:pPr>
-            <a:fld id="{6A9A12E6-DD90-4BF8-B616-0E91DE2599A5}" type="slidenum">
+            <a:fld id="{89F8BD01-5646-4F62-BDD9-FFF48F1D1F28}" type="slidenum">
               <a:rPr b="0" lang="en-US" sz="850" spc="-1" strike="noStrike">
                 <a:solidFill>
                   <a:srgbClr val="7b8494"/>
@@ -25741,7 +25398,7 @@
                 <a:latin typeface="Aptos"/>
                 <a:ea typeface="Aptos"/>
               </a:rPr>
-              <a:t>2</a:t>
+              <a:t>&lt;number&gt;</a:t>
             </a:fld>
             <a:endParaRPr b="0" lang="en-US" sz="850" spc="-1" strike="noStrike">
               <a:solidFill>
@@ -25791,7 +25448,7 @@
         <p:spPr>
           <a:xfrm>
             <a:off x="567000" y="292680"/>
-            <a:ext cx="8960400" cy="401760"/>
+            <a:ext cx="8960040" cy="401400"/>
           </a:xfrm>
           <a:prstGeom prst="rect">
             <a:avLst/>
@@ -25848,7 +25505,7 @@
         <p:spPr>
           <a:xfrm>
             <a:off x="585360" y="749880"/>
-            <a:ext cx="10697760" cy="291960"/>
+            <a:ext cx="10697400" cy="291600"/>
           </a:xfrm>
           <a:prstGeom prst="rect">
             <a:avLst/>
@@ -25905,7 +25562,7 @@
         <p:spPr>
           <a:xfrm>
             <a:off x="10168200" y="356760"/>
-            <a:ext cx="1416600" cy="200520"/>
+            <a:ext cx="1416240" cy="200160"/>
           </a:xfrm>
           <a:prstGeom prst="rect">
             <a:avLst/>
@@ -25935,7 +25592,7 @@
               </a:tabLst>
             </a:pPr>
             <a:r>
-              <a:rPr b="1" lang="en-US" sz="850" spc="75" strike="noStrike">
+              <a:rPr b="1" lang="en-US" sz="850" spc="72" strike="noStrike">
                 <a:solidFill>
                   <a:srgbClr val="2f67e8"/>
                 </a:solidFill>
@@ -25962,7 +25619,7 @@
         <p:spPr>
           <a:xfrm>
             <a:off x="621720" y="1143000"/>
-            <a:ext cx="3474000" cy="1508040"/>
+            <a:ext cx="3473640" cy="1507680"/>
           </a:xfrm>
           <a:prstGeom prst="roundRect">
             <a:avLst>
@@ -26013,7 +25670,7 @@
         <p:spPr>
           <a:xfrm>
             <a:off x="621720" y="1143000"/>
-            <a:ext cx="54000" cy="1508040"/>
+            <a:ext cx="53640" cy="1507680"/>
           </a:xfrm>
           <a:prstGeom prst="rect">
             <a:avLst/>
@@ -26062,7 +25719,7 @@
         <p:spPr>
           <a:xfrm>
             <a:off x="822960" y="1280160"/>
-            <a:ext cx="3089880" cy="227880"/>
+            <a:ext cx="3089520" cy="227520"/>
           </a:xfrm>
           <a:prstGeom prst="rect">
             <a:avLst/>
@@ -26119,7 +25776,7 @@
         <p:spPr>
           <a:xfrm>
             <a:off x="822960" y="1618560"/>
-            <a:ext cx="3089880" cy="904680"/>
+            <a:ext cx="3089520" cy="904320"/>
           </a:xfrm>
           <a:prstGeom prst="rect">
             <a:avLst/>
@@ -26176,7 +25833,7 @@
         <p:spPr>
           <a:xfrm>
             <a:off x="4370760" y="1143000"/>
-            <a:ext cx="3474000" cy="1508040"/>
+            <a:ext cx="3473640" cy="1507680"/>
           </a:xfrm>
           <a:prstGeom prst="roundRect">
             <a:avLst>
@@ -26227,7 +25884,7 @@
         <p:spPr>
           <a:xfrm>
             <a:off x="4370760" y="1143000"/>
-            <a:ext cx="54000" cy="1508040"/>
+            <a:ext cx="53640" cy="1507680"/>
           </a:xfrm>
           <a:prstGeom prst="rect">
             <a:avLst/>
@@ -26276,7 +25933,7 @@
         <p:spPr>
           <a:xfrm>
             <a:off x="4572000" y="1280160"/>
-            <a:ext cx="3089880" cy="227880"/>
+            <a:ext cx="3089520" cy="227520"/>
           </a:xfrm>
           <a:prstGeom prst="rect">
             <a:avLst/>
@@ -26333,7 +25990,7 @@
         <p:spPr>
           <a:xfrm>
             <a:off x="4572000" y="1618560"/>
-            <a:ext cx="3089880" cy="904680"/>
+            <a:ext cx="3089520" cy="904320"/>
           </a:xfrm>
           <a:prstGeom prst="rect">
             <a:avLst/>
@@ -26390,7 +26047,7 @@
         <p:spPr>
           <a:xfrm>
             <a:off x="8119800" y="1143000"/>
-            <a:ext cx="3474000" cy="1508040"/>
+            <a:ext cx="3473640" cy="1507680"/>
           </a:xfrm>
           <a:prstGeom prst="roundRect">
             <a:avLst>
@@ -26441,7 +26098,7 @@
         <p:spPr>
           <a:xfrm>
             <a:off x="8119800" y="1143000"/>
-            <a:ext cx="54000" cy="1508040"/>
+            <a:ext cx="53640" cy="1507680"/>
           </a:xfrm>
           <a:prstGeom prst="rect">
             <a:avLst/>
@@ -26490,7 +26147,7 @@
         <p:spPr>
           <a:xfrm>
             <a:off x="8321040" y="1280160"/>
-            <a:ext cx="3089880" cy="227880"/>
+            <a:ext cx="3089520" cy="227520"/>
           </a:xfrm>
           <a:prstGeom prst="rect">
             <a:avLst/>
@@ -26547,7 +26204,7 @@
         <p:spPr>
           <a:xfrm>
             <a:off x="8321040" y="1618560"/>
-            <a:ext cx="3089880" cy="904680"/>
+            <a:ext cx="3089520" cy="904320"/>
           </a:xfrm>
           <a:prstGeom prst="rect">
             <a:avLst/>
@@ -26604,7 +26261,7 @@
         <p:spPr>
           <a:xfrm>
             <a:off x="621720" y="3063240"/>
-            <a:ext cx="474840" cy="291960"/>
+            <a:ext cx="474480" cy="291600"/>
           </a:xfrm>
           <a:prstGeom prst="roundRect">
             <a:avLst>
@@ -26655,7 +26312,7 @@
         <p:spPr>
           <a:xfrm>
             <a:off x="621720" y="3127320"/>
-            <a:ext cx="474840" cy="109080"/>
+            <a:ext cx="474480" cy="108720"/>
           </a:xfrm>
           <a:prstGeom prst="rect">
             <a:avLst/>
@@ -26711,7 +26368,7 @@
         <p:spPr>
           <a:xfrm>
             <a:off x="1207080" y="3099960"/>
-            <a:ext cx="1736640" cy="200520"/>
+            <a:ext cx="1736280" cy="200160"/>
           </a:xfrm>
           <a:prstGeom prst="rect">
             <a:avLst/>
@@ -26767,7 +26424,7 @@
         <p:spPr>
           <a:xfrm>
             <a:off x="621720" y="3520440"/>
-            <a:ext cx="10972080" cy="1050840"/>
+            <a:ext cx="10971720" cy="1050480"/>
           </a:xfrm>
           <a:prstGeom prst="roundRect">
             <a:avLst>
@@ -26818,7 +26475,7 @@
         <p:spPr>
           <a:xfrm>
             <a:off x="868680" y="3758040"/>
-            <a:ext cx="10469160" cy="529560"/>
+            <a:ext cx="10468800" cy="529200"/>
           </a:xfrm>
           <a:prstGeom prst="rect">
             <a:avLst/>
@@ -26875,7 +26532,7 @@
         <p:spPr>
           <a:xfrm>
             <a:off x="621720" y="4983480"/>
-            <a:ext cx="1188000" cy="182160"/>
+            <a:ext cx="1187640" cy="181800"/>
           </a:xfrm>
           <a:prstGeom prst="rect">
             <a:avLst/>
@@ -26931,7 +26588,7 @@
         <p:spPr>
           <a:xfrm>
             <a:off x="621720" y="5285160"/>
-            <a:ext cx="1690920" cy="310320"/>
+            <a:ext cx="1690560" cy="309960"/>
           </a:xfrm>
           <a:prstGeom prst="roundRect">
             <a:avLst>
@@ -26982,7 +26639,7 @@
         <p:spPr>
           <a:xfrm>
             <a:off x="694800" y="5349240"/>
-            <a:ext cx="1544760" cy="127440"/>
+            <a:ext cx="1544400" cy="127080"/>
           </a:xfrm>
           <a:prstGeom prst="rect">
             <a:avLst/>
@@ -27038,7 +26695,7 @@
         <p:spPr>
           <a:xfrm>
             <a:off x="2514600" y="5321880"/>
-            <a:ext cx="419760" cy="200520"/>
+            <a:ext cx="419400" cy="200160"/>
           </a:xfrm>
           <a:prstGeom prst="chevron">
             <a:avLst>
@@ -27089,7 +26746,7 @@
         <p:spPr>
           <a:xfrm>
             <a:off x="3063240" y="5285160"/>
-            <a:ext cx="1782360" cy="310320"/>
+            <a:ext cx="1782000" cy="309960"/>
           </a:xfrm>
           <a:prstGeom prst="roundRect">
             <a:avLst>
@@ -27140,7 +26797,7 @@
         <p:spPr>
           <a:xfrm>
             <a:off x="3136320" y="5349240"/>
-            <a:ext cx="1636200" cy="127440"/>
+            <a:ext cx="1635840" cy="127080"/>
           </a:xfrm>
           <a:prstGeom prst="rect">
             <a:avLst/>
@@ -27196,7 +26853,7 @@
         <p:spPr>
           <a:xfrm>
             <a:off x="5010840" y="5321880"/>
-            <a:ext cx="419760" cy="200520"/>
+            <a:ext cx="419400" cy="200160"/>
           </a:xfrm>
           <a:prstGeom prst="chevron">
             <a:avLst>
@@ -27247,7 +26904,7 @@
         <p:spPr>
           <a:xfrm>
             <a:off x="5559480" y="5285160"/>
-            <a:ext cx="1599480" cy="310320"/>
+            <a:ext cx="1599120" cy="309960"/>
           </a:xfrm>
           <a:prstGeom prst="roundRect">
             <a:avLst>
@@ -27298,7 +26955,7 @@
         <p:spPr>
           <a:xfrm>
             <a:off x="5632560" y="5349240"/>
-            <a:ext cx="1453320" cy="127440"/>
+            <a:ext cx="1452960" cy="127080"/>
           </a:xfrm>
           <a:prstGeom prst="rect">
             <a:avLst/>
@@ -27354,7 +27011,7 @@
         <p:spPr>
           <a:xfrm>
             <a:off x="7360920" y="5321880"/>
-            <a:ext cx="419760" cy="200520"/>
+            <a:ext cx="419400" cy="200160"/>
           </a:xfrm>
           <a:prstGeom prst="chevron">
             <a:avLst>
@@ -27405,7 +27062,7 @@
         <p:spPr>
           <a:xfrm>
             <a:off x="7909560" y="5285160"/>
-            <a:ext cx="1416600" cy="310320"/>
+            <a:ext cx="1416240" cy="309960"/>
           </a:xfrm>
           <a:prstGeom prst="roundRect">
             <a:avLst>
@@ -27456,7 +27113,7 @@
         <p:spPr>
           <a:xfrm>
             <a:off x="7982640" y="5349240"/>
-            <a:ext cx="1270440" cy="127440"/>
+            <a:ext cx="1270080" cy="127080"/>
           </a:xfrm>
           <a:prstGeom prst="rect">
             <a:avLst/>
@@ -27512,7 +27169,7 @@
         <p:spPr>
           <a:xfrm>
             <a:off x="9509760" y="5321880"/>
-            <a:ext cx="419760" cy="200520"/>
+            <a:ext cx="419400" cy="200160"/>
           </a:xfrm>
           <a:prstGeom prst="chevron">
             <a:avLst>
@@ -27563,7 +27220,7 @@
         <p:spPr>
           <a:xfrm>
             <a:off x="10058400" y="5285160"/>
-            <a:ext cx="1416600" cy="310320"/>
+            <a:ext cx="1416240" cy="309960"/>
           </a:xfrm>
           <a:prstGeom prst="roundRect">
             <a:avLst>
@@ -27614,7 +27271,7 @@
         <p:spPr>
           <a:xfrm>
             <a:off x="10131480" y="5349240"/>
-            <a:ext cx="1270440" cy="127440"/>
+            <a:ext cx="1270080" cy="127080"/>
           </a:xfrm>
           <a:prstGeom prst="rect">
             <a:avLst/>
@@ -27674,7 +27331,7 @@
         <p:spPr>
           <a:xfrm>
             <a:off x="11292840" y="6574680"/>
-            <a:ext cx="799200" cy="299160"/>
+            <a:ext cx="798840" cy="298800"/>
           </a:xfrm>
           <a:prstGeom prst="rect">
             <a:avLst/>
@@ -27716,7 +27373,7 @@
                 <a:tab algn="l" pos="0"/>
               </a:tabLst>
             </a:pPr>
-            <a:fld id="{8DA08DD2-54BB-4FF5-9506-B494652A9ADC}" type="slidenum">
+            <a:fld id="{79645A3B-B4BB-4586-9CA4-D7169127A539}" type="slidenum">
               <a:rPr b="0" lang="en-US" sz="850" spc="-1" strike="noStrike">
                 <a:solidFill>
                   <a:srgbClr val="7b8494"/>
@@ -27724,7 +27381,7 @@
                 <a:latin typeface="Aptos"/>
                 <a:ea typeface="Aptos"/>
               </a:rPr>
-              <a:t>3</a:t>
+              <a:t>&lt;number&gt;</a:t>
             </a:fld>
             <a:endParaRPr b="0" lang="en-US" sz="850" spc="-1" strike="noStrike">
               <a:solidFill>
@@ -27774,7 +27431,7 @@
         <p:spPr>
           <a:xfrm>
             <a:off x="567000" y="292680"/>
-            <a:ext cx="8960400" cy="401760"/>
+            <a:ext cx="8960040" cy="401400"/>
           </a:xfrm>
           <a:prstGeom prst="rect">
             <a:avLst/>
@@ -27831,7 +27488,7 @@
         <p:spPr>
           <a:xfrm>
             <a:off x="585360" y="749880"/>
-            <a:ext cx="10697760" cy="291960"/>
+            <a:ext cx="10697400" cy="291600"/>
           </a:xfrm>
           <a:prstGeom prst="rect">
             <a:avLst/>
@@ -27888,7 +27545,7 @@
         <p:spPr>
           <a:xfrm>
             <a:off x="10168200" y="356760"/>
-            <a:ext cx="1416600" cy="200520"/>
+            <a:ext cx="1416240" cy="200160"/>
           </a:xfrm>
           <a:prstGeom prst="rect">
             <a:avLst/>
@@ -27918,7 +27575,7 @@
               </a:tabLst>
             </a:pPr>
             <a:r>
-              <a:rPr b="1" lang="en-US" sz="850" spc="75" strike="noStrike">
+              <a:rPr b="1" lang="en-US" sz="850" spc="72" strike="noStrike">
                 <a:solidFill>
                   <a:srgbClr val="2f67e8"/>
                 </a:solidFill>
@@ -27945,7 +27602,7 @@
         <p:spPr>
           <a:xfrm>
             <a:off x="640080" y="1371600"/>
-            <a:ext cx="2422440" cy="2331000"/>
+            <a:ext cx="2422080" cy="2330640"/>
           </a:xfrm>
           <a:prstGeom prst="roundRect">
             <a:avLst>
@@ -27996,7 +27653,7 @@
         <p:spPr>
           <a:xfrm>
             <a:off x="640080" y="1371600"/>
-            <a:ext cx="54000" cy="2331000"/>
+            <a:ext cx="53640" cy="2330640"/>
           </a:xfrm>
           <a:prstGeom prst="rect">
             <a:avLst/>
@@ -28045,7 +27702,7 @@
         <p:spPr>
           <a:xfrm>
             <a:off x="786240" y="1517760"/>
-            <a:ext cx="310320" cy="310320"/>
+            <a:ext cx="309960" cy="309960"/>
           </a:xfrm>
           <a:prstGeom prst="ellipse">
             <a:avLst/>
@@ -28094,7 +27751,7 @@
         <p:spPr>
           <a:xfrm>
             <a:off x="786240" y="1545480"/>
-            <a:ext cx="310320" cy="145440"/>
+            <a:ext cx="309960" cy="145080"/>
           </a:xfrm>
           <a:prstGeom prst="rect">
             <a:avLst/>
@@ -28150,7 +27807,7 @@
         <p:spPr>
           <a:xfrm>
             <a:off x="1207080" y="1508760"/>
-            <a:ext cx="1672560" cy="227880"/>
+            <a:ext cx="1672200" cy="227520"/>
           </a:xfrm>
           <a:prstGeom prst="rect">
             <a:avLst/>
@@ -28207,7 +27864,7 @@
         <p:spPr>
           <a:xfrm>
             <a:off x="841320" y="1847160"/>
-            <a:ext cx="2038320" cy="1727640"/>
+            <a:ext cx="2037960" cy="1727280"/>
           </a:xfrm>
           <a:prstGeom prst="rect">
             <a:avLst/>
@@ -28264,7 +27921,7 @@
         <p:spPr>
           <a:xfrm>
             <a:off x="3429000" y="1371600"/>
-            <a:ext cx="2422440" cy="2331000"/>
+            <a:ext cx="2422080" cy="2330640"/>
           </a:xfrm>
           <a:prstGeom prst="roundRect">
             <a:avLst>
@@ -28315,7 +27972,7 @@
         <p:spPr>
           <a:xfrm>
             <a:off x="3429000" y="1371600"/>
-            <a:ext cx="54000" cy="2331000"/>
+            <a:ext cx="53640" cy="2330640"/>
           </a:xfrm>
           <a:prstGeom prst="rect">
             <a:avLst/>
@@ -28364,7 +28021,7 @@
         <p:spPr>
           <a:xfrm>
             <a:off x="3575160" y="1517760"/>
-            <a:ext cx="310320" cy="310320"/>
+            <a:ext cx="309960" cy="309960"/>
           </a:xfrm>
           <a:prstGeom prst="ellipse">
             <a:avLst/>
@@ -28413,7 +28070,7 @@
         <p:spPr>
           <a:xfrm>
             <a:off x="3575160" y="1545480"/>
-            <a:ext cx="310320" cy="145440"/>
+            <a:ext cx="309960" cy="145080"/>
           </a:xfrm>
           <a:prstGeom prst="rect">
             <a:avLst/>
@@ -28469,7 +28126,7 @@
         <p:spPr>
           <a:xfrm>
             <a:off x="3996000" y="1508760"/>
-            <a:ext cx="1672560" cy="227880"/>
+            <a:ext cx="1672200" cy="227520"/>
           </a:xfrm>
           <a:prstGeom prst="rect">
             <a:avLst/>
@@ -28526,7 +28183,7 @@
         <p:spPr>
           <a:xfrm>
             <a:off x="3630240" y="1847160"/>
-            <a:ext cx="2038320" cy="1727640"/>
+            <a:ext cx="2037960" cy="1727280"/>
           </a:xfrm>
           <a:prstGeom prst="rect">
             <a:avLst/>
@@ -28583,7 +28240,7 @@
         <p:spPr>
           <a:xfrm>
             <a:off x="6217920" y="1371600"/>
-            <a:ext cx="2422440" cy="2331000"/>
+            <a:ext cx="2422080" cy="2330640"/>
           </a:xfrm>
           <a:prstGeom prst="roundRect">
             <a:avLst>
@@ -28634,7 +28291,7 @@
         <p:spPr>
           <a:xfrm>
             <a:off x="6217920" y="1371600"/>
-            <a:ext cx="54000" cy="2331000"/>
+            <a:ext cx="53640" cy="2330640"/>
           </a:xfrm>
           <a:prstGeom prst="rect">
             <a:avLst/>
@@ -28683,7 +28340,7 @@
         <p:spPr>
           <a:xfrm>
             <a:off x="6364080" y="1517760"/>
-            <a:ext cx="310320" cy="310320"/>
+            <a:ext cx="309960" cy="309960"/>
           </a:xfrm>
           <a:prstGeom prst="ellipse">
             <a:avLst/>
@@ -28732,7 +28389,7 @@
         <p:spPr>
           <a:xfrm>
             <a:off x="6364080" y="1545480"/>
-            <a:ext cx="310320" cy="145440"/>
+            <a:ext cx="309960" cy="145080"/>
           </a:xfrm>
           <a:prstGeom prst="rect">
             <a:avLst/>
@@ -28788,7 +28445,7 @@
         <p:spPr>
           <a:xfrm>
             <a:off x="6784920" y="1508760"/>
-            <a:ext cx="1672560" cy="227880"/>
+            <a:ext cx="1672200" cy="227520"/>
           </a:xfrm>
           <a:prstGeom prst="rect">
             <a:avLst/>
@@ -28845,7 +28502,7 @@
         <p:spPr>
           <a:xfrm>
             <a:off x="6419160" y="1847160"/>
-            <a:ext cx="2038320" cy="1727640"/>
+            <a:ext cx="2037960" cy="1727280"/>
           </a:xfrm>
           <a:prstGeom prst="rect">
             <a:avLst/>
@@ -28902,7 +28559,7 @@
         <p:spPr>
           <a:xfrm>
             <a:off x="9006840" y="1371600"/>
-            <a:ext cx="2422440" cy="2331000"/>
+            <a:ext cx="2422080" cy="2330640"/>
           </a:xfrm>
           <a:prstGeom prst="roundRect">
             <a:avLst>
@@ -28953,7 +28610,7 @@
         <p:spPr>
           <a:xfrm>
             <a:off x="9006840" y="1371600"/>
-            <a:ext cx="54000" cy="2331000"/>
+            <a:ext cx="53640" cy="2330640"/>
           </a:xfrm>
           <a:prstGeom prst="rect">
             <a:avLst/>
@@ -29002,7 +28659,7 @@
         <p:spPr>
           <a:xfrm>
             <a:off x="9153000" y="1517760"/>
-            <a:ext cx="310320" cy="310320"/>
+            <a:ext cx="309960" cy="309960"/>
           </a:xfrm>
           <a:prstGeom prst="ellipse">
             <a:avLst/>
@@ -29051,7 +28708,7 @@
         <p:spPr>
           <a:xfrm>
             <a:off x="9153000" y="1545480"/>
-            <a:ext cx="310320" cy="145440"/>
+            <a:ext cx="309960" cy="145080"/>
           </a:xfrm>
           <a:prstGeom prst="rect">
             <a:avLst/>
@@ -29107,7 +28764,7 @@
         <p:spPr>
           <a:xfrm>
             <a:off x="9573840" y="1508760"/>
-            <a:ext cx="1672560" cy="227880"/>
+            <a:ext cx="1672200" cy="227520"/>
           </a:xfrm>
           <a:prstGeom prst="rect">
             <a:avLst/>
@@ -29164,7 +28821,7 @@
         <p:spPr>
           <a:xfrm>
             <a:off x="9208080" y="1847160"/>
-            <a:ext cx="2038320" cy="1727640"/>
+            <a:ext cx="2037960" cy="1727280"/>
           </a:xfrm>
           <a:prstGeom prst="rect">
             <a:avLst/>
@@ -29221,7 +28878,7 @@
         <p:spPr>
           <a:xfrm>
             <a:off x="3127320" y="2340720"/>
-            <a:ext cx="319320" cy="227880"/>
+            <a:ext cx="318960" cy="227520"/>
           </a:xfrm>
           <a:prstGeom prst="chevron">
             <a:avLst>
@@ -29272,7 +28929,7 @@
         <p:spPr>
           <a:xfrm>
             <a:off x="5916240" y="2340720"/>
-            <a:ext cx="319320" cy="227880"/>
+            <a:ext cx="318960" cy="227520"/>
           </a:xfrm>
           <a:prstGeom prst="chevron">
             <a:avLst>
@@ -29323,7 +28980,7 @@
         <p:spPr>
           <a:xfrm>
             <a:off x="8705160" y="2340720"/>
-            <a:ext cx="319320" cy="227880"/>
+            <a:ext cx="318960" cy="227520"/>
           </a:xfrm>
           <a:prstGeom prst="chevron">
             <a:avLst>
@@ -29374,7 +29031,7 @@
         <p:spPr>
           <a:xfrm>
             <a:off x="667440" y="4069080"/>
-            <a:ext cx="3291120" cy="227880"/>
+            <a:ext cx="3290760" cy="227520"/>
           </a:xfrm>
           <a:prstGeom prst="rect">
             <a:avLst/>
@@ -29430,7 +29087,7 @@
         <p:spPr>
           <a:xfrm>
             <a:off x="658440" y="4480560"/>
-            <a:ext cx="3245400" cy="1096560"/>
+            <a:ext cx="3245040" cy="1096200"/>
           </a:xfrm>
           <a:prstGeom prst="roundRect">
             <a:avLst>
@@ -29481,7 +29138,7 @@
         <p:spPr>
           <a:xfrm>
             <a:off x="658440" y="4480560"/>
-            <a:ext cx="54000" cy="1096560"/>
+            <a:ext cx="53640" cy="1096200"/>
           </a:xfrm>
           <a:prstGeom prst="rect">
             <a:avLst/>
@@ -29530,7 +29187,7 @@
         <p:spPr>
           <a:xfrm>
             <a:off x="859680" y="4617720"/>
-            <a:ext cx="2861280" cy="227880"/>
+            <a:ext cx="2860920" cy="227520"/>
           </a:xfrm>
           <a:prstGeom prst="rect">
             <a:avLst/>
@@ -29587,7 +29244,7 @@
         <p:spPr>
           <a:xfrm>
             <a:off x="859680" y="4956120"/>
-            <a:ext cx="2861280" cy="493200"/>
+            <a:ext cx="2860920" cy="492840"/>
           </a:xfrm>
           <a:prstGeom prst="rect">
             <a:avLst/>
@@ -29644,7 +29301,7 @@
         <p:spPr>
           <a:xfrm>
             <a:off x="4114800" y="4827960"/>
-            <a:ext cx="502200" cy="255240"/>
+            <a:ext cx="501840" cy="254880"/>
           </a:xfrm>
           <a:prstGeom prst="chevron">
             <a:avLst>
@@ -29695,7 +29352,7 @@
         <p:spPr>
           <a:xfrm>
             <a:off x="4709160" y="4480560"/>
-            <a:ext cx="2925360" cy="1096560"/>
+            <a:ext cx="2925000" cy="1096200"/>
           </a:xfrm>
           <a:prstGeom prst="roundRect">
             <a:avLst>
@@ -29746,7 +29403,7 @@
         <p:spPr>
           <a:xfrm>
             <a:off x="4709160" y="4480560"/>
-            <a:ext cx="54000" cy="1096560"/>
+            <a:ext cx="53640" cy="1096200"/>
           </a:xfrm>
           <a:prstGeom prst="rect">
             <a:avLst/>
@@ -29795,7 +29452,7 @@
         <p:spPr>
           <a:xfrm>
             <a:off x="4910400" y="4617720"/>
-            <a:ext cx="2541240" cy="227880"/>
+            <a:ext cx="2540880" cy="227520"/>
           </a:xfrm>
           <a:prstGeom prst="rect">
             <a:avLst/>
@@ -29852,7 +29509,7 @@
         <p:spPr>
           <a:xfrm>
             <a:off x="4910400" y="4956120"/>
-            <a:ext cx="2541240" cy="493200"/>
+            <a:ext cx="2540880" cy="492840"/>
           </a:xfrm>
           <a:prstGeom prst="rect">
             <a:avLst/>
@@ -29909,7 +29566,7 @@
         <p:spPr>
           <a:xfrm>
             <a:off x="7882200" y="4827960"/>
-            <a:ext cx="502200" cy="255240"/>
+            <a:ext cx="501840" cy="254880"/>
           </a:xfrm>
           <a:prstGeom prst="chevron">
             <a:avLst>
@@ -29960,7 +29617,7 @@
         <p:spPr>
           <a:xfrm>
             <a:off x="8485560" y="4480560"/>
-            <a:ext cx="3062520" cy="1096560"/>
+            <a:ext cx="3062160" cy="1096200"/>
           </a:xfrm>
           <a:prstGeom prst="roundRect">
             <a:avLst>
@@ -30011,7 +29668,7 @@
         <p:spPr>
           <a:xfrm>
             <a:off x="8485560" y="4480560"/>
-            <a:ext cx="54000" cy="1096560"/>
+            <a:ext cx="53640" cy="1096200"/>
           </a:xfrm>
           <a:prstGeom prst="rect">
             <a:avLst/>
@@ -30060,7 +29717,7 @@
         <p:spPr>
           <a:xfrm>
             <a:off x="8686800" y="4617720"/>
-            <a:ext cx="2678400" cy="227880"/>
+            <a:ext cx="2678040" cy="227520"/>
           </a:xfrm>
           <a:prstGeom prst="rect">
             <a:avLst/>
@@ -30117,7 +29774,7 @@
         <p:spPr>
           <a:xfrm>
             <a:off x="8686800" y="4956120"/>
-            <a:ext cx="2678400" cy="493200"/>
+            <a:ext cx="2678040" cy="492840"/>
           </a:xfrm>
           <a:prstGeom prst="rect">
             <a:avLst/>
@@ -30178,7 +29835,7 @@
         <p:spPr>
           <a:xfrm>
             <a:off x="11292840" y="6574680"/>
-            <a:ext cx="799200" cy="299160"/>
+            <a:ext cx="798840" cy="298800"/>
           </a:xfrm>
           <a:prstGeom prst="rect">
             <a:avLst/>
@@ -30220,7 +29877,7 @@
                 <a:tab algn="l" pos="0"/>
               </a:tabLst>
             </a:pPr>
-            <a:fld id="{041EDDCA-8C4D-4550-9E7E-7CF0F3FD2530}" type="slidenum">
+            <a:fld id="{14466BA8-47B6-412C-A7CB-3BC7432100A3}" type="slidenum">
               <a:rPr b="0" lang="en-US" sz="850" spc="-1" strike="noStrike">
                 <a:solidFill>
                   <a:srgbClr val="7b8494"/>
@@ -30228,7 +29885,7 @@
                 <a:latin typeface="Aptos"/>
                 <a:ea typeface="Aptos"/>
               </a:rPr>
-              <a:t>4</a:t>
+              <a:t>&lt;number&gt;</a:t>
             </a:fld>
             <a:endParaRPr b="0" lang="en-US" sz="850" spc="-1" strike="noStrike">
               <a:solidFill>
@@ -30278,7 +29935,7 @@
         <p:spPr>
           <a:xfrm>
             <a:off x="567000" y="292680"/>
-            <a:ext cx="8960400" cy="401760"/>
+            <a:ext cx="8960040" cy="401400"/>
           </a:xfrm>
           <a:prstGeom prst="rect">
             <a:avLst/>
@@ -30335,7 +29992,7 @@
         <p:spPr>
           <a:xfrm>
             <a:off x="585360" y="749880"/>
-            <a:ext cx="10697760" cy="291960"/>
+            <a:ext cx="10697400" cy="291600"/>
           </a:xfrm>
           <a:prstGeom prst="rect">
             <a:avLst/>
@@ -30392,7 +30049,7 @@
         <p:spPr>
           <a:xfrm>
             <a:off x="10168200" y="356760"/>
-            <a:ext cx="1416600" cy="200520"/>
+            <a:ext cx="1416240" cy="200160"/>
           </a:xfrm>
           <a:prstGeom prst="rect">
             <a:avLst/>
@@ -30422,7 +30079,7 @@
               </a:tabLst>
             </a:pPr>
             <a:r>
-              <a:rPr b="1" lang="en-US" sz="850" spc="75" strike="noStrike">
+              <a:rPr b="1" lang="en-US" sz="850" spc="72" strike="noStrike">
                 <a:solidFill>
                   <a:srgbClr val="2f67e8"/>
                 </a:solidFill>
@@ -30449,7 +30106,7 @@
         <p:spPr>
           <a:xfrm>
             <a:off x="658440" y="1078920"/>
-            <a:ext cx="474840" cy="291960"/>
+            <a:ext cx="474480" cy="291600"/>
           </a:xfrm>
           <a:prstGeom prst="roundRect">
             <a:avLst>
@@ -30500,7 +30157,7 @@
         <p:spPr>
           <a:xfrm>
             <a:off x="658440" y="1143000"/>
-            <a:ext cx="474840" cy="109080"/>
+            <a:ext cx="474480" cy="108720"/>
           </a:xfrm>
           <a:prstGeom prst="rect">
             <a:avLst/>
@@ -30556,7 +30213,7 @@
         <p:spPr>
           <a:xfrm>
             <a:off x="1243440" y="1115640"/>
-            <a:ext cx="1919520" cy="200520"/>
+            <a:ext cx="1919160" cy="200160"/>
           </a:xfrm>
           <a:prstGeom prst="rect">
             <a:avLst/>
@@ -30612,7 +30269,7 @@
         <p:spPr>
           <a:xfrm>
             <a:off x="658440" y="1572840"/>
-            <a:ext cx="1736640" cy="840600"/>
+            <a:ext cx="1736280" cy="840240"/>
           </a:xfrm>
           <a:prstGeom prst="roundRect">
             <a:avLst>
@@ -30663,7 +30320,7 @@
         <p:spPr>
           <a:xfrm>
             <a:off x="658440" y="1572840"/>
-            <a:ext cx="54000" cy="840600"/>
+            <a:ext cx="53640" cy="840240"/>
           </a:xfrm>
           <a:prstGeom prst="rect">
             <a:avLst/>
@@ -30712,7 +30369,7 @@
         <p:spPr>
           <a:xfrm>
             <a:off x="859680" y="1710000"/>
-            <a:ext cx="1352520" cy="227880"/>
+            <a:ext cx="1352160" cy="227520"/>
           </a:xfrm>
           <a:prstGeom prst="rect">
             <a:avLst/>
@@ -30769,7 +30426,7 @@
         <p:spPr>
           <a:xfrm>
             <a:off x="859680" y="2048400"/>
-            <a:ext cx="1352520" cy="236880"/>
+            <a:ext cx="1352160" cy="236520"/>
           </a:xfrm>
           <a:prstGeom prst="rect">
             <a:avLst/>
@@ -30826,7 +30483,7 @@
         <p:spPr>
           <a:xfrm>
             <a:off x="2468880" y="1856160"/>
-            <a:ext cx="291960" cy="191160"/>
+            <a:ext cx="291600" cy="190800"/>
           </a:xfrm>
           <a:prstGeom prst="chevron">
             <a:avLst>
@@ -30877,7 +30534,7 @@
         <p:spPr>
           <a:xfrm>
             <a:off x="2788920" y="1572840"/>
-            <a:ext cx="1736640" cy="840600"/>
+            <a:ext cx="1736280" cy="840240"/>
           </a:xfrm>
           <a:prstGeom prst="roundRect">
             <a:avLst>
@@ -30928,7 +30585,7 @@
         <p:spPr>
           <a:xfrm>
             <a:off x="2788920" y="1572840"/>
-            <a:ext cx="54000" cy="840600"/>
+            <a:ext cx="53640" cy="840240"/>
           </a:xfrm>
           <a:prstGeom prst="rect">
             <a:avLst/>
@@ -30977,7 +30634,7 @@
         <p:spPr>
           <a:xfrm>
             <a:off x="2990160" y="1710000"/>
-            <a:ext cx="1352520" cy="227880"/>
+            <a:ext cx="1352160" cy="227520"/>
           </a:xfrm>
           <a:prstGeom prst="rect">
             <a:avLst/>
@@ -31034,7 +30691,7 @@
         <p:spPr>
           <a:xfrm>
             <a:off x="2990160" y="2048400"/>
-            <a:ext cx="1352520" cy="236880"/>
+            <a:ext cx="1352160" cy="236520"/>
           </a:xfrm>
           <a:prstGeom prst="rect">
             <a:avLst/>
@@ -31091,7 +30748,7 @@
         <p:spPr>
           <a:xfrm>
             <a:off x="4599360" y="1856160"/>
-            <a:ext cx="291960" cy="191160"/>
+            <a:ext cx="291600" cy="190800"/>
           </a:xfrm>
           <a:prstGeom prst="chevron">
             <a:avLst>
@@ -31142,7 +30799,7 @@
         <p:spPr>
           <a:xfrm>
             <a:off x="4919400" y="1572840"/>
-            <a:ext cx="1736640" cy="840600"/>
+            <a:ext cx="1736280" cy="840240"/>
           </a:xfrm>
           <a:prstGeom prst="roundRect">
             <a:avLst>
@@ -31193,7 +30850,7 @@
         <p:spPr>
           <a:xfrm>
             <a:off x="4919400" y="1572840"/>
-            <a:ext cx="54000" cy="840600"/>
+            <a:ext cx="53640" cy="840240"/>
           </a:xfrm>
           <a:prstGeom prst="rect">
             <a:avLst/>
@@ -31242,7 +30899,7 @@
         <p:spPr>
           <a:xfrm>
             <a:off x="5120640" y="1710000"/>
-            <a:ext cx="1352520" cy="227880"/>
+            <a:ext cx="1352160" cy="227520"/>
           </a:xfrm>
           <a:prstGeom prst="rect">
             <a:avLst/>
@@ -31299,7 +30956,7 @@
         <p:spPr>
           <a:xfrm>
             <a:off x="5120640" y="2048400"/>
-            <a:ext cx="1352520" cy="236880"/>
+            <a:ext cx="1352160" cy="236520"/>
           </a:xfrm>
           <a:prstGeom prst="rect">
             <a:avLst/>
@@ -31356,7 +31013,7 @@
         <p:spPr>
           <a:xfrm>
             <a:off x="6729840" y="1856160"/>
-            <a:ext cx="291960" cy="191160"/>
+            <a:ext cx="291600" cy="190800"/>
           </a:xfrm>
           <a:prstGeom prst="chevron">
             <a:avLst>
@@ -31407,7 +31064,7 @@
         <p:spPr>
           <a:xfrm>
             <a:off x="7049880" y="1572840"/>
-            <a:ext cx="1736640" cy="840600"/>
+            <a:ext cx="1736280" cy="840240"/>
           </a:xfrm>
           <a:prstGeom prst="roundRect">
             <a:avLst>
@@ -31458,7 +31115,7 @@
         <p:spPr>
           <a:xfrm>
             <a:off x="7049880" y="1572840"/>
-            <a:ext cx="54000" cy="840600"/>
+            <a:ext cx="53640" cy="840240"/>
           </a:xfrm>
           <a:prstGeom prst="rect">
             <a:avLst/>
@@ -31507,7 +31164,7 @@
         <p:spPr>
           <a:xfrm>
             <a:off x="7251120" y="1710000"/>
-            <a:ext cx="1352520" cy="227880"/>
+            <a:ext cx="1352160" cy="227520"/>
           </a:xfrm>
           <a:prstGeom prst="rect">
             <a:avLst/>
@@ -31564,7 +31221,7 @@
         <p:spPr>
           <a:xfrm>
             <a:off x="7251120" y="2048400"/>
-            <a:ext cx="1352520" cy="236880"/>
+            <a:ext cx="1352160" cy="236520"/>
           </a:xfrm>
           <a:prstGeom prst="rect">
             <a:avLst/>
@@ -31621,7 +31278,7 @@
         <p:spPr>
           <a:xfrm>
             <a:off x="8860680" y="1856160"/>
-            <a:ext cx="291960" cy="191160"/>
+            <a:ext cx="291600" cy="190800"/>
           </a:xfrm>
           <a:prstGeom prst="chevron">
             <a:avLst>
@@ -31672,7 +31329,7 @@
         <p:spPr>
           <a:xfrm>
             <a:off x="9180720" y="1572840"/>
-            <a:ext cx="1736640" cy="840600"/>
+            <a:ext cx="1736280" cy="840240"/>
           </a:xfrm>
           <a:prstGeom prst="roundRect">
             <a:avLst>
@@ -31723,7 +31380,7 @@
         <p:spPr>
           <a:xfrm>
             <a:off x="9180720" y="1572840"/>
-            <a:ext cx="54000" cy="840600"/>
+            <a:ext cx="53640" cy="840240"/>
           </a:xfrm>
           <a:prstGeom prst="rect">
             <a:avLst/>
@@ -31772,7 +31429,7 @@
         <p:spPr>
           <a:xfrm>
             <a:off x="9381600" y="1710000"/>
-            <a:ext cx="1352520" cy="227880"/>
+            <a:ext cx="1352160" cy="227520"/>
           </a:xfrm>
           <a:prstGeom prst="rect">
             <a:avLst/>
@@ -31829,7 +31486,7 @@
         <p:spPr>
           <a:xfrm>
             <a:off x="9381600" y="2048400"/>
-            <a:ext cx="1352520" cy="236880"/>
+            <a:ext cx="1352160" cy="236520"/>
           </a:xfrm>
           <a:prstGeom prst="rect">
             <a:avLst/>
@@ -31886,7 +31543,7 @@
         <p:spPr>
           <a:xfrm>
             <a:off x="658440" y="2880360"/>
-            <a:ext cx="474840" cy="291960"/>
+            <a:ext cx="474480" cy="291600"/>
           </a:xfrm>
           <a:prstGeom prst="roundRect">
             <a:avLst>
@@ -31937,7 +31594,7 @@
         <p:spPr>
           <a:xfrm>
             <a:off x="658440" y="2944440"/>
-            <a:ext cx="474840" cy="109080"/>
+            <a:ext cx="474480" cy="108720"/>
           </a:xfrm>
           <a:prstGeom prst="rect">
             <a:avLst/>
@@ -31993,7 +31650,7 @@
         <p:spPr>
           <a:xfrm>
             <a:off x="1243440" y="2917080"/>
-            <a:ext cx="1645200" cy="200520"/>
+            <a:ext cx="1644840" cy="200160"/>
           </a:xfrm>
           <a:prstGeom prst="rect">
             <a:avLst/>
@@ -32049,7 +31706,7 @@
         <p:spPr>
           <a:xfrm>
             <a:off x="658440" y="3364920"/>
-            <a:ext cx="2376720" cy="1142280"/>
+            <a:ext cx="2376360" cy="1141920"/>
           </a:xfrm>
           <a:prstGeom prst="roundRect">
             <a:avLst>
@@ -32100,7 +31757,7 @@
         <p:spPr>
           <a:xfrm>
             <a:off x="658440" y="3364920"/>
-            <a:ext cx="54000" cy="1142280"/>
+            <a:ext cx="53640" cy="1141920"/>
           </a:xfrm>
           <a:prstGeom prst="rect">
             <a:avLst/>
@@ -32149,7 +31806,7 @@
         <p:spPr>
           <a:xfrm>
             <a:off x="859680" y="3502080"/>
-            <a:ext cx="1992600" cy="227880"/>
+            <a:ext cx="1992240" cy="227520"/>
           </a:xfrm>
           <a:prstGeom prst="rect">
             <a:avLst/>
@@ -32206,7 +31863,7 @@
         <p:spPr>
           <a:xfrm>
             <a:off x="859680" y="3840480"/>
-            <a:ext cx="1992600" cy="538920"/>
+            <a:ext cx="1992240" cy="538560"/>
           </a:xfrm>
           <a:prstGeom prst="rect">
             <a:avLst/>
@@ -32263,7 +31920,7 @@
         <p:spPr>
           <a:xfrm>
             <a:off x="3182040" y="3730680"/>
-            <a:ext cx="502200" cy="227880"/>
+            <a:ext cx="501840" cy="227520"/>
           </a:xfrm>
           <a:prstGeom prst="chevron">
             <a:avLst>
@@ -32314,7 +31971,7 @@
         <p:spPr>
           <a:xfrm>
             <a:off x="3794760" y="3364920"/>
-            <a:ext cx="2559600" cy="1142280"/>
+            <a:ext cx="2559240" cy="1141920"/>
           </a:xfrm>
           <a:prstGeom prst="roundRect">
             <a:avLst>
@@ -32365,7 +32022,7 @@
         <p:spPr>
           <a:xfrm>
             <a:off x="3794760" y="3364920"/>
-            <a:ext cx="54000" cy="1142280"/>
+            <a:ext cx="53640" cy="1141920"/>
           </a:xfrm>
           <a:prstGeom prst="rect">
             <a:avLst/>
@@ -32414,7 +32071,7 @@
         <p:spPr>
           <a:xfrm>
             <a:off x="3996000" y="3502080"/>
-            <a:ext cx="2175480" cy="227880"/>
+            <a:ext cx="2175120" cy="227520"/>
           </a:xfrm>
           <a:prstGeom prst="rect">
             <a:avLst/>
@@ -32471,7 +32128,7 @@
         <p:spPr>
           <a:xfrm>
             <a:off x="3996000" y="3840480"/>
-            <a:ext cx="2175480" cy="538920"/>
+            <a:ext cx="2175120" cy="538560"/>
           </a:xfrm>
           <a:prstGeom prst="rect">
             <a:avLst/>
@@ -32528,7 +32185,7 @@
         <p:spPr>
           <a:xfrm>
             <a:off x="6519600" y="3730680"/>
-            <a:ext cx="502200" cy="227880"/>
+            <a:ext cx="501840" cy="227520"/>
           </a:xfrm>
           <a:prstGeom prst="chevron">
             <a:avLst>
@@ -32579,7 +32236,7 @@
         <p:spPr>
           <a:xfrm>
             <a:off x="7132320" y="3364920"/>
-            <a:ext cx="2376720" cy="1142280"/>
+            <a:ext cx="2376360" cy="1141920"/>
           </a:xfrm>
           <a:prstGeom prst="roundRect">
             <a:avLst>
@@ -32630,7 +32287,7 @@
         <p:spPr>
           <a:xfrm>
             <a:off x="7132320" y="3364920"/>
-            <a:ext cx="54000" cy="1142280"/>
+            <a:ext cx="53640" cy="1141920"/>
           </a:xfrm>
           <a:prstGeom prst="rect">
             <a:avLst/>
@@ -32679,7 +32336,7 @@
         <p:spPr>
           <a:xfrm>
             <a:off x="7333560" y="3502080"/>
-            <a:ext cx="1992600" cy="227880"/>
+            <a:ext cx="1992240" cy="227520"/>
           </a:xfrm>
           <a:prstGeom prst="rect">
             <a:avLst/>
@@ -32736,7 +32393,7 @@
         <p:spPr>
           <a:xfrm>
             <a:off x="7333560" y="3840480"/>
-            <a:ext cx="1992600" cy="538920"/>
+            <a:ext cx="1992240" cy="538560"/>
           </a:xfrm>
           <a:prstGeom prst="rect">
             <a:avLst/>
@@ -32793,7 +32450,7 @@
         <p:spPr>
           <a:xfrm>
             <a:off x="9655920" y="3730680"/>
-            <a:ext cx="502200" cy="227880"/>
+            <a:ext cx="501840" cy="227520"/>
           </a:xfrm>
           <a:prstGeom prst="chevron">
             <a:avLst>
@@ -32844,7 +32501,7 @@
         <p:spPr>
           <a:xfrm>
             <a:off x="10268640" y="3364920"/>
-            <a:ext cx="1306800" cy="1142280"/>
+            <a:ext cx="1306440" cy="1141920"/>
           </a:xfrm>
           <a:prstGeom prst="roundRect">
             <a:avLst>
@@ -32895,7 +32552,7 @@
         <p:spPr>
           <a:xfrm>
             <a:off x="10268640" y="3364920"/>
-            <a:ext cx="54000" cy="1142280"/>
+            <a:ext cx="53640" cy="1141920"/>
           </a:xfrm>
           <a:prstGeom prst="rect">
             <a:avLst/>
@@ -32944,7 +32601,7 @@
         <p:spPr>
           <a:xfrm>
             <a:off x="10469880" y="3502080"/>
-            <a:ext cx="922680" cy="227880"/>
+            <a:ext cx="922320" cy="227520"/>
           </a:xfrm>
           <a:prstGeom prst="rect">
             <a:avLst/>
@@ -33001,7 +32658,7 @@
         <p:spPr>
           <a:xfrm>
             <a:off x="10469880" y="3840480"/>
-            <a:ext cx="922680" cy="538920"/>
+            <a:ext cx="922320" cy="538560"/>
           </a:xfrm>
           <a:prstGeom prst="rect">
             <a:avLst/>
@@ -33058,7 +32715,7 @@
         <p:spPr>
           <a:xfrm>
             <a:off x="2011680" y="4983480"/>
-            <a:ext cx="8137440" cy="867960"/>
+            <a:ext cx="8137080" cy="867600"/>
           </a:xfrm>
           <a:prstGeom prst="roundRect">
             <a:avLst>
@@ -33109,7 +32766,7 @@
         <p:spPr>
           <a:xfrm>
             <a:off x="2267640" y="5184720"/>
-            <a:ext cx="1325160" cy="154800"/>
+            <a:ext cx="1324800" cy="154440"/>
           </a:xfrm>
           <a:prstGeom prst="rect">
             <a:avLst/>
@@ -33165,7 +32822,7 @@
         <p:spPr>
           <a:xfrm>
             <a:off x="3566160" y="5102280"/>
-            <a:ext cx="6262920" cy="383400"/>
+            <a:ext cx="6262560" cy="383040"/>
           </a:xfrm>
           <a:prstGeom prst="rect">
             <a:avLst/>
@@ -33225,7 +32882,7 @@
         <p:spPr>
           <a:xfrm>
             <a:off x="11292840" y="6574680"/>
-            <a:ext cx="799200" cy="299160"/>
+            <a:ext cx="798840" cy="298800"/>
           </a:xfrm>
           <a:prstGeom prst="rect">
             <a:avLst/>
@@ -33267,7 +32924,7 @@
                 <a:tab algn="l" pos="0"/>
               </a:tabLst>
             </a:pPr>
-            <a:fld id="{DE232A5D-A074-4518-BB97-108F19E0C1E4}" type="slidenum">
+            <a:fld id="{6D4D6B61-9CB6-456C-97B2-0300ADBA5367}" type="slidenum">
               <a:rPr b="0" lang="en-US" sz="850" spc="-1" strike="noStrike">
                 <a:solidFill>
                   <a:srgbClr val="7b8494"/>
@@ -33275,7 +32932,7 @@
                 <a:latin typeface="Aptos"/>
                 <a:ea typeface="Aptos"/>
               </a:rPr>
-              <a:t>5</a:t>
+              <a:t>&lt;number&gt;</a:t>
             </a:fld>
             <a:endParaRPr b="0" lang="en-US" sz="850" spc="-1" strike="noStrike">
               <a:solidFill>
@@ -33325,7 +32982,7 @@
         <p:spPr>
           <a:xfrm>
             <a:off x="567000" y="292680"/>
-            <a:ext cx="8960400" cy="401760"/>
+            <a:ext cx="8960040" cy="401400"/>
           </a:xfrm>
           <a:prstGeom prst="rect">
             <a:avLst/>
@@ -33382,7 +33039,7 @@
         <p:spPr>
           <a:xfrm>
             <a:off x="585360" y="749880"/>
-            <a:ext cx="10697760" cy="291960"/>
+            <a:ext cx="10697400" cy="291600"/>
           </a:xfrm>
           <a:prstGeom prst="rect">
             <a:avLst/>
@@ -33439,7 +33096,7 @@
         <p:spPr>
           <a:xfrm>
             <a:off x="10168200" y="356760"/>
-            <a:ext cx="1416600" cy="200520"/>
+            <a:ext cx="1416240" cy="200160"/>
           </a:xfrm>
           <a:prstGeom prst="rect">
             <a:avLst/>
@@ -33469,7 +33126,7 @@
               </a:tabLst>
             </a:pPr>
             <a:r>
-              <a:rPr b="1" lang="en-US" sz="850" spc="75" strike="noStrike">
+              <a:rPr b="1" lang="en-US" sz="850" spc="72" strike="noStrike">
                 <a:solidFill>
                   <a:srgbClr val="2f67e8"/>
                 </a:solidFill>
@@ -33496,7 +33153,7 @@
         <p:spPr>
           <a:xfrm>
             <a:off x="658440" y="1234440"/>
-            <a:ext cx="3245400" cy="1508040"/>
+            <a:ext cx="3245040" cy="1507680"/>
           </a:xfrm>
           <a:prstGeom prst="roundRect">
             <a:avLst>
@@ -33547,7 +33204,7 @@
         <p:spPr>
           <a:xfrm>
             <a:off x="658440" y="1234440"/>
-            <a:ext cx="54000" cy="1508040"/>
+            <a:ext cx="53640" cy="1507680"/>
           </a:xfrm>
           <a:prstGeom prst="rect">
             <a:avLst/>
@@ -33596,7 +33253,7 @@
         <p:spPr>
           <a:xfrm>
             <a:off x="859680" y="1371600"/>
-            <a:ext cx="2861280" cy="227880"/>
+            <a:ext cx="2860920" cy="227520"/>
           </a:xfrm>
           <a:prstGeom prst="rect">
             <a:avLst/>
@@ -33653,7 +33310,7 @@
         <p:spPr>
           <a:xfrm>
             <a:off x="859680" y="1710000"/>
-            <a:ext cx="2861280" cy="904680"/>
+            <a:ext cx="2860920" cy="904320"/>
           </a:xfrm>
           <a:prstGeom prst="rect">
             <a:avLst/>
@@ -33735,8 +33392,8 @@
         </p:nvSpPr>
         <p:spPr>
           <a:xfrm>
-            <a:off x="2944440" y="1435680"/>
-            <a:ext cx="685080" cy="346680"/>
+            <a:off x="2743200" y="1435680"/>
+            <a:ext cx="885960" cy="346320"/>
           </a:xfrm>
           <a:prstGeom prst="rect">
             <a:avLst/>
@@ -33792,7 +33449,7 @@
         <p:spPr>
           <a:xfrm>
             <a:off x="4407480" y="1234440"/>
-            <a:ext cx="3245400" cy="1508040"/>
+            <a:ext cx="3245040" cy="1507680"/>
           </a:xfrm>
           <a:prstGeom prst="roundRect">
             <a:avLst>
@@ -33843,7 +33500,7 @@
         <p:spPr>
           <a:xfrm>
             <a:off x="4407480" y="1234440"/>
-            <a:ext cx="54000" cy="1508040"/>
+            <a:ext cx="53640" cy="1507680"/>
           </a:xfrm>
           <a:prstGeom prst="rect">
             <a:avLst/>
@@ -33892,7 +33549,7 @@
         <p:spPr>
           <a:xfrm>
             <a:off x="4608720" y="1371600"/>
-            <a:ext cx="2861280" cy="227880"/>
+            <a:ext cx="2860920" cy="227520"/>
           </a:xfrm>
           <a:prstGeom prst="rect">
             <a:avLst/>
@@ -33949,7 +33606,7 @@
         <p:spPr>
           <a:xfrm>
             <a:off x="4608720" y="1710000"/>
-            <a:ext cx="2861280" cy="904680"/>
+            <a:ext cx="2860920" cy="904320"/>
           </a:xfrm>
           <a:prstGeom prst="rect">
             <a:avLst/>
@@ -34032,7 +33689,7 @@
         <p:spPr>
           <a:xfrm>
             <a:off x="6693480" y="1435680"/>
-            <a:ext cx="685080" cy="346680"/>
+            <a:ext cx="684720" cy="346320"/>
           </a:xfrm>
           <a:prstGeom prst="rect">
             <a:avLst/>
@@ -34088,7 +33745,7 @@
         <p:spPr>
           <a:xfrm>
             <a:off x="8156520" y="1234440"/>
-            <a:ext cx="3245400" cy="1508040"/>
+            <a:ext cx="3245040" cy="1507680"/>
           </a:xfrm>
           <a:prstGeom prst="roundRect">
             <a:avLst>
@@ -34139,7 +33796,7 @@
         <p:spPr>
           <a:xfrm>
             <a:off x="8156520" y="1234440"/>
-            <a:ext cx="54000" cy="1508040"/>
+            <a:ext cx="53640" cy="1507680"/>
           </a:xfrm>
           <a:prstGeom prst="rect">
             <a:avLst/>
@@ -34188,7 +33845,7 @@
         <p:spPr>
           <a:xfrm>
             <a:off x="8357760" y="1371600"/>
-            <a:ext cx="2861280" cy="227880"/>
+            <a:ext cx="2860920" cy="227520"/>
           </a:xfrm>
           <a:prstGeom prst="rect">
             <a:avLst/>
@@ -34245,7 +33902,7 @@
         <p:spPr>
           <a:xfrm>
             <a:off x="8357760" y="1710000"/>
-            <a:ext cx="2861280" cy="904680"/>
+            <a:ext cx="2860920" cy="904320"/>
           </a:xfrm>
           <a:prstGeom prst="rect">
             <a:avLst/>
@@ -34328,7 +33985,7 @@
         <p:spPr>
           <a:xfrm>
             <a:off x="10442520" y="1435680"/>
-            <a:ext cx="685080" cy="346680"/>
+            <a:ext cx="684720" cy="346320"/>
           </a:xfrm>
           <a:prstGeom prst="rect">
             <a:avLst/>
@@ -34384,7 +34041,7 @@
         <p:spPr>
           <a:xfrm>
             <a:off x="658440" y="3154680"/>
-            <a:ext cx="474840" cy="291960"/>
+            <a:ext cx="474480" cy="291600"/>
           </a:xfrm>
           <a:prstGeom prst="roundRect">
             <a:avLst>
@@ -34435,7 +34092,7 @@
         <p:spPr>
           <a:xfrm>
             <a:off x="658440" y="3218760"/>
-            <a:ext cx="474840" cy="109080"/>
+            <a:ext cx="474480" cy="108720"/>
           </a:xfrm>
           <a:prstGeom prst="rect">
             <a:avLst/>
@@ -34491,7 +34148,7 @@
         <p:spPr>
           <a:xfrm>
             <a:off x="1243440" y="3191400"/>
-            <a:ext cx="1508040" cy="200520"/>
+            <a:ext cx="1507680" cy="200160"/>
           </a:xfrm>
           <a:prstGeom prst="rect">
             <a:avLst/>
@@ -34547,7 +34204,7 @@
         <p:spPr>
           <a:xfrm>
             <a:off x="658440" y="3593520"/>
-            <a:ext cx="2513880" cy="310320"/>
+            <a:ext cx="2513520" cy="309960"/>
           </a:xfrm>
           <a:prstGeom prst="roundRect">
             <a:avLst>
@@ -34598,7 +34255,7 @@
         <p:spPr>
           <a:xfrm>
             <a:off x="731520" y="3657600"/>
-            <a:ext cx="2367720" cy="127440"/>
+            <a:ext cx="2367360" cy="127080"/>
           </a:xfrm>
           <a:prstGeom prst="rect">
             <a:avLst/>
@@ -34654,7 +34311,7 @@
         <p:spPr>
           <a:xfrm>
             <a:off x="3447360" y="3593520"/>
-            <a:ext cx="2513880" cy="310320"/>
+            <a:ext cx="2513520" cy="309960"/>
           </a:xfrm>
           <a:prstGeom prst="roundRect">
             <a:avLst>
@@ -34705,7 +34362,7 @@
         <p:spPr>
           <a:xfrm>
             <a:off x="3520440" y="3657600"/>
-            <a:ext cx="2367720" cy="127440"/>
+            <a:ext cx="2367360" cy="127080"/>
           </a:xfrm>
           <a:prstGeom prst="rect">
             <a:avLst/>
@@ -34761,7 +34418,7 @@
         <p:spPr>
           <a:xfrm>
             <a:off x="6236280" y="3593520"/>
-            <a:ext cx="2513880" cy="310320"/>
+            <a:ext cx="2513520" cy="309960"/>
           </a:xfrm>
           <a:prstGeom prst="roundRect">
             <a:avLst>
@@ -34812,7 +34469,7 @@
         <p:spPr>
           <a:xfrm>
             <a:off x="6309360" y="3657600"/>
-            <a:ext cx="2367720" cy="127440"/>
+            <a:ext cx="2367360" cy="127080"/>
           </a:xfrm>
           <a:prstGeom prst="rect">
             <a:avLst/>
@@ -34868,7 +34525,7 @@
         <p:spPr>
           <a:xfrm>
             <a:off x="9025200" y="3593520"/>
-            <a:ext cx="2513880" cy="310320"/>
+            <a:ext cx="2513520" cy="309960"/>
           </a:xfrm>
           <a:prstGeom prst="roundRect">
             <a:avLst>
@@ -34919,7 +34576,7 @@
         <p:spPr>
           <a:xfrm>
             <a:off x="9098280" y="3657600"/>
-            <a:ext cx="2367720" cy="127440"/>
+            <a:ext cx="2367360" cy="127080"/>
           </a:xfrm>
           <a:prstGeom prst="rect">
             <a:avLst/>
@@ -34975,7 +34632,7 @@
         <p:spPr>
           <a:xfrm>
             <a:off x="658440" y="4096440"/>
-            <a:ext cx="2513880" cy="310320"/>
+            <a:ext cx="2513520" cy="309960"/>
           </a:xfrm>
           <a:prstGeom prst="roundRect">
             <a:avLst>
@@ -35026,7 +34683,7 @@
         <p:spPr>
           <a:xfrm>
             <a:off x="731520" y="4160520"/>
-            <a:ext cx="2367720" cy="127440"/>
+            <a:ext cx="2367360" cy="127080"/>
           </a:xfrm>
           <a:prstGeom prst="rect">
             <a:avLst/>
@@ -35082,7 +34739,7 @@
         <p:spPr>
           <a:xfrm>
             <a:off x="3447360" y="4096440"/>
-            <a:ext cx="2513880" cy="310320"/>
+            <a:ext cx="2513520" cy="309960"/>
           </a:xfrm>
           <a:prstGeom prst="roundRect">
             <a:avLst>
@@ -35133,7 +34790,7 @@
         <p:spPr>
           <a:xfrm>
             <a:off x="3520440" y="4160520"/>
-            <a:ext cx="2367720" cy="127440"/>
+            <a:ext cx="2367360" cy="127080"/>
           </a:xfrm>
           <a:prstGeom prst="rect">
             <a:avLst/>
@@ -35189,7 +34846,7 @@
         <p:spPr>
           <a:xfrm>
             <a:off x="6236280" y="4096440"/>
-            <a:ext cx="2513880" cy="310320"/>
+            <a:ext cx="2513520" cy="309960"/>
           </a:xfrm>
           <a:prstGeom prst="roundRect">
             <a:avLst>
@@ -35240,7 +34897,7 @@
         <p:spPr>
           <a:xfrm>
             <a:off x="6309360" y="4160520"/>
-            <a:ext cx="2367720" cy="127440"/>
+            <a:ext cx="2367360" cy="127080"/>
           </a:xfrm>
           <a:prstGeom prst="rect">
             <a:avLst/>
@@ -35296,7 +34953,7 @@
         <p:spPr>
           <a:xfrm>
             <a:off x="658440" y="4800600"/>
-            <a:ext cx="5257080" cy="913680"/>
+            <a:ext cx="5256720" cy="913320"/>
           </a:xfrm>
           <a:prstGeom prst="roundRect">
             <a:avLst>
@@ -35347,7 +35004,7 @@
         <p:spPr>
           <a:xfrm>
             <a:off x="658440" y="4800600"/>
-            <a:ext cx="54000" cy="913680"/>
+            <a:ext cx="53640" cy="913320"/>
           </a:xfrm>
           <a:prstGeom prst="rect">
             <a:avLst/>
@@ -35396,7 +35053,7 @@
         <p:spPr>
           <a:xfrm>
             <a:off x="859680" y="4937760"/>
-            <a:ext cx="4872960" cy="227880"/>
+            <a:ext cx="4872600" cy="227520"/>
           </a:xfrm>
           <a:prstGeom prst="rect">
             <a:avLst/>
@@ -35453,7 +35110,7 @@
         <p:spPr>
           <a:xfrm>
             <a:off x="859680" y="5276160"/>
-            <a:ext cx="4872960" cy="310320"/>
+            <a:ext cx="4872600" cy="309960"/>
           </a:xfrm>
           <a:prstGeom prst="rect">
             <a:avLst/>
@@ -35510,7 +35167,7 @@
         <p:spPr>
           <a:xfrm>
             <a:off x="6144840" y="4800600"/>
-            <a:ext cx="5375880" cy="913680"/>
+            <a:ext cx="5375520" cy="913320"/>
           </a:xfrm>
           <a:prstGeom prst="roundRect">
             <a:avLst>
@@ -35561,7 +35218,7 @@
         <p:spPr>
           <a:xfrm>
             <a:off x="6144840" y="4800600"/>
-            <a:ext cx="54000" cy="913680"/>
+            <a:ext cx="53640" cy="913320"/>
           </a:xfrm>
           <a:prstGeom prst="rect">
             <a:avLst/>
@@ -35610,7 +35267,7 @@
         <p:spPr>
           <a:xfrm>
             <a:off x="6346080" y="4937760"/>
-            <a:ext cx="4991760" cy="227880"/>
+            <a:ext cx="4991400" cy="227520"/>
           </a:xfrm>
           <a:prstGeom prst="rect">
             <a:avLst/>
@@ -35667,7 +35324,7 @@
         <p:spPr>
           <a:xfrm>
             <a:off x="6346080" y="5276160"/>
-            <a:ext cx="4991760" cy="310320"/>
+            <a:ext cx="4991400" cy="309960"/>
           </a:xfrm>
           <a:prstGeom prst="rect">
             <a:avLst/>
@@ -35728,7 +35385,7 @@
         <p:spPr>
           <a:xfrm>
             <a:off x="11292840" y="6574680"/>
-            <a:ext cx="799200" cy="299160"/>
+            <a:ext cx="798840" cy="298800"/>
           </a:xfrm>
           <a:prstGeom prst="rect">
             <a:avLst/>
@@ -35770,7 +35427,7 @@
                 <a:tab algn="l" pos="0"/>
               </a:tabLst>
             </a:pPr>
-            <a:fld id="{82310A15-CCD7-47AF-AEA3-4D2DE6BCC3BC}" type="slidenum">
+            <a:fld id="{318300FD-AEB6-44D2-8211-5512C619310A}" type="slidenum">
               <a:rPr b="0" lang="en-US" sz="850" spc="-1" strike="noStrike">
                 <a:solidFill>
                   <a:srgbClr val="7b8494"/>
@@ -35778,7 +35435,7 @@
                 <a:latin typeface="Aptos"/>
                 <a:ea typeface="Aptos"/>
               </a:rPr>
-              <a:t>6</a:t>
+              <a:t>&lt;number&gt;</a:t>
             </a:fld>
             <a:endParaRPr b="0" lang="en-US" sz="850" spc="-1" strike="noStrike">
               <a:solidFill>
@@ -35828,7 +35485,7 @@
         <p:spPr>
           <a:xfrm>
             <a:off x="567000" y="292680"/>
-            <a:ext cx="8960400" cy="401760"/>
+            <a:ext cx="8960040" cy="401400"/>
           </a:xfrm>
           <a:prstGeom prst="rect">
             <a:avLst/>
@@ -35885,7 +35542,7 @@
         <p:spPr>
           <a:xfrm>
             <a:off x="585360" y="749880"/>
-            <a:ext cx="10697760" cy="291960"/>
+            <a:ext cx="10697400" cy="291600"/>
           </a:xfrm>
           <a:prstGeom prst="rect">
             <a:avLst/>
@@ -35942,7 +35599,7 @@
         <p:spPr>
           <a:xfrm>
             <a:off x="10168200" y="356760"/>
-            <a:ext cx="1416600" cy="200520"/>
+            <a:ext cx="1416240" cy="200160"/>
           </a:xfrm>
           <a:prstGeom prst="rect">
             <a:avLst/>
@@ -35972,7 +35629,7 @@
               </a:tabLst>
             </a:pPr>
             <a:r>
-              <a:rPr b="1" lang="en-US" sz="850" spc="75" strike="noStrike">
+              <a:rPr b="1" lang="en-US" sz="850" spc="72" strike="noStrike">
                 <a:solidFill>
                   <a:srgbClr val="2f67e8"/>
                 </a:solidFill>
@@ -35999,7 +35656,7 @@
         <p:spPr>
           <a:xfrm>
             <a:off x="594360" y="1234440"/>
-            <a:ext cx="1233720" cy="1050840"/>
+            <a:ext cx="1233360" cy="1050480"/>
           </a:xfrm>
           <a:prstGeom prst="roundRect">
             <a:avLst>
@@ -36050,7 +35707,7 @@
         <p:spPr>
           <a:xfrm>
             <a:off x="594360" y="1234440"/>
-            <a:ext cx="54000" cy="1050840"/>
+            <a:ext cx="53640" cy="1050480"/>
           </a:xfrm>
           <a:prstGeom prst="rect">
             <a:avLst/>
@@ -36099,7 +35756,7 @@
         <p:spPr>
           <a:xfrm>
             <a:off x="795600" y="1371600"/>
-            <a:ext cx="849600" cy="227880"/>
+            <a:ext cx="849240" cy="227520"/>
           </a:xfrm>
           <a:prstGeom prst="rect">
             <a:avLst/>
@@ -36156,7 +35813,7 @@
         <p:spPr>
           <a:xfrm>
             <a:off x="795600" y="1710000"/>
-            <a:ext cx="849600" cy="447480"/>
+            <a:ext cx="849240" cy="447120"/>
           </a:xfrm>
           <a:prstGeom prst="rect">
             <a:avLst/>
@@ -36213,7 +35870,7 @@
         <p:spPr>
           <a:xfrm>
             <a:off x="1856160" y="1627560"/>
-            <a:ext cx="227880" cy="173160"/>
+            <a:ext cx="227520" cy="172800"/>
           </a:xfrm>
           <a:prstGeom prst="chevron">
             <a:avLst>
@@ -36264,7 +35921,7 @@
         <p:spPr>
           <a:xfrm>
             <a:off x="2011680" y="1234440"/>
-            <a:ext cx="1233720" cy="1050840"/>
+            <a:ext cx="1233360" cy="1050480"/>
           </a:xfrm>
           <a:prstGeom prst="roundRect">
             <a:avLst>
@@ -36315,7 +35972,7 @@
         <p:spPr>
           <a:xfrm>
             <a:off x="2011680" y="1234440"/>
-            <a:ext cx="54000" cy="1050840"/>
+            <a:ext cx="53640" cy="1050480"/>
           </a:xfrm>
           <a:prstGeom prst="rect">
             <a:avLst/>
@@ -36364,7 +36021,7 @@
         <p:spPr>
           <a:xfrm>
             <a:off x="2212920" y="1371600"/>
-            <a:ext cx="849600" cy="227880"/>
+            <a:ext cx="849240" cy="227520"/>
           </a:xfrm>
           <a:prstGeom prst="rect">
             <a:avLst/>
@@ -36421,7 +36078,7 @@
         <p:spPr>
           <a:xfrm>
             <a:off x="2212920" y="1710000"/>
-            <a:ext cx="849600" cy="447480"/>
+            <a:ext cx="849240" cy="447120"/>
           </a:xfrm>
           <a:prstGeom prst="rect">
             <a:avLst/>
@@ -36478,7 +36135,7 @@
         <p:spPr>
           <a:xfrm>
             <a:off x="3273480" y="1627560"/>
-            <a:ext cx="227880" cy="173160"/>
+            <a:ext cx="227520" cy="172800"/>
           </a:xfrm>
           <a:prstGeom prst="chevron">
             <a:avLst>
@@ -36529,7 +36186,7 @@
         <p:spPr>
           <a:xfrm>
             <a:off x="3429000" y="1234440"/>
-            <a:ext cx="1233720" cy="1050840"/>
+            <a:ext cx="1233360" cy="1050480"/>
           </a:xfrm>
           <a:prstGeom prst="roundRect">
             <a:avLst>
@@ -36580,7 +36237,7 @@
         <p:spPr>
           <a:xfrm>
             <a:off x="3429000" y="1234440"/>
-            <a:ext cx="54000" cy="1050840"/>
+            <a:ext cx="53640" cy="1050480"/>
           </a:xfrm>
           <a:prstGeom prst="rect">
             <a:avLst/>
@@ -36629,7 +36286,7 @@
         <p:spPr>
           <a:xfrm>
             <a:off x="3630240" y="1371600"/>
-            <a:ext cx="849600" cy="227880"/>
+            <a:ext cx="849240" cy="227520"/>
           </a:xfrm>
           <a:prstGeom prst="rect">
             <a:avLst/>
@@ -36686,7 +36343,7 @@
         <p:spPr>
           <a:xfrm>
             <a:off x="3630240" y="1710000"/>
-            <a:ext cx="849600" cy="447480"/>
+            <a:ext cx="849240" cy="447120"/>
           </a:xfrm>
           <a:prstGeom prst="rect">
             <a:avLst/>
@@ -36743,7 +36400,7 @@
         <p:spPr>
           <a:xfrm>
             <a:off x="4690800" y="1627560"/>
-            <a:ext cx="227880" cy="173160"/>
+            <a:ext cx="227520" cy="172800"/>
           </a:xfrm>
           <a:prstGeom prst="chevron">
             <a:avLst>
@@ -36794,7 +36451,7 @@
         <p:spPr>
           <a:xfrm>
             <a:off x="4846320" y="1234440"/>
-            <a:ext cx="1233720" cy="1050840"/>
+            <a:ext cx="1233360" cy="1050480"/>
           </a:xfrm>
           <a:prstGeom prst="roundRect">
             <a:avLst>
@@ -36845,7 +36502,7 @@
         <p:spPr>
           <a:xfrm>
             <a:off x="4846320" y="1234440"/>
-            <a:ext cx="54000" cy="1050840"/>
+            <a:ext cx="53640" cy="1050480"/>
           </a:xfrm>
           <a:prstGeom prst="rect">
             <a:avLst/>
@@ -36894,7 +36551,7 @@
         <p:spPr>
           <a:xfrm>
             <a:off x="5047560" y="1371600"/>
-            <a:ext cx="849600" cy="227880"/>
+            <a:ext cx="849240" cy="227520"/>
           </a:xfrm>
           <a:prstGeom prst="rect">
             <a:avLst/>
@@ -36951,7 +36608,7 @@
         <p:spPr>
           <a:xfrm>
             <a:off x="5047560" y="1710000"/>
-            <a:ext cx="849600" cy="447480"/>
+            <a:ext cx="849240" cy="447120"/>
           </a:xfrm>
           <a:prstGeom prst="rect">
             <a:avLst/>
@@ -37008,7 +36665,7 @@
         <p:spPr>
           <a:xfrm>
             <a:off x="6108120" y="1627560"/>
-            <a:ext cx="227880" cy="173160"/>
+            <a:ext cx="227520" cy="172800"/>
           </a:xfrm>
           <a:prstGeom prst="chevron">
             <a:avLst>
@@ -37059,7 +36716,7 @@
         <p:spPr>
           <a:xfrm>
             <a:off x="6263640" y="1234440"/>
-            <a:ext cx="1233720" cy="1050840"/>
+            <a:ext cx="1233360" cy="1050480"/>
           </a:xfrm>
           <a:prstGeom prst="roundRect">
             <a:avLst>
@@ -37110,7 +36767,7 @@
         <p:spPr>
           <a:xfrm>
             <a:off x="6263640" y="1234440"/>
-            <a:ext cx="54000" cy="1050840"/>
+            <a:ext cx="53640" cy="1050480"/>
           </a:xfrm>
           <a:prstGeom prst="rect">
             <a:avLst/>
@@ -37159,7 +36816,7 @@
         <p:spPr>
           <a:xfrm>
             <a:off x="6464880" y="1371600"/>
-            <a:ext cx="849600" cy="227880"/>
+            <a:ext cx="849240" cy="227520"/>
           </a:xfrm>
           <a:prstGeom prst="rect">
             <a:avLst/>
@@ -37216,7 +36873,7 @@
         <p:spPr>
           <a:xfrm>
             <a:off x="6464880" y="1710000"/>
-            <a:ext cx="849600" cy="447480"/>
+            <a:ext cx="849240" cy="447120"/>
           </a:xfrm>
           <a:prstGeom prst="rect">
             <a:avLst/>
@@ -37273,7 +36930,7 @@
         <p:spPr>
           <a:xfrm>
             <a:off x="7863840" y="1097280"/>
-            <a:ext cx="3611160" cy="1325160"/>
+            <a:ext cx="3610800" cy="1324800"/>
           </a:xfrm>
           <a:prstGeom prst="roundRect">
             <a:avLst>
@@ -37324,7 +36981,7 @@
         <p:spPr>
           <a:xfrm>
             <a:off x="8119800" y="1280160"/>
-            <a:ext cx="1553760" cy="182160"/>
+            <a:ext cx="1553400" cy="181800"/>
           </a:xfrm>
           <a:prstGeom prst="rect">
             <a:avLst/>
@@ -37354,7 +37011,7 @@
               </a:tabLst>
             </a:pPr>
             <a:r>
-              <a:rPr b="1" lang="en-US" sz="900" spc="94" strike="noStrike">
+              <a:rPr b="1" lang="en-US" sz="900" spc="92" strike="noStrike">
                 <a:solidFill>
                   <a:srgbClr val="7a5af8"/>
                 </a:solidFill>
@@ -37380,7 +37037,7 @@
         <p:spPr>
           <a:xfrm>
             <a:off x="8119800" y="1554480"/>
-            <a:ext cx="3016800" cy="621000"/>
+            <a:ext cx="3016440" cy="620640"/>
           </a:xfrm>
           <a:prstGeom prst="rect">
             <a:avLst/>
@@ -37486,7 +37143,7 @@
         <p:spPr>
           <a:xfrm>
             <a:off x="7178400" y="1625400"/>
-            <a:ext cx="822240" cy="236880"/>
+            <a:ext cx="821880" cy="236520"/>
           </a:xfrm>
           <a:prstGeom prst="chevron">
             <a:avLst>
@@ -37537,7 +37194,7 @@
         <p:spPr>
           <a:xfrm>
             <a:off x="640080" y="2788920"/>
-            <a:ext cx="474840" cy="291960"/>
+            <a:ext cx="474480" cy="291600"/>
           </a:xfrm>
           <a:prstGeom prst="roundRect">
             <a:avLst>
@@ -37588,7 +37245,7 @@
         <p:spPr>
           <a:xfrm>
             <a:off x="640080" y="2853000"/>
-            <a:ext cx="474840" cy="109080"/>
+            <a:ext cx="474480" cy="108720"/>
           </a:xfrm>
           <a:prstGeom prst="rect">
             <a:avLst/>
@@ -37644,7 +37301,7 @@
         <p:spPr>
           <a:xfrm>
             <a:off x="1225440" y="2825640"/>
-            <a:ext cx="1096560" cy="200520"/>
+            <a:ext cx="1096200" cy="200160"/>
           </a:xfrm>
           <a:prstGeom prst="rect">
             <a:avLst/>
@@ -37700,7 +37357,7 @@
         <p:spPr>
           <a:xfrm>
             <a:off x="658440" y="3218760"/>
-            <a:ext cx="1553760" cy="1050840"/>
+            <a:ext cx="1553400" cy="1050480"/>
           </a:xfrm>
           <a:prstGeom prst="roundRect">
             <a:avLst>
@@ -37751,7 +37408,7 @@
         <p:spPr>
           <a:xfrm>
             <a:off x="658440" y="3218760"/>
-            <a:ext cx="54000" cy="1050840"/>
+            <a:ext cx="53640" cy="1050480"/>
           </a:xfrm>
           <a:prstGeom prst="rect">
             <a:avLst/>
@@ -37800,7 +37457,7 @@
         <p:spPr>
           <a:xfrm>
             <a:off x="859680" y="3355920"/>
-            <a:ext cx="1169640" cy="227880"/>
+            <a:ext cx="1169280" cy="227520"/>
           </a:xfrm>
           <a:prstGeom prst="rect">
             <a:avLst/>
@@ -37857,7 +37514,7 @@
         <p:spPr>
           <a:xfrm>
             <a:off x="859680" y="3694320"/>
-            <a:ext cx="1169640" cy="447480"/>
+            <a:ext cx="1169280" cy="447120"/>
           </a:xfrm>
           <a:prstGeom prst="rect">
             <a:avLst/>
@@ -37914,7 +37571,7 @@
         <p:spPr>
           <a:xfrm>
             <a:off x="2249280" y="3566160"/>
-            <a:ext cx="200520" cy="163800"/>
+            <a:ext cx="200160" cy="163440"/>
           </a:xfrm>
           <a:prstGeom prst="chevron">
             <a:avLst>
@@ -37965,7 +37622,7 @@
         <p:spPr>
           <a:xfrm>
             <a:off x="2487240" y="3218760"/>
-            <a:ext cx="1553760" cy="1050840"/>
+            <a:ext cx="1553400" cy="1050480"/>
           </a:xfrm>
           <a:prstGeom prst="roundRect">
             <a:avLst>
@@ -38016,7 +37673,7 @@
         <p:spPr>
           <a:xfrm>
             <a:off x="2487240" y="3218760"/>
-            <a:ext cx="54000" cy="1050840"/>
+            <a:ext cx="53640" cy="1050480"/>
           </a:xfrm>
           <a:prstGeom prst="rect">
             <a:avLst/>
@@ -38065,7 +37722,7 @@
         <p:spPr>
           <a:xfrm>
             <a:off x="2688480" y="3355920"/>
-            <a:ext cx="1169640" cy="227880"/>
+            <a:ext cx="1169280" cy="227520"/>
           </a:xfrm>
           <a:prstGeom prst="rect">
             <a:avLst/>
@@ -38122,7 +37779,7 @@
         <p:spPr>
           <a:xfrm>
             <a:off x="2688480" y="3694320"/>
-            <a:ext cx="1169640" cy="447480"/>
+            <a:ext cx="1169280" cy="447120"/>
           </a:xfrm>
           <a:prstGeom prst="rect">
             <a:avLst/>
@@ -38179,7 +37836,7 @@
         <p:spPr>
           <a:xfrm>
             <a:off x="4078080" y="3566160"/>
-            <a:ext cx="200520" cy="163800"/>
+            <a:ext cx="200160" cy="163440"/>
           </a:xfrm>
           <a:prstGeom prst="chevron">
             <a:avLst>
@@ -38230,7 +37887,7 @@
         <p:spPr>
           <a:xfrm>
             <a:off x="4316040" y="3218760"/>
-            <a:ext cx="1553760" cy="1050840"/>
+            <a:ext cx="1553400" cy="1050480"/>
           </a:xfrm>
           <a:prstGeom prst="roundRect">
             <a:avLst>
@@ -38281,7 +37938,7 @@
         <p:spPr>
           <a:xfrm>
             <a:off x="4316040" y="3218760"/>
-            <a:ext cx="54000" cy="1050840"/>
+            <a:ext cx="53640" cy="1050480"/>
           </a:xfrm>
           <a:prstGeom prst="rect">
             <a:avLst/>
@@ -38330,7 +37987,7 @@
         <p:spPr>
           <a:xfrm>
             <a:off x="4517280" y="3355920"/>
-            <a:ext cx="1169640" cy="227880"/>
+            <a:ext cx="1169280" cy="227520"/>
           </a:xfrm>
           <a:prstGeom prst="rect">
             <a:avLst/>
@@ -38387,7 +38044,7 @@
         <p:spPr>
           <a:xfrm>
             <a:off x="4517280" y="3694320"/>
-            <a:ext cx="1169640" cy="447480"/>
+            <a:ext cx="1169280" cy="447120"/>
           </a:xfrm>
           <a:prstGeom prst="rect">
             <a:avLst/>
@@ -38444,7 +38101,7 @@
         <p:spPr>
           <a:xfrm>
             <a:off x="5906880" y="3566160"/>
-            <a:ext cx="200520" cy="163800"/>
+            <a:ext cx="200160" cy="163440"/>
           </a:xfrm>
           <a:prstGeom prst="chevron">
             <a:avLst>
@@ -38495,7 +38152,7 @@
         <p:spPr>
           <a:xfrm>
             <a:off x="6144840" y="3218760"/>
-            <a:ext cx="1553760" cy="1050840"/>
+            <a:ext cx="1553400" cy="1050480"/>
           </a:xfrm>
           <a:prstGeom prst="roundRect">
             <a:avLst>
@@ -38546,7 +38203,7 @@
         <p:spPr>
           <a:xfrm>
             <a:off x="6144840" y="3218760"/>
-            <a:ext cx="54000" cy="1050840"/>
+            <a:ext cx="53640" cy="1050480"/>
           </a:xfrm>
           <a:prstGeom prst="rect">
             <a:avLst/>
@@ -38595,7 +38252,7 @@
         <p:spPr>
           <a:xfrm>
             <a:off x="6346080" y="3355920"/>
-            <a:ext cx="1169640" cy="227880"/>
+            <a:ext cx="1169280" cy="227520"/>
           </a:xfrm>
           <a:prstGeom prst="rect">
             <a:avLst/>
@@ -38652,7 +38309,7 @@
         <p:spPr>
           <a:xfrm>
             <a:off x="6346080" y="3694320"/>
-            <a:ext cx="1169640" cy="447480"/>
+            <a:ext cx="1169280" cy="447120"/>
           </a:xfrm>
           <a:prstGeom prst="rect">
             <a:avLst/>
@@ -38709,7 +38366,7 @@
         <p:spPr>
           <a:xfrm>
             <a:off x="7735680" y="3566160"/>
-            <a:ext cx="200520" cy="163800"/>
+            <a:ext cx="200160" cy="163440"/>
           </a:xfrm>
           <a:prstGeom prst="chevron">
             <a:avLst>
@@ -38760,7 +38417,7 @@
         <p:spPr>
           <a:xfrm>
             <a:off x="7973640" y="3218760"/>
-            <a:ext cx="1553760" cy="1050840"/>
+            <a:ext cx="1553400" cy="1050480"/>
           </a:xfrm>
           <a:prstGeom prst="roundRect">
             <a:avLst>
@@ -38811,7 +38468,7 @@
         <p:spPr>
           <a:xfrm>
             <a:off x="7973640" y="3218760"/>
-            <a:ext cx="54000" cy="1050840"/>
+            <a:ext cx="53640" cy="1050480"/>
           </a:xfrm>
           <a:prstGeom prst="rect">
             <a:avLst/>
@@ -38860,7 +38517,7 @@
         <p:spPr>
           <a:xfrm>
             <a:off x="8174880" y="3355920"/>
-            <a:ext cx="1169640" cy="227880"/>
+            <a:ext cx="1169280" cy="227520"/>
           </a:xfrm>
           <a:prstGeom prst="rect">
             <a:avLst/>
@@ -38917,7 +38574,7 @@
         <p:spPr>
           <a:xfrm>
             <a:off x="8174880" y="3694320"/>
-            <a:ext cx="1169640" cy="447480"/>
+            <a:ext cx="1169280" cy="447120"/>
           </a:xfrm>
           <a:prstGeom prst="rect">
             <a:avLst/>
@@ -38974,7 +38631,7 @@
         <p:spPr>
           <a:xfrm>
             <a:off x="9564480" y="3566160"/>
-            <a:ext cx="200520" cy="163800"/>
+            <a:ext cx="200160" cy="163440"/>
           </a:xfrm>
           <a:prstGeom prst="chevron">
             <a:avLst>
@@ -39025,7 +38682,7 @@
         <p:spPr>
           <a:xfrm>
             <a:off x="9802440" y="3218760"/>
-            <a:ext cx="1553760" cy="1050840"/>
+            <a:ext cx="1553400" cy="1050480"/>
           </a:xfrm>
           <a:prstGeom prst="roundRect">
             <a:avLst>
@@ -39076,7 +38733,7 @@
         <p:spPr>
           <a:xfrm>
             <a:off x="9802440" y="3218760"/>
-            <a:ext cx="54000" cy="1050840"/>
+            <a:ext cx="53640" cy="1050480"/>
           </a:xfrm>
           <a:prstGeom prst="rect">
             <a:avLst/>
@@ -39125,7 +38782,7 @@
         <p:spPr>
           <a:xfrm>
             <a:off x="10003680" y="3355920"/>
-            <a:ext cx="1169640" cy="227880"/>
+            <a:ext cx="1169280" cy="227520"/>
           </a:xfrm>
           <a:prstGeom prst="rect">
             <a:avLst/>
@@ -39182,7 +38839,7 @@
         <p:spPr>
           <a:xfrm>
             <a:off x="10003680" y="3694320"/>
-            <a:ext cx="1169640" cy="447480"/>
+            <a:ext cx="1169280" cy="447120"/>
           </a:xfrm>
           <a:prstGeom prst="rect">
             <a:avLst/>
@@ -39239,7 +38896,7 @@
         <p:spPr>
           <a:xfrm>
             <a:off x="658440" y="4617720"/>
-            <a:ext cx="3428280" cy="959400"/>
+            <a:ext cx="3427920" cy="959040"/>
           </a:xfrm>
           <a:prstGeom prst="roundRect">
             <a:avLst>
@@ -39290,7 +38947,7 @@
         <p:spPr>
           <a:xfrm>
             <a:off x="658440" y="4617720"/>
-            <a:ext cx="54000" cy="959400"/>
+            <a:ext cx="53640" cy="959040"/>
           </a:xfrm>
           <a:prstGeom prst="rect">
             <a:avLst/>
@@ -39339,7 +38996,7 @@
         <p:spPr>
           <a:xfrm>
             <a:off x="859680" y="4754880"/>
-            <a:ext cx="3044160" cy="227880"/>
+            <a:ext cx="3043800" cy="227520"/>
           </a:xfrm>
           <a:prstGeom prst="rect">
             <a:avLst/>
@@ -39396,7 +39053,7 @@
         <p:spPr>
           <a:xfrm>
             <a:off x="859680" y="5093280"/>
-            <a:ext cx="3044160" cy="356040"/>
+            <a:ext cx="3043800" cy="355680"/>
           </a:xfrm>
           <a:prstGeom prst="rect">
             <a:avLst/>
@@ -39453,7 +39110,7 @@
         <p:spPr>
           <a:xfrm>
             <a:off x="4297680" y="4617720"/>
-            <a:ext cx="3428280" cy="959400"/>
+            <a:ext cx="3427920" cy="959040"/>
           </a:xfrm>
           <a:prstGeom prst="roundRect">
             <a:avLst>
@@ -39504,7 +39161,7 @@
         <p:spPr>
           <a:xfrm>
             <a:off x="4297680" y="4617720"/>
-            <a:ext cx="54000" cy="959400"/>
+            <a:ext cx="53640" cy="959040"/>
           </a:xfrm>
           <a:prstGeom prst="rect">
             <a:avLst/>
@@ -39553,7 +39210,7 @@
         <p:spPr>
           <a:xfrm>
             <a:off x="4498920" y="4754880"/>
-            <a:ext cx="3044160" cy="227880"/>
+            <a:ext cx="3043800" cy="227520"/>
           </a:xfrm>
           <a:prstGeom prst="rect">
             <a:avLst/>
@@ -39610,7 +39267,7 @@
         <p:spPr>
           <a:xfrm>
             <a:off x="4498920" y="5093280"/>
-            <a:ext cx="3044160" cy="356040"/>
+            <a:ext cx="3043800" cy="355680"/>
           </a:xfrm>
           <a:prstGeom prst="rect">
             <a:avLst/>
@@ -39667,7 +39324,7 @@
         <p:spPr>
           <a:xfrm>
             <a:off x="7936920" y="4617720"/>
-            <a:ext cx="3583800" cy="959400"/>
+            <a:ext cx="3583440" cy="959040"/>
           </a:xfrm>
           <a:prstGeom prst="roundRect">
             <a:avLst>
@@ -39718,7 +39375,7 @@
         <p:spPr>
           <a:xfrm>
             <a:off x="7936920" y="4617720"/>
-            <a:ext cx="54000" cy="959400"/>
+            <a:ext cx="53640" cy="959040"/>
           </a:xfrm>
           <a:prstGeom prst="rect">
             <a:avLst/>
@@ -39767,7 +39424,7 @@
         <p:spPr>
           <a:xfrm>
             <a:off x="8138160" y="4754880"/>
-            <a:ext cx="3199680" cy="227880"/>
+            <a:ext cx="3199320" cy="227520"/>
           </a:xfrm>
           <a:prstGeom prst="rect">
             <a:avLst/>
@@ -39824,7 +39481,7 @@
         <p:spPr>
           <a:xfrm>
             <a:off x="8138160" y="5093280"/>
-            <a:ext cx="3199680" cy="356040"/>
+            <a:ext cx="3199320" cy="355680"/>
           </a:xfrm>
           <a:prstGeom prst="rect">
             <a:avLst/>
@@ -39885,7 +39542,7 @@
         <p:spPr>
           <a:xfrm>
             <a:off x="11292840" y="6574680"/>
-            <a:ext cx="799200" cy="299160"/>
+            <a:ext cx="798840" cy="298800"/>
           </a:xfrm>
           <a:prstGeom prst="rect">
             <a:avLst/>
@@ -39927,7 +39584,7 @@
                 <a:tab algn="l" pos="0"/>
               </a:tabLst>
             </a:pPr>
-            <a:fld id="{6C3A1E6B-C297-4858-9DE0-761F49B0322E}" type="slidenum">
+            <a:fld id="{929C2335-7026-45CA-8F4C-ABCA58ED1749}" type="slidenum">
               <a:rPr b="0" lang="en-US" sz="850" spc="-1" strike="noStrike">
                 <a:solidFill>
                   <a:srgbClr val="7b8494"/>
@@ -39935,7 +39592,7 @@
                 <a:latin typeface="Aptos"/>
                 <a:ea typeface="Aptos"/>
               </a:rPr>
-              <a:t>7</a:t>
+              <a:t>&lt;number&gt;</a:t>
             </a:fld>
             <a:endParaRPr b="0" lang="en-US" sz="850" spc="-1" strike="noStrike">
               <a:solidFill>
@@ -39985,7 +39642,7 @@
         <p:spPr>
           <a:xfrm>
             <a:off x="567000" y="292680"/>
-            <a:ext cx="8960400" cy="401760"/>
+            <a:ext cx="8960040" cy="401400"/>
           </a:xfrm>
           <a:prstGeom prst="rect">
             <a:avLst/>
@@ -40042,7 +39699,7 @@
         <p:spPr>
           <a:xfrm>
             <a:off x="585360" y="749880"/>
-            <a:ext cx="10697760" cy="291960"/>
+            <a:ext cx="10697400" cy="291600"/>
           </a:xfrm>
           <a:prstGeom prst="rect">
             <a:avLst/>
@@ -40099,7 +39756,7 @@
         <p:spPr>
           <a:xfrm>
             <a:off x="10168200" y="356760"/>
-            <a:ext cx="1416600" cy="200520"/>
+            <a:ext cx="1416240" cy="200160"/>
           </a:xfrm>
           <a:prstGeom prst="rect">
             <a:avLst/>
@@ -40129,7 +39786,7 @@
               </a:tabLst>
             </a:pPr>
             <a:r>
-              <a:rPr b="1" lang="en-US" sz="850" spc="75" strike="noStrike">
+              <a:rPr b="1" lang="en-US" sz="850" spc="72" strike="noStrike">
                 <a:solidFill>
                   <a:srgbClr val="2f67e8"/>
                 </a:solidFill>
@@ -40156,7 +39813,7 @@
         <p:spPr>
           <a:xfrm>
             <a:off x="658440" y="1234440"/>
-            <a:ext cx="3382560" cy="1416600"/>
+            <a:ext cx="3382200" cy="1416240"/>
           </a:xfrm>
           <a:prstGeom prst="roundRect">
             <a:avLst>
@@ -40207,7 +39864,7 @@
         <p:spPr>
           <a:xfrm>
             <a:off x="658440" y="1234440"/>
-            <a:ext cx="54000" cy="1416600"/>
+            <a:ext cx="53640" cy="1416240"/>
           </a:xfrm>
           <a:prstGeom prst="rect">
             <a:avLst/>
@@ -40256,7 +39913,7 @@
         <p:spPr>
           <a:xfrm>
             <a:off x="859680" y="1371600"/>
-            <a:ext cx="2998440" cy="227880"/>
+            <a:ext cx="2998080" cy="227520"/>
           </a:xfrm>
           <a:prstGeom prst="rect">
             <a:avLst/>
@@ -40313,7 +39970,7 @@
         <p:spPr>
           <a:xfrm>
             <a:off x="859680" y="1710000"/>
-            <a:ext cx="2998440" cy="813240"/>
+            <a:ext cx="2998080" cy="812880"/>
           </a:xfrm>
           <a:prstGeom prst="rect">
             <a:avLst/>
@@ -40422,7 +40079,7 @@
         <p:spPr>
           <a:xfrm>
             <a:off x="4297680" y="1234440"/>
-            <a:ext cx="3382560" cy="1416600"/>
+            <a:ext cx="3382200" cy="1416240"/>
           </a:xfrm>
           <a:prstGeom prst="roundRect">
             <a:avLst>
@@ -40473,7 +40130,7 @@
         <p:spPr>
           <a:xfrm>
             <a:off x="4297680" y="1234440"/>
-            <a:ext cx="54000" cy="1416600"/>
+            <a:ext cx="53640" cy="1416240"/>
           </a:xfrm>
           <a:prstGeom prst="rect">
             <a:avLst/>
@@ -40522,7 +40179,7 @@
         <p:spPr>
           <a:xfrm>
             <a:off x="4498920" y="1371600"/>
-            <a:ext cx="2998440" cy="227880"/>
+            <a:ext cx="2998080" cy="227520"/>
           </a:xfrm>
           <a:prstGeom prst="rect">
             <a:avLst/>
@@ -40579,7 +40236,7 @@
         <p:spPr>
           <a:xfrm>
             <a:off x="4498920" y="1710000"/>
-            <a:ext cx="2998440" cy="813240"/>
+            <a:ext cx="2998080" cy="812880"/>
           </a:xfrm>
           <a:prstGeom prst="rect">
             <a:avLst/>
@@ -40714,7 +40371,7 @@
         <p:spPr>
           <a:xfrm>
             <a:off x="7936920" y="1234440"/>
-            <a:ext cx="3583800" cy="1416600"/>
+            <a:ext cx="3583440" cy="1416240"/>
           </a:xfrm>
           <a:prstGeom prst="roundRect">
             <a:avLst>
@@ -40765,7 +40422,7 @@
         <p:spPr>
           <a:xfrm>
             <a:off x="7936920" y="1234440"/>
-            <a:ext cx="54000" cy="1416600"/>
+            <a:ext cx="53640" cy="1416240"/>
           </a:xfrm>
           <a:prstGeom prst="rect">
             <a:avLst/>
@@ -40814,7 +40471,7 @@
         <p:spPr>
           <a:xfrm>
             <a:off x="8138160" y="1371600"/>
-            <a:ext cx="3199680" cy="227880"/>
+            <a:ext cx="3199320" cy="227520"/>
           </a:xfrm>
           <a:prstGeom prst="rect">
             <a:avLst/>
@@ -40871,7 +40528,7 @@
         <p:spPr>
           <a:xfrm>
             <a:off x="8138160" y="1710000"/>
-            <a:ext cx="3199680" cy="813240"/>
+            <a:ext cx="3199320" cy="812880"/>
           </a:xfrm>
           <a:prstGeom prst="rect">
             <a:avLst/>
@@ -40928,7 +40585,7 @@
         <p:spPr>
           <a:xfrm>
             <a:off x="658440" y="3154680"/>
-            <a:ext cx="474840" cy="291960"/>
+            <a:ext cx="474480" cy="291600"/>
           </a:xfrm>
           <a:prstGeom prst="roundRect">
             <a:avLst>
@@ -40979,7 +40636,7 @@
         <p:spPr>
           <a:xfrm>
             <a:off x="658440" y="3218760"/>
-            <a:ext cx="474840" cy="109080"/>
+            <a:ext cx="474480" cy="108720"/>
           </a:xfrm>
           <a:prstGeom prst="rect">
             <a:avLst/>
@@ -41035,7 +40692,7 @@
         <p:spPr>
           <a:xfrm>
             <a:off x="1243440" y="3191400"/>
-            <a:ext cx="1188000" cy="200520"/>
+            <a:ext cx="1187640" cy="200160"/>
           </a:xfrm>
           <a:prstGeom prst="rect">
             <a:avLst/>
@@ -41091,7 +40748,7 @@
         <p:spPr>
           <a:xfrm>
             <a:off x="658440" y="3611880"/>
-            <a:ext cx="2331000" cy="1005120"/>
+            <a:ext cx="2330640" cy="1004760"/>
           </a:xfrm>
           <a:prstGeom prst="roundRect">
             <a:avLst>
@@ -41142,7 +40799,7 @@
         <p:spPr>
           <a:xfrm>
             <a:off x="658440" y="3611880"/>
-            <a:ext cx="54000" cy="1005120"/>
+            <a:ext cx="53640" cy="1004760"/>
           </a:xfrm>
           <a:prstGeom prst="rect">
             <a:avLst/>
@@ -41191,7 +40848,7 @@
         <p:spPr>
           <a:xfrm>
             <a:off x="859680" y="3749040"/>
-            <a:ext cx="1946880" cy="227880"/>
+            <a:ext cx="1946520" cy="227520"/>
           </a:xfrm>
           <a:prstGeom prst="rect">
             <a:avLst/>
@@ -41248,7 +40905,7 @@
         <p:spPr>
           <a:xfrm>
             <a:off x="859680" y="4087440"/>
-            <a:ext cx="1946880" cy="401760"/>
+            <a:ext cx="1946520" cy="401400"/>
           </a:xfrm>
           <a:prstGeom prst="rect">
             <a:avLst/>
@@ -41305,7 +40962,7 @@
         <p:spPr>
           <a:xfrm>
             <a:off x="3054240" y="3959280"/>
-            <a:ext cx="255240" cy="163800"/>
+            <a:ext cx="254880" cy="163440"/>
           </a:xfrm>
           <a:prstGeom prst="chevron">
             <a:avLst>
@@ -41356,7 +41013,7 @@
         <p:spPr>
           <a:xfrm>
             <a:off x="3383280" y="3611880"/>
-            <a:ext cx="2331000" cy="1005120"/>
+            <a:ext cx="2330640" cy="1004760"/>
           </a:xfrm>
           <a:prstGeom prst="roundRect">
             <a:avLst>
@@ -41407,7 +41064,7 @@
         <p:spPr>
           <a:xfrm>
             <a:off x="3383280" y="3611880"/>
-            <a:ext cx="54000" cy="1005120"/>
+            <a:ext cx="53640" cy="1004760"/>
           </a:xfrm>
           <a:prstGeom prst="rect">
             <a:avLst/>
@@ -41456,7 +41113,7 @@
         <p:spPr>
           <a:xfrm>
             <a:off x="3584520" y="3749040"/>
-            <a:ext cx="1946880" cy="227880"/>
+            <a:ext cx="1946520" cy="227520"/>
           </a:xfrm>
           <a:prstGeom prst="rect">
             <a:avLst/>
@@ -41513,7 +41170,7 @@
         <p:spPr>
           <a:xfrm>
             <a:off x="3584520" y="4087440"/>
-            <a:ext cx="1946880" cy="401760"/>
+            <a:ext cx="1946520" cy="401400"/>
           </a:xfrm>
           <a:prstGeom prst="rect">
             <a:avLst/>
@@ -41570,7 +41227,7 @@
         <p:spPr>
           <a:xfrm>
             <a:off x="5779080" y="3959280"/>
-            <a:ext cx="255240" cy="163800"/>
+            <a:ext cx="254880" cy="163440"/>
           </a:xfrm>
           <a:prstGeom prst="chevron">
             <a:avLst>
@@ -41621,7 +41278,7 @@
         <p:spPr>
           <a:xfrm>
             <a:off x="6108120" y="3611880"/>
-            <a:ext cx="2331000" cy="1005120"/>
+            <a:ext cx="2330640" cy="1004760"/>
           </a:xfrm>
           <a:prstGeom prst="roundRect">
             <a:avLst>
@@ -41672,7 +41329,7 @@
         <p:spPr>
           <a:xfrm>
             <a:off x="6108120" y="3611880"/>
-            <a:ext cx="54000" cy="1005120"/>
+            <a:ext cx="53640" cy="1004760"/>
           </a:xfrm>
           <a:prstGeom prst="rect">
             <a:avLst/>
@@ -41721,7 +41378,7 @@
         <p:spPr>
           <a:xfrm>
             <a:off x="6309360" y="3749040"/>
-            <a:ext cx="1946880" cy="227880"/>
+            <a:ext cx="1946520" cy="227520"/>
           </a:xfrm>
           <a:prstGeom prst="rect">
             <a:avLst/>
@@ -41778,7 +41435,7 @@
         <p:spPr>
           <a:xfrm>
             <a:off x="6309360" y="4087440"/>
-            <a:ext cx="1946880" cy="401760"/>
+            <a:ext cx="1946520" cy="401400"/>
           </a:xfrm>
           <a:prstGeom prst="rect">
             <a:avLst/>
@@ -41835,7 +41492,7 @@
         <p:spPr>
           <a:xfrm>
             <a:off x="8503920" y="3959280"/>
-            <a:ext cx="255240" cy="163800"/>
+            <a:ext cx="254880" cy="163440"/>
           </a:xfrm>
           <a:prstGeom prst="chevron">
             <a:avLst>
@@ -41886,7 +41543,7 @@
         <p:spPr>
           <a:xfrm>
             <a:off x="8832960" y="3611880"/>
-            <a:ext cx="2331000" cy="1005120"/>
+            <a:ext cx="2330640" cy="1004760"/>
           </a:xfrm>
           <a:prstGeom prst="roundRect">
             <a:avLst>
@@ -41937,7 +41594,7 @@
         <p:spPr>
           <a:xfrm>
             <a:off x="8832960" y="3611880"/>
-            <a:ext cx="54000" cy="1005120"/>
+            <a:ext cx="53640" cy="1004760"/>
           </a:xfrm>
           <a:prstGeom prst="rect">
             <a:avLst/>
@@ -41986,7 +41643,7 @@
         <p:spPr>
           <a:xfrm>
             <a:off x="9034200" y="3749040"/>
-            <a:ext cx="1946880" cy="227880"/>
+            <a:ext cx="1946520" cy="227520"/>
           </a:xfrm>
           <a:prstGeom prst="rect">
             <a:avLst/>
@@ -42043,7 +41700,7 @@
         <p:spPr>
           <a:xfrm>
             <a:off x="9034200" y="4087440"/>
-            <a:ext cx="1946880" cy="401760"/>
+            <a:ext cx="1946520" cy="401400"/>
           </a:xfrm>
           <a:prstGeom prst="rect">
             <a:avLst/>
@@ -42100,7 +41757,7 @@
         <p:spPr>
           <a:xfrm>
             <a:off x="658440" y="4892040"/>
-            <a:ext cx="5257080" cy="895320"/>
+            <a:ext cx="5256720" cy="894960"/>
           </a:xfrm>
           <a:prstGeom prst="roundRect">
             <a:avLst>
@@ -42151,7 +41808,7 @@
         <p:spPr>
           <a:xfrm>
             <a:off x="658440" y="4892040"/>
-            <a:ext cx="54000" cy="895320"/>
+            <a:ext cx="53640" cy="894960"/>
           </a:xfrm>
           <a:prstGeom prst="rect">
             <a:avLst/>
@@ -42200,7 +41857,7 @@
         <p:spPr>
           <a:xfrm>
             <a:off x="859680" y="5029200"/>
-            <a:ext cx="4872960" cy="227880"/>
+            <a:ext cx="4872600" cy="227520"/>
           </a:xfrm>
           <a:prstGeom prst="rect">
             <a:avLst/>
@@ -42257,7 +41914,7 @@
         <p:spPr>
           <a:xfrm>
             <a:off x="859680" y="5367600"/>
-            <a:ext cx="4872960" cy="291960"/>
+            <a:ext cx="4872600" cy="291600"/>
           </a:xfrm>
           <a:prstGeom prst="rect">
             <a:avLst/>
@@ -42314,7 +41971,7 @@
         <p:spPr>
           <a:xfrm>
             <a:off x="6144840" y="4892040"/>
-            <a:ext cx="5375880" cy="895320"/>
+            <a:ext cx="5375520" cy="894960"/>
           </a:xfrm>
           <a:prstGeom prst="roundRect">
             <a:avLst>
@@ -42365,7 +42022,7 @@
         <p:spPr>
           <a:xfrm>
             <a:off x="6144840" y="4892040"/>
-            <a:ext cx="54000" cy="895320"/>
+            <a:ext cx="53640" cy="894960"/>
           </a:xfrm>
           <a:prstGeom prst="rect">
             <a:avLst/>
@@ -42414,7 +42071,7 @@
         <p:spPr>
           <a:xfrm>
             <a:off x="6346080" y="5029200"/>
-            <a:ext cx="4991760" cy="227880"/>
+            <a:ext cx="4991400" cy="227520"/>
           </a:xfrm>
           <a:prstGeom prst="rect">
             <a:avLst/>
@@ -42471,7 +42128,7 @@
         <p:spPr>
           <a:xfrm>
             <a:off x="6346080" y="5367600"/>
-            <a:ext cx="4991760" cy="291960"/>
+            <a:ext cx="4991400" cy="291600"/>
           </a:xfrm>
           <a:prstGeom prst="rect">
             <a:avLst/>
@@ -42532,7 +42189,7 @@
         <p:spPr>
           <a:xfrm>
             <a:off x="11292840" y="6574680"/>
-            <a:ext cx="799200" cy="299160"/>
+            <a:ext cx="798840" cy="298800"/>
           </a:xfrm>
           <a:prstGeom prst="rect">
             <a:avLst/>
@@ -42574,7 +42231,7 @@
                 <a:tab algn="l" pos="0"/>
               </a:tabLst>
             </a:pPr>
-            <a:fld id="{4D10EB8B-0922-411B-8920-771397C9DBA5}" type="slidenum">
+            <a:fld id="{F02ADCE0-9193-432A-A4AE-6974F0B740E7}" type="slidenum">
               <a:rPr b="0" lang="en-US" sz="850" spc="-1" strike="noStrike">
                 <a:solidFill>
                   <a:srgbClr val="7b8494"/>
@@ -42582,7 +42239,7 @@
                 <a:latin typeface="Aptos"/>
                 <a:ea typeface="Aptos"/>
               </a:rPr>
-              <a:t>8</a:t>
+              <a:t>&lt;number&gt;</a:t>
             </a:fld>
             <a:endParaRPr b="0" lang="en-US" sz="850" spc="-1" strike="noStrike">
               <a:solidFill>
@@ -42632,7 +42289,7 @@
         <p:spPr>
           <a:xfrm>
             <a:off x="567000" y="292680"/>
-            <a:ext cx="8960400" cy="401760"/>
+            <a:ext cx="8960040" cy="401400"/>
           </a:xfrm>
           <a:prstGeom prst="rect">
             <a:avLst/>
@@ -42689,7 +42346,7 @@
         <p:spPr>
           <a:xfrm>
             <a:off x="585360" y="749880"/>
-            <a:ext cx="10697760" cy="291960"/>
+            <a:ext cx="10697400" cy="291600"/>
           </a:xfrm>
           <a:prstGeom prst="rect">
             <a:avLst/>
@@ -42746,7 +42403,7 @@
         <p:spPr>
           <a:xfrm>
             <a:off x="10168200" y="356760"/>
-            <a:ext cx="1416600" cy="200520"/>
+            <a:ext cx="1416240" cy="200160"/>
           </a:xfrm>
           <a:prstGeom prst="rect">
             <a:avLst/>
@@ -42776,7 +42433,7 @@
               </a:tabLst>
             </a:pPr>
             <a:r>
-              <a:rPr b="1" lang="en-US" sz="850" spc="75" strike="noStrike">
+              <a:rPr b="1" lang="en-US" sz="850" spc="72" strike="noStrike">
                 <a:solidFill>
                   <a:srgbClr val="2f67e8"/>
                 </a:solidFill>
@@ -42803,7 +42460,7 @@
         <p:spPr>
           <a:xfrm>
             <a:off x="658440" y="1234440"/>
-            <a:ext cx="3245400" cy="1828080"/>
+            <a:ext cx="3245040" cy="1827720"/>
           </a:xfrm>
           <a:prstGeom prst="roundRect">
             <a:avLst>
@@ -42854,7 +42511,7 @@
         <p:spPr>
           <a:xfrm>
             <a:off x="658440" y="1234440"/>
-            <a:ext cx="54000" cy="1828080"/>
+            <a:ext cx="53640" cy="1827720"/>
           </a:xfrm>
           <a:prstGeom prst="rect">
             <a:avLst/>
@@ -42903,7 +42560,7 @@
         <p:spPr>
           <a:xfrm>
             <a:off x="859680" y="1371600"/>
-            <a:ext cx="2861280" cy="227880"/>
+            <a:ext cx="2860920" cy="227520"/>
           </a:xfrm>
           <a:prstGeom prst="rect">
             <a:avLst/>
@@ -42960,7 +42617,7 @@
         <p:spPr>
           <a:xfrm>
             <a:off x="859680" y="1710000"/>
-            <a:ext cx="2861280" cy="1224720"/>
+            <a:ext cx="2860920" cy="1224360"/>
           </a:xfrm>
           <a:prstGeom prst="rect">
             <a:avLst/>
@@ -43095,7 +42752,7 @@
         <p:spPr>
           <a:xfrm>
             <a:off x="4096440" y="1856160"/>
-            <a:ext cx="502200" cy="255240"/>
+            <a:ext cx="501840" cy="254880"/>
           </a:xfrm>
           <a:prstGeom prst="chevron">
             <a:avLst>
@@ -43146,7 +42803,7 @@
         <p:spPr>
           <a:xfrm>
             <a:off x="4709160" y="1234440"/>
-            <a:ext cx="3245400" cy="1828080"/>
+            <a:ext cx="3245040" cy="1827720"/>
           </a:xfrm>
           <a:prstGeom prst="roundRect">
             <a:avLst>
@@ -43197,7 +42854,7 @@
         <p:spPr>
           <a:xfrm>
             <a:off x="4709160" y="1234440"/>
-            <a:ext cx="54000" cy="1828080"/>
+            <a:ext cx="53640" cy="1827720"/>
           </a:xfrm>
           <a:prstGeom prst="rect">
             <a:avLst/>
@@ -43246,7 +42903,7 @@
         <p:spPr>
           <a:xfrm>
             <a:off x="4910400" y="1371600"/>
-            <a:ext cx="2861280" cy="227880"/>
+            <a:ext cx="2860920" cy="227520"/>
           </a:xfrm>
           <a:prstGeom prst="rect">
             <a:avLst/>
@@ -43303,7 +42960,7 @@
         <p:spPr>
           <a:xfrm>
             <a:off x="4910400" y="1710000"/>
-            <a:ext cx="2861280" cy="1224720"/>
+            <a:ext cx="2860920" cy="1224360"/>
           </a:xfrm>
           <a:prstGeom prst="rect">
             <a:avLst/>
@@ -43438,7 +43095,7 @@
         <p:spPr>
           <a:xfrm>
             <a:off x="8156520" y="1856160"/>
-            <a:ext cx="502200" cy="255240"/>
+            <a:ext cx="501840" cy="254880"/>
           </a:xfrm>
           <a:prstGeom prst="chevron">
             <a:avLst>
@@ -43489,7 +43146,7 @@
         <p:spPr>
           <a:xfrm>
             <a:off x="8778240" y="1234440"/>
-            <a:ext cx="2742480" cy="1828080"/>
+            <a:ext cx="2742120" cy="1827720"/>
           </a:xfrm>
           <a:prstGeom prst="roundRect">
             <a:avLst>
@@ -43540,7 +43197,7 @@
         <p:spPr>
           <a:xfrm>
             <a:off x="8778240" y="1234440"/>
-            <a:ext cx="54000" cy="1828080"/>
+            <a:ext cx="53640" cy="1827720"/>
           </a:xfrm>
           <a:prstGeom prst="rect">
             <a:avLst/>
@@ -43589,7 +43246,7 @@
         <p:spPr>
           <a:xfrm>
             <a:off x="8979480" y="1371600"/>
-            <a:ext cx="2358360" cy="227880"/>
+            <a:ext cx="2358000" cy="227520"/>
           </a:xfrm>
           <a:prstGeom prst="rect">
             <a:avLst/>
@@ -43646,7 +43303,7 @@
         <p:spPr>
           <a:xfrm>
             <a:off x="8979480" y="1710000"/>
-            <a:ext cx="2358360" cy="1224720"/>
+            <a:ext cx="2358000" cy="1224360"/>
           </a:xfrm>
           <a:prstGeom prst="rect">
             <a:avLst/>
@@ -43781,7 +43438,7 @@
         <p:spPr>
           <a:xfrm>
             <a:off x="658440" y="3474720"/>
-            <a:ext cx="474840" cy="291960"/>
+            <a:ext cx="474480" cy="291600"/>
           </a:xfrm>
           <a:prstGeom prst="roundRect">
             <a:avLst>
@@ -43832,7 +43489,7 @@
         <p:spPr>
           <a:xfrm>
             <a:off x="658440" y="3538800"/>
-            <a:ext cx="474840" cy="109080"/>
+            <a:ext cx="474480" cy="108720"/>
           </a:xfrm>
           <a:prstGeom prst="rect">
             <a:avLst/>
@@ -43888,7 +43545,7 @@
         <p:spPr>
           <a:xfrm>
             <a:off x="1243440" y="3511440"/>
-            <a:ext cx="1919520" cy="200520"/>
+            <a:ext cx="1919160" cy="200160"/>
           </a:xfrm>
           <a:prstGeom prst="rect">
             <a:avLst/>
@@ -43944,7 +43601,7 @@
         <p:spPr>
           <a:xfrm>
             <a:off x="658440" y="3950280"/>
-            <a:ext cx="5211360" cy="730800"/>
+            <a:ext cx="5211000" cy="730440"/>
           </a:xfrm>
           <a:prstGeom prst="roundRect">
             <a:avLst>
@@ -43995,7 +43652,7 @@
         <p:spPr>
           <a:xfrm>
             <a:off x="658440" y="3950280"/>
-            <a:ext cx="54000" cy="730800"/>
+            <a:ext cx="53640" cy="730440"/>
           </a:xfrm>
           <a:prstGeom prst="rect">
             <a:avLst/>
@@ -44044,7 +43701,7 @@
         <p:spPr>
           <a:xfrm>
             <a:off x="859680" y="4087440"/>
-            <a:ext cx="4827240" cy="227880"/>
+            <a:ext cx="4826880" cy="227520"/>
           </a:xfrm>
           <a:prstGeom prst="rect">
             <a:avLst/>
@@ -44101,7 +43758,7 @@
         <p:spPr>
           <a:xfrm>
             <a:off x="859680" y="4425840"/>
-            <a:ext cx="4827240" cy="127440"/>
+            <a:ext cx="4826880" cy="127080"/>
           </a:xfrm>
           <a:prstGeom prst="rect">
             <a:avLst/>
@@ -44158,7 +43815,7 @@
         <p:spPr>
           <a:xfrm>
             <a:off x="6144840" y="3950280"/>
-            <a:ext cx="5211360" cy="730800"/>
+            <a:ext cx="5211000" cy="730440"/>
           </a:xfrm>
           <a:prstGeom prst="roundRect">
             <a:avLst>
@@ -44209,7 +43866,7 @@
         <p:spPr>
           <a:xfrm>
             <a:off x="6144840" y="3950280"/>
-            <a:ext cx="54000" cy="730800"/>
+            <a:ext cx="53640" cy="730440"/>
           </a:xfrm>
           <a:prstGeom prst="rect">
             <a:avLst/>
@@ -44258,7 +43915,7 @@
         <p:spPr>
           <a:xfrm>
             <a:off x="6346080" y="4087440"/>
-            <a:ext cx="4827240" cy="227880"/>
+            <a:ext cx="4826880" cy="227520"/>
           </a:xfrm>
           <a:prstGeom prst="rect">
             <a:avLst/>
@@ -44315,7 +43972,7 @@
         <p:spPr>
           <a:xfrm>
             <a:off x="6346080" y="4425840"/>
-            <a:ext cx="4827240" cy="127440"/>
+            <a:ext cx="4826880" cy="127080"/>
           </a:xfrm>
           <a:prstGeom prst="rect">
             <a:avLst/>
@@ -44372,7 +44029,7 @@
         <p:spPr>
           <a:xfrm>
             <a:off x="658440" y="4864680"/>
-            <a:ext cx="5211360" cy="730800"/>
+            <a:ext cx="5211000" cy="730440"/>
           </a:xfrm>
           <a:prstGeom prst="roundRect">
             <a:avLst>
@@ -44423,7 +44080,7 @@
         <p:spPr>
           <a:xfrm>
             <a:off x="658440" y="4864680"/>
-            <a:ext cx="54000" cy="730800"/>
+            <a:ext cx="53640" cy="730440"/>
           </a:xfrm>
           <a:prstGeom prst="rect">
             <a:avLst/>
@@ -44472,7 +44129,7 @@
         <p:spPr>
           <a:xfrm>
             <a:off x="859680" y="5001840"/>
-            <a:ext cx="4827240" cy="227880"/>
+            <a:ext cx="4826880" cy="227520"/>
           </a:xfrm>
           <a:prstGeom prst="rect">
             <a:avLst/>
@@ -44529,7 +44186,7 @@
         <p:spPr>
           <a:xfrm>
             <a:off x="859680" y="5340240"/>
-            <a:ext cx="4827240" cy="127440"/>
+            <a:ext cx="4826880" cy="127080"/>
           </a:xfrm>
           <a:prstGeom prst="rect">
             <a:avLst/>
@@ -44586,7 +44243,7 @@
         <p:spPr>
           <a:xfrm>
             <a:off x="6144840" y="4864680"/>
-            <a:ext cx="5211360" cy="730800"/>
+            <a:ext cx="5211000" cy="730440"/>
           </a:xfrm>
           <a:prstGeom prst="roundRect">
             <a:avLst>
@@ -44637,7 +44294,7 @@
         <p:spPr>
           <a:xfrm>
             <a:off x="6144840" y="4864680"/>
-            <a:ext cx="54000" cy="730800"/>
+            <a:ext cx="53640" cy="730440"/>
           </a:xfrm>
           <a:prstGeom prst="rect">
             <a:avLst/>
@@ -44686,7 +44343,7 @@
         <p:spPr>
           <a:xfrm>
             <a:off x="6346080" y="5001840"/>
-            <a:ext cx="4827240" cy="227880"/>
+            <a:ext cx="4826880" cy="227520"/>
           </a:xfrm>
           <a:prstGeom prst="rect">
             <a:avLst/>
@@ -44743,7 +44400,7 @@
         <p:spPr>
           <a:xfrm>
             <a:off x="6346080" y="5340240"/>
-            <a:ext cx="4827240" cy="127440"/>
+            <a:ext cx="4826880" cy="127080"/>
           </a:xfrm>
           <a:prstGeom prst="rect">
             <a:avLst/>
@@ -44804,7 +44461,7 @@
         <p:spPr>
           <a:xfrm>
             <a:off x="11292840" y="6574680"/>
-            <a:ext cx="799200" cy="299160"/>
+            <a:ext cx="798840" cy="298800"/>
           </a:xfrm>
           <a:prstGeom prst="rect">
             <a:avLst/>
@@ -44846,7 +44503,7 @@
                 <a:tab algn="l" pos="0"/>
               </a:tabLst>
             </a:pPr>
-            <a:fld id="{58620D8F-7A63-4CF0-9107-BF107971DAC1}" type="slidenum">
+            <a:fld id="{724D6616-5DC1-4264-92EA-23CE4671BDB5}" type="slidenum">
               <a:rPr b="0" lang="en-US" sz="850" spc="-1" strike="noStrike">
                 <a:solidFill>
                   <a:srgbClr val="7b8494"/>
@@ -44854,7 +44511,7 @@
                 <a:latin typeface="Aptos"/>
                 <a:ea typeface="Aptos"/>
               </a:rPr>
-              <a:t>9</a:t>
+              <a:t>&lt;number&gt;</a:t>
             </a:fld>
             <a:endParaRPr b="0" lang="en-US" sz="850" spc="-1" strike="noStrike">
               <a:solidFill>
